--- a/content/05-teaching-resources/slides/core/04-operators-input-output-and-program-flow.pptx
+++ b/content/05-teaching-resources/slides/core/04-operators-input-output-and-program-flow.pptx
@@ -8,13 +8,19 @@
     <p:sldId id="256" r:id="rId7"/>
     <p:sldId id="257" r:id="rId8"/>
     <p:sldId id="258" r:id="rId9"/>
-    <p:sldId id="259" r:id="rId11"/>
+    <p:sldId id="259" r:id="rId10"/>
     <p:sldId id="260" r:id="rId12"/>
     <p:sldId id="261" r:id="rId13"/>
     <p:sldId id="262" r:id="rId14"/>
     <p:sldId id="263" r:id="rId15"/>
     <p:sldId id="264" r:id="rId16"/>
     <p:sldId id="265" r:id="rId17"/>
+    <p:sldId id="266" r:id="rId18"/>
+    <p:sldId id="267" r:id="rId19"/>
+    <p:sldId id="268" r:id="rId20"/>
+    <p:sldId id="269" r:id="rId21"/>
+    <p:sldId id="270" r:id="rId22"/>
+    <p:sldId id="271" r:id="rId23"/>
   </p:sldIdLst>
   <p:sldSz cx="12191695" cy="6858000" type="screen4x3"/>
   <p:notesSz cx="6858000" cy="9144000"/>
@@ -581,7 +587,22 @@
           <a:lstStyle/>
           <a:p>
             <a:r>
-              <a:t>Give students a few minutes to answer on mini whiteboards or paper, then reveal the answers on the next slide.</a:t>
+              <a:t>Answers:</a:t>
+            </a:r>
+          </a:p>
+          <a:p>
+            <a:r>
+              <a:t>1. 3.</a:t>
+            </a:r>
+          </a:p>
+          <a:p>
+            <a:r>
+              <a:t>2. 2.</a:t>
+            </a:r>
+          </a:p>
+          <a:p>
+            <a:r>
+              <a:t>3. = assigns a value; == compares two values.</a:t>
             </a:r>
           </a:p>
         </p:txBody>
@@ -651,7 +672,22 @@
           <a:lstStyle/>
           <a:p>
             <a:r>
-              <a:t>Talk through any answers the class found difficult.</a:t>
+              <a:t>Answers:</a:t>
+            </a:r>
+          </a:p>
+          <a:p>
+            <a:r>
+              <a:t>1. 'a' (append).</a:t>
+            </a:r>
+          </a:p>
+          <a:p>
+            <a:r>
+              <a:t>2. Splits a line into a list at each comma.</a:t>
+            </a:r>
+          </a:p>
+          <a:p>
+            <a:r>
+              <a:t>3. Its contents are replaced.</a:t>
             </a:r>
           </a:p>
         </p:txBody>
@@ -677,6 +713,231 @@
 </file>
 
 <file path=ppt/notesSlides/notesSlide4.xml><?xml version="1.0" encoding="utf-8"?>
+<p:notes xmlns:a="http://schemas.openxmlformats.org/drawingml/2006/main" xmlns:p="http://schemas.openxmlformats.org/presentationml/2006/main" xmlns:r="http://schemas.openxmlformats.org/officeDocument/2006/relationships">
+  <p:cSld>
+    <p:spTree>
+      <p:nvGrpSpPr>
+        <p:cNvPr id="1" name=""/>
+        <p:cNvGrpSpPr/>
+        <p:nvPr/>
+      </p:nvGrpSpPr>
+      <p:grpSpPr>
+        <a:xfrm>
+          <a:off x="0" y="0"/>
+          <a:ext cx="0" cy="0"/>
+          <a:chOff x="0" y="0"/>
+          <a:chExt cx="0" cy="0"/>
+        </a:xfrm>
+      </p:grpSpPr>
+      <p:sp>
+        <p:nvSpPr>
+          <p:cNvPr id="2" name="Slide Image Placeholder 1"/>
+          <p:cNvSpPr>
+            <a:spLocks noGrp="1"/>
+          </p:cNvSpPr>
+          <p:nvPr>
+            <p:ph type="sldImg" idx="2"/>
+          </p:nvPr>
+        </p:nvSpPr>
+        <p:spPr/>
+      </p:sp>
+      <p:sp>
+        <p:nvSpPr>
+          <p:cNvPr id="3" name="Notes Placeholder 2"/>
+          <p:cNvSpPr>
+            <a:spLocks noGrp="1"/>
+          </p:cNvSpPr>
+          <p:nvPr>
+            <p:ph type="body" idx="3" sz="quarter"/>
+          </p:nvPr>
+        </p:nvSpPr>
+        <p:spPr/>
+        <p:txBody>
+          <a:bodyPr/>
+          <a:lstStyle/>
+          <a:p>
+            <a:r>
+              <a:t>Answers:</a:t>
+            </a:r>
+          </a:p>
+          <a:p>
+            <a:r>
+              <a:t>1. Five.</a:t>
+            </a:r>
+          </a:p>
+          <a:p>
+            <a:r>
+              <a:t>2. A while loop.</a:t>
+            </a:r>
+          </a:p>
+          <a:p>
+            <a:r>
+              <a:t>3. The condition never becoming false.</a:t>
+            </a:r>
+          </a:p>
+        </p:txBody>
+      </p:sp>
+      <p:sp>
+        <p:nvSpPr>
+          <p:cNvPr id="4" name="Slide Number Placeholder 3"/>
+          <p:cNvSpPr>
+            <a:spLocks noGrp="1"/>
+          </p:cNvSpPr>
+          <p:nvPr>
+            <p:ph type="sldNum" idx="5" sz="quarter"/>
+          </p:nvPr>
+        </p:nvSpPr>
+        <p:spPr/>
+      </p:sp>
+    </p:spTree>
+  </p:cSld>
+  <p:clrMapOvr>
+    <a:masterClrMapping/>
+  </p:clrMapOvr>
+</p:notes>
+</file>
+
+<file path=ppt/notesSlides/notesSlide5.xml><?xml version="1.0" encoding="utf-8"?>
+<p:notes xmlns:a="http://schemas.openxmlformats.org/drawingml/2006/main" xmlns:p="http://schemas.openxmlformats.org/presentationml/2006/main" xmlns:r="http://schemas.openxmlformats.org/officeDocument/2006/relationships">
+  <p:cSld>
+    <p:spTree>
+      <p:nvGrpSpPr>
+        <p:cNvPr id="1" name=""/>
+        <p:cNvGrpSpPr/>
+        <p:nvPr/>
+      </p:nvGrpSpPr>
+      <p:grpSpPr>
+        <a:xfrm>
+          <a:off x="0" y="0"/>
+          <a:ext cx="0" cy="0"/>
+          <a:chOff x="0" y="0"/>
+          <a:chExt cx="0" cy="0"/>
+        </a:xfrm>
+      </p:grpSpPr>
+      <p:sp>
+        <p:nvSpPr>
+          <p:cNvPr id="2" name="Slide Image Placeholder 1"/>
+          <p:cNvSpPr>
+            <a:spLocks noGrp="1"/>
+          </p:cNvSpPr>
+          <p:nvPr>
+            <p:ph type="sldImg" idx="2"/>
+          </p:nvPr>
+        </p:nvSpPr>
+        <p:spPr/>
+      </p:sp>
+      <p:sp>
+        <p:nvSpPr>
+          <p:cNvPr id="3" name="Notes Placeholder 2"/>
+          <p:cNvSpPr>
+            <a:spLocks noGrp="1"/>
+          </p:cNvSpPr>
+          <p:nvPr>
+            <p:ph type="body" idx="3" sz="quarter"/>
+          </p:nvPr>
+        </p:nvSpPr>
+        <p:spPr/>
+        <p:txBody>
+          <a:bodyPr/>
+          <a:lstStyle/>
+          <a:p>
+            <a:r>
+              <a:t>Give students a few minutes to answer on mini whiteboards or paper, then reveal the answers on the next slide.</a:t>
+            </a:r>
+          </a:p>
+        </p:txBody>
+      </p:sp>
+      <p:sp>
+        <p:nvSpPr>
+          <p:cNvPr id="4" name="Slide Number Placeholder 3"/>
+          <p:cNvSpPr>
+            <a:spLocks noGrp="1"/>
+          </p:cNvSpPr>
+          <p:nvPr>
+            <p:ph type="sldNum" idx="5" sz="quarter"/>
+          </p:nvPr>
+        </p:nvSpPr>
+        <p:spPr/>
+      </p:sp>
+    </p:spTree>
+  </p:cSld>
+  <p:clrMapOvr>
+    <a:masterClrMapping/>
+  </p:clrMapOvr>
+</p:notes>
+</file>
+
+<file path=ppt/notesSlides/notesSlide6.xml><?xml version="1.0" encoding="utf-8"?>
+<p:notes xmlns:a="http://schemas.openxmlformats.org/drawingml/2006/main" xmlns:p="http://schemas.openxmlformats.org/presentationml/2006/main" xmlns:r="http://schemas.openxmlformats.org/officeDocument/2006/relationships">
+  <p:cSld>
+    <p:spTree>
+      <p:nvGrpSpPr>
+        <p:cNvPr id="1" name=""/>
+        <p:cNvGrpSpPr/>
+        <p:nvPr/>
+      </p:nvGrpSpPr>
+      <p:grpSpPr>
+        <a:xfrm>
+          <a:off x="0" y="0"/>
+          <a:ext cx="0" cy="0"/>
+          <a:chOff x="0" y="0"/>
+          <a:chExt cx="0" cy="0"/>
+        </a:xfrm>
+      </p:grpSpPr>
+      <p:sp>
+        <p:nvSpPr>
+          <p:cNvPr id="2" name="Slide Image Placeholder 1"/>
+          <p:cNvSpPr>
+            <a:spLocks noGrp="1"/>
+          </p:cNvSpPr>
+          <p:nvPr>
+            <p:ph type="sldImg" idx="2"/>
+          </p:nvPr>
+        </p:nvSpPr>
+        <p:spPr/>
+      </p:sp>
+      <p:sp>
+        <p:nvSpPr>
+          <p:cNvPr id="3" name="Notes Placeholder 2"/>
+          <p:cNvSpPr>
+            <a:spLocks noGrp="1"/>
+          </p:cNvSpPr>
+          <p:nvPr>
+            <p:ph type="body" idx="3" sz="quarter"/>
+          </p:nvPr>
+        </p:nvSpPr>
+        <p:spPr/>
+        <p:txBody>
+          <a:bodyPr/>
+          <a:lstStyle/>
+          <a:p>
+            <a:r>
+              <a:t>Talk through any answers the class found difficult.</a:t>
+            </a:r>
+          </a:p>
+        </p:txBody>
+      </p:sp>
+      <p:sp>
+        <p:nvSpPr>
+          <p:cNvPr id="4" name="Slide Number Placeholder 3"/>
+          <p:cNvSpPr>
+            <a:spLocks noGrp="1"/>
+          </p:cNvSpPr>
+          <p:nvPr>
+            <p:ph type="sldNum" idx="5" sz="quarter"/>
+          </p:nvPr>
+        </p:nvSpPr>
+        <p:spPr/>
+      </p:sp>
+    </p:spTree>
+  </p:cSld>
+  <p:clrMapOvr>
+    <a:masterClrMapping/>
+  </p:clrMapOvr>
+</p:notes>
+</file>
+
+<file path=ppt/notesSlides/notesSlide7.xml><?xml version="1.0" encoding="utf-8"?>
 <p:notes xmlns:a="http://schemas.openxmlformats.org/drawingml/2006/main" xmlns:p="http://schemas.openxmlformats.org/presentationml/2006/main" xmlns:r="http://schemas.openxmlformats.org/officeDocument/2006/relationships">
   <p:cSld>
     <p:spTree>
@@ -4052,6 +4313,3515 @@
     <p:bg>
       <p:bgPr>
         <a:solidFill>
+          <a:srgbClr val="FFFFFF"/>
+        </a:solidFill>
+        <a:effectLst/>
+      </p:bgPr>
+    </p:bg>
+    <p:spTree>
+      <p:nvGrpSpPr>
+        <p:cNvPr id="1" name=""/>
+        <p:cNvGrpSpPr/>
+        <p:nvPr/>
+      </p:nvGrpSpPr>
+      <p:grpSpPr/>
+      <p:sp>
+        <p:nvSpPr>
+          <p:cNvPr id="2" name="TextBox 1"/>
+          <p:cNvSpPr txBox="1"/>
+          <p:nvPr/>
+        </p:nvSpPr>
+        <p:spPr>
+          <a:xfrm>
+            <a:off x="548640" y="320040"/>
+            <a:ext cx="11094415" cy="274320"/>
+          </a:xfrm>
+          <a:prstGeom prst="rect">
+            <a:avLst/>
+          </a:prstGeom>
+          <a:noFill/>
+        </p:spPr>
+        <p:txBody>
+          <a:bodyPr wrap="square" anchor="t" lIns="0" rIns="0" tIns="0" bIns="0"/>
+          <a:lstStyle/>
+          <a:p>
+            <a:pPr algn="l"/>
+            <a:r>
+              <a:rPr sz="1100" b="1" i="0">
+                <a:solidFill>
+                  <a:srgbClr val="54595D"/>
+                </a:solidFill>
+                <a:latin typeface="Calibri"/>
+              </a:rPr>
+              <a:t>CORE COMPONENT  ·  Core Paper 1</a:t>
+            </a:r>
+          </a:p>
+        </p:txBody>
+      </p:sp>
+      <p:sp>
+        <p:nvSpPr>
+          <p:cNvPr id="3" name="TextBox 2"/>
+          <p:cNvSpPr txBox="1"/>
+          <p:nvPr/>
+        </p:nvSpPr>
+        <p:spPr>
+          <a:xfrm>
+            <a:off x="548640" y="566928"/>
+            <a:ext cx="11094415" cy="822960"/>
+          </a:xfrm>
+          <a:prstGeom prst="rect">
+            <a:avLst/>
+          </a:prstGeom>
+          <a:noFill/>
+        </p:spPr>
+        <p:txBody>
+          <a:bodyPr wrap="square" anchor="ctr" lIns="0" rIns="0" tIns="0" bIns="0"/>
+          <a:lstStyle/>
+          <a:p>
+            <a:pPr algn="l"/>
+            <a:r>
+              <a:rPr sz="3200" b="1" i="0">
+                <a:solidFill>
+                  <a:srgbClr val="03306E"/>
+                </a:solidFill>
+                <a:latin typeface="Cambria"/>
+              </a:rPr>
+              <a:t>Iteration</a:t>
+            </a:r>
+          </a:p>
+        </p:txBody>
+      </p:sp>
+      <p:sp>
+        <p:nvSpPr>
+          <p:cNvPr id="4" name="TextBox 3"/>
+          <p:cNvSpPr txBox="1"/>
+          <p:nvPr/>
+        </p:nvSpPr>
+        <p:spPr>
+          <a:xfrm>
+            <a:off x="548640" y="6446520"/>
+            <a:ext cx="8229600" cy="274320"/>
+          </a:xfrm>
+          <a:prstGeom prst="rect">
+            <a:avLst/>
+          </a:prstGeom>
+          <a:noFill/>
+        </p:spPr>
+        <p:txBody>
+          <a:bodyPr wrap="square" anchor="t" lIns="0" rIns="0" tIns="0" bIns="0"/>
+          <a:lstStyle/>
+          <a:p>
+            <a:pPr algn="l"/>
+            <a:r>
+              <a:rPr sz="1000" b="0" i="0">
+                <a:solidFill>
+                  <a:srgbClr val="54595D"/>
+                </a:solidFill>
+                <a:latin typeface="Calibri"/>
+              </a:rPr>
+              <a:t>Digital Software Development T Level  ·  Operators, Input, Output and Program Flow</a:t>
+            </a:r>
+          </a:p>
+        </p:txBody>
+      </p:sp>
+      <p:sp>
+        <p:nvSpPr>
+          <p:cNvPr id="5" name="TextBox 4"/>
+          <p:cNvSpPr txBox="1"/>
+          <p:nvPr/>
+        </p:nvSpPr>
+        <p:spPr>
+          <a:xfrm>
+            <a:off x="10728655" y="6446520"/>
+            <a:ext cx="914400" cy="274320"/>
+          </a:xfrm>
+          <a:prstGeom prst="rect">
+            <a:avLst/>
+          </a:prstGeom>
+          <a:noFill/>
+        </p:spPr>
+        <p:txBody>
+          <a:bodyPr wrap="square" anchor="t" lIns="0" rIns="0" tIns="0" bIns="0"/>
+          <a:lstStyle/>
+          <a:p>
+            <a:pPr algn="r"/>
+            <a:r>
+              <a:rPr sz="1000" b="0" i="0">
+                <a:solidFill>
+                  <a:srgbClr val="54595D"/>
+                </a:solidFill>
+                <a:latin typeface="Calibri"/>
+              </a:rPr>
+              <a:t>10</a:t>
+            </a:r>
+          </a:p>
+        </p:txBody>
+      </p:sp>
+      <p:sp>
+        <p:nvSpPr>
+          <p:cNvPr id="6" name="TextBox 5"/>
+          <p:cNvSpPr txBox="1"/>
+          <p:nvPr/>
+        </p:nvSpPr>
+        <p:spPr>
+          <a:xfrm>
+            <a:off x="548640" y="1554480"/>
+            <a:ext cx="6720840" cy="4617720"/>
+          </a:xfrm>
+          <a:prstGeom prst="rect">
+            <a:avLst/>
+          </a:prstGeom>
+          <a:noFill/>
+        </p:spPr>
+        <p:txBody>
+          <a:bodyPr wrap="square" lIns="0" rIns="0" tIns="0" bIns="0">
+            <a:spAutoFit/>
+          </a:bodyPr>
+          <a:lstStyle/>
+          <a:p>
+            <a:pPr>
+              <a:spcAft>
+                <a:spcPts val="1320"/>
+              </a:spcAft>
+            </a:pPr>
+            <a:r>
+              <a:rPr sz="2200" b="0">
+                <a:solidFill>
+                  <a:srgbClr val="202122"/>
+                </a:solidFill>
+                <a:latin typeface="Calibri"/>
+              </a:rPr>
+              <a:t>Iteration repeats code.</a:t>
+            </a:r>
+          </a:p>
+          <a:p>
+            <a:pPr>
+              <a:spcAft>
+                <a:spcPts val="1320"/>
+              </a:spcAft>
+            </a:pPr>
+            <a:r>
+              <a:rPr sz="2200" b="0">
+                <a:solidFill>
+                  <a:srgbClr val="202122"/>
+                </a:solidFill>
+                <a:latin typeface="Calibri"/>
+              </a:rPr>
+              <a:t>A for loop is count-controlled. for i in range(5) runs five times, with i from 0 to 4. for name in names runs once for each item in a list. It can't loop forever by accident.</a:t>
+            </a:r>
+          </a:p>
+          <a:p>
+            <a:pPr>
+              <a:spcAft>
+                <a:spcPts val="1320"/>
+              </a:spcAft>
+            </a:pPr>
+            <a:r>
+              <a:rPr sz="2200" b="1">
+                <a:solidFill>
+                  <a:srgbClr val="202122"/>
+                </a:solidFill>
+                <a:latin typeface="Calibri"/>
+              </a:rPr>
+              <a:t>A while loop is condition-controlled:</a:t>
+            </a:r>
+            <a:r>
+              <a:rPr sz="2200" b="0">
+                <a:solidFill>
+                  <a:srgbClr val="202122"/>
+                </a:solidFill>
+                <a:latin typeface="Calibri"/>
+              </a:rPr>
+              <a:t> it repeats as long as its condition is true. Use it when you don't know how many times, such as asking until a valid answer is entered. Something inside the loop must change the condition, or it becomes an infinite loop.</a:t>
+            </a:r>
+          </a:p>
+        </p:txBody>
+      </p:sp>
+      <p:sp>
+        <p:nvSpPr>
+          <p:cNvPr id="7" name="Rounded Rectangle 6"/>
+          <p:cNvSpPr/>
+          <p:nvPr/>
+        </p:nvSpPr>
+        <p:spPr>
+          <a:xfrm>
+            <a:off x="7772400" y="1554480"/>
+            <a:ext cx="3867912" cy="4526280"/>
+          </a:xfrm>
+          <a:prstGeom prst="roundRect">
+            <a:avLst>
+              <a:gd name="adj" fmla="val 8000"/>
+            </a:avLst>
+          </a:prstGeom>
+          <a:solidFill>
+            <a:srgbClr val="03306E"/>
+          </a:solidFill>
+          <a:ln>
+            <a:noFill/>
+          </a:ln>
+          <a:effectLst/>
+        </p:spPr>
+        <p:style>
+          <a:lnRef idx="1">
+            <a:schemeClr val="accent1"/>
+          </a:lnRef>
+          <a:fillRef idx="3">
+            <a:schemeClr val="accent1"/>
+          </a:fillRef>
+          <a:effectRef idx="2">
+            <a:schemeClr val="accent1"/>
+          </a:effectRef>
+          <a:fontRef idx="minor">
+            <a:schemeClr val="lt1"/>
+          </a:fontRef>
+        </p:style>
+        <p:txBody>
+          <a:bodyPr rtlCol="0" anchor="ctr"/>
+          <a:lstStyle/>
+          <a:p/>
+        </p:txBody>
+      </p:sp>
+      <p:sp>
+        <p:nvSpPr>
+          <p:cNvPr id="8" name="Oval 7"/>
+          <p:cNvSpPr/>
+          <p:nvPr/>
+        </p:nvSpPr>
+        <p:spPr>
+          <a:xfrm>
+            <a:off x="8046720" y="1828800"/>
+            <a:ext cx="548640" cy="548640"/>
+          </a:xfrm>
+          <a:prstGeom prst="ellipse">
+            <a:avLst/>
+          </a:prstGeom>
+          <a:solidFill>
+            <a:srgbClr val="F2B705"/>
+          </a:solidFill>
+          <a:ln>
+            <a:noFill/>
+          </a:ln>
+          <a:effectLst/>
+        </p:spPr>
+        <p:style>
+          <a:lnRef idx="1">
+            <a:schemeClr val="accent1"/>
+          </a:lnRef>
+          <a:fillRef idx="3">
+            <a:schemeClr val="accent1"/>
+          </a:fillRef>
+          <a:effectRef idx="2">
+            <a:schemeClr val="accent1"/>
+          </a:effectRef>
+          <a:fontRef idx="minor">
+            <a:schemeClr val="lt1"/>
+          </a:fontRef>
+        </p:style>
+        <p:txBody>
+          <a:bodyPr rtlCol="0" anchor="ctr" lIns="0" rIns="0" tIns="0" bIns="0"/>
+          <a:lstStyle/>
+          <a:p>
+            <a:pPr algn="ctr"/>
+            <a:r>
+              <a:rPr sz="1300" b="1">
+                <a:solidFill>
+                  <a:srgbClr val="202122"/>
+                </a:solidFill>
+                <a:latin typeface="Calibri"/>
+              </a:rPr>
+              <a:t>e.g.</a:t>
+            </a:r>
+          </a:p>
+        </p:txBody>
+      </p:sp>
+      <p:sp>
+        <p:nvSpPr>
+          <p:cNvPr id="9" name="TextBox 8"/>
+          <p:cNvSpPr txBox="1"/>
+          <p:nvPr/>
+        </p:nvSpPr>
+        <p:spPr>
+          <a:xfrm>
+            <a:off x="8046720" y="2560320"/>
+            <a:ext cx="3291840" cy="365760"/>
+          </a:xfrm>
+          <a:prstGeom prst="rect">
+            <a:avLst/>
+          </a:prstGeom>
+          <a:noFill/>
+        </p:spPr>
+        <p:txBody>
+          <a:bodyPr wrap="square" anchor="t" lIns="0" rIns="0" tIns="0" bIns="0"/>
+          <a:lstStyle/>
+          <a:p>
+            <a:pPr algn="l"/>
+            <a:r>
+              <a:rPr sz="1300" b="1" i="0">
+                <a:solidFill>
+                  <a:srgbClr val="A9C8F0"/>
+                </a:solidFill>
+                <a:latin typeface="Calibri"/>
+              </a:rPr>
+              <a:t>EXAMPLE</a:t>
+            </a:r>
+          </a:p>
+        </p:txBody>
+      </p:sp>
+      <p:sp>
+        <p:nvSpPr>
+          <p:cNvPr id="10" name="TextBox 9"/>
+          <p:cNvSpPr txBox="1"/>
+          <p:nvPr/>
+        </p:nvSpPr>
+        <p:spPr>
+          <a:xfrm>
+            <a:off x="8046720" y="2971800"/>
+            <a:ext cx="3291840" cy="2971800"/>
+          </a:xfrm>
+          <a:prstGeom prst="rect">
+            <a:avLst/>
+          </a:prstGeom>
+          <a:noFill/>
+        </p:spPr>
+        <p:txBody>
+          <a:bodyPr wrap="square" anchor="t" lIns="0" rIns="0" tIns="0" bIns="0"/>
+          <a:lstStyle/>
+          <a:p>
+            <a:pPr algn="l"/>
+            <a:r>
+              <a:rPr sz="1900" b="0" i="0">
+                <a:solidFill>
+                  <a:srgbClr val="FFFFFF"/>
+                </a:solidFill>
+                <a:latin typeface="Cambria"/>
+              </a:rPr>
+              <a:t>while password != 'secret': password = input('Try again: ') keeps asking until the right password is typed.</a:t>
+            </a:r>
+          </a:p>
+        </p:txBody>
+      </p:sp>
+    </p:spTree>
+  </p:cSld>
+  <p:clrMapOvr>
+    <a:masterClrMapping/>
+  </p:clrMapOvr>
+</p:sld>
+</file>
+
+<file path=ppt/slides/slide11.xml><?xml version="1.0" encoding="utf-8"?>
+<p:sld xmlns:a="http://schemas.openxmlformats.org/drawingml/2006/main" xmlns:p="http://schemas.openxmlformats.org/presentationml/2006/main" xmlns:r="http://schemas.openxmlformats.org/officeDocument/2006/relationships">
+  <p:cSld>
+    <p:bg>
+      <p:bgPr>
+        <a:solidFill>
+          <a:srgbClr val="FFFFFF"/>
+        </a:solidFill>
+        <a:effectLst/>
+      </p:bgPr>
+    </p:bg>
+    <p:spTree>
+      <p:nvGrpSpPr>
+        <p:cNvPr id="1" name=""/>
+        <p:cNvGrpSpPr/>
+        <p:nvPr/>
+      </p:nvGrpSpPr>
+      <p:grpSpPr/>
+      <p:sp>
+        <p:nvSpPr>
+          <p:cNvPr id="2" name="TextBox 1"/>
+          <p:cNvSpPr txBox="1"/>
+          <p:nvPr/>
+        </p:nvSpPr>
+        <p:spPr>
+          <a:xfrm>
+            <a:off x="548640" y="320040"/>
+            <a:ext cx="11094415" cy="274320"/>
+          </a:xfrm>
+          <a:prstGeom prst="rect">
+            <a:avLst/>
+          </a:prstGeom>
+          <a:noFill/>
+        </p:spPr>
+        <p:txBody>
+          <a:bodyPr wrap="square" anchor="t" lIns="0" rIns="0" tIns="0" bIns="0"/>
+          <a:lstStyle/>
+          <a:p>
+            <a:pPr algn="l"/>
+            <a:r>
+              <a:rPr sz="1100" b="1" i="0">
+                <a:solidFill>
+                  <a:srgbClr val="54595D"/>
+                </a:solidFill>
+                <a:latin typeface="Calibri"/>
+              </a:rPr>
+              <a:t>CORE COMPONENT  ·  Core Paper 1</a:t>
+            </a:r>
+          </a:p>
+        </p:txBody>
+      </p:sp>
+      <p:sp>
+        <p:nvSpPr>
+          <p:cNvPr id="3" name="TextBox 2"/>
+          <p:cNvSpPr txBox="1"/>
+          <p:nvPr/>
+        </p:nvSpPr>
+        <p:spPr>
+          <a:xfrm>
+            <a:off x="548640" y="566928"/>
+            <a:ext cx="11094415" cy="822960"/>
+          </a:xfrm>
+          <a:prstGeom prst="rect">
+            <a:avLst/>
+          </a:prstGeom>
+          <a:noFill/>
+        </p:spPr>
+        <p:txBody>
+          <a:bodyPr wrap="square" anchor="ctr" lIns="0" rIns="0" tIns="0" bIns="0"/>
+          <a:lstStyle/>
+          <a:p>
+            <a:pPr algn="l"/>
+            <a:r>
+              <a:rPr sz="3200" b="1" i="0">
+                <a:solidFill>
+                  <a:srgbClr val="03306E"/>
+                </a:solidFill>
+                <a:latin typeface="Cambria"/>
+              </a:rPr>
+              <a:t>Iteration</a:t>
+            </a:r>
+          </a:p>
+        </p:txBody>
+      </p:sp>
+      <p:sp>
+        <p:nvSpPr>
+          <p:cNvPr id="4" name="TextBox 3"/>
+          <p:cNvSpPr txBox="1"/>
+          <p:nvPr/>
+        </p:nvSpPr>
+        <p:spPr>
+          <a:xfrm>
+            <a:off x="548640" y="6446520"/>
+            <a:ext cx="8229600" cy="274320"/>
+          </a:xfrm>
+          <a:prstGeom prst="rect">
+            <a:avLst/>
+          </a:prstGeom>
+          <a:noFill/>
+        </p:spPr>
+        <p:txBody>
+          <a:bodyPr wrap="square" anchor="t" lIns="0" rIns="0" tIns="0" bIns="0"/>
+          <a:lstStyle/>
+          <a:p>
+            <a:pPr algn="l"/>
+            <a:r>
+              <a:rPr sz="1000" b="0" i="0">
+                <a:solidFill>
+                  <a:srgbClr val="54595D"/>
+                </a:solidFill>
+                <a:latin typeface="Calibri"/>
+              </a:rPr>
+              <a:t>Digital Software Development T Level  ·  Operators, Input, Output and Program Flow</a:t>
+            </a:r>
+          </a:p>
+        </p:txBody>
+      </p:sp>
+      <p:sp>
+        <p:nvSpPr>
+          <p:cNvPr id="5" name="TextBox 4"/>
+          <p:cNvSpPr txBox="1"/>
+          <p:nvPr/>
+        </p:nvSpPr>
+        <p:spPr>
+          <a:xfrm>
+            <a:off x="10728655" y="6446520"/>
+            <a:ext cx="914400" cy="274320"/>
+          </a:xfrm>
+          <a:prstGeom prst="rect">
+            <a:avLst/>
+          </a:prstGeom>
+          <a:noFill/>
+        </p:spPr>
+        <p:txBody>
+          <a:bodyPr wrap="square" anchor="t" lIns="0" rIns="0" tIns="0" bIns="0"/>
+          <a:lstStyle/>
+          <a:p>
+            <a:pPr algn="r"/>
+            <a:r>
+              <a:rPr sz="1000" b="0" i="0">
+                <a:solidFill>
+                  <a:srgbClr val="54595D"/>
+                </a:solidFill>
+                <a:latin typeface="Calibri"/>
+              </a:rPr>
+              <a:t>11</a:t>
+            </a:r>
+          </a:p>
+        </p:txBody>
+      </p:sp>
+      <p:sp>
+        <p:nvSpPr>
+          <p:cNvPr id="6" name="Rounded Rectangle 5"/>
+          <p:cNvSpPr/>
+          <p:nvPr/>
+        </p:nvSpPr>
+        <p:spPr>
+          <a:xfrm>
+            <a:off x="548640" y="1600200"/>
+            <a:ext cx="5364327" cy="640080"/>
+          </a:xfrm>
+          <a:prstGeom prst="roundRect">
+            <a:avLst>
+              <a:gd name="adj" fmla="val 15000"/>
+            </a:avLst>
+          </a:prstGeom>
+          <a:solidFill>
+            <a:srgbClr val="03306E"/>
+          </a:solidFill>
+          <a:ln>
+            <a:noFill/>
+          </a:ln>
+          <a:effectLst/>
+        </p:spPr>
+        <p:style>
+          <a:lnRef idx="1">
+            <a:schemeClr val="accent1"/>
+          </a:lnRef>
+          <a:fillRef idx="3">
+            <a:schemeClr val="accent1"/>
+          </a:fillRef>
+          <a:effectRef idx="2">
+            <a:schemeClr val="accent1"/>
+          </a:effectRef>
+          <a:fontRef idx="minor">
+            <a:schemeClr val="lt1"/>
+          </a:fontRef>
+        </p:style>
+        <p:txBody>
+          <a:bodyPr rtlCol="0" anchor="ctr"/>
+          <a:lstStyle/>
+          <a:p/>
+        </p:txBody>
+      </p:sp>
+      <p:sp>
+        <p:nvSpPr>
+          <p:cNvPr id="7" name="TextBox 6"/>
+          <p:cNvSpPr txBox="1"/>
+          <p:nvPr/>
+        </p:nvSpPr>
+        <p:spPr>
+          <a:xfrm>
+            <a:off x="777240" y="1600200"/>
+            <a:ext cx="4907127" cy="640080"/>
+          </a:xfrm>
+          <a:prstGeom prst="rect">
+            <a:avLst/>
+          </a:prstGeom>
+          <a:noFill/>
+        </p:spPr>
+        <p:txBody>
+          <a:bodyPr wrap="square" anchor="ctr" lIns="0" rIns="0" tIns="0" bIns="0"/>
+          <a:lstStyle/>
+          <a:p>
+            <a:pPr algn="l"/>
+            <a:r>
+              <a:rPr sz="2000" b="1" i="0">
+                <a:solidFill>
+                  <a:srgbClr val="FFFFFF"/>
+                </a:solidFill>
+                <a:latin typeface="Calibri"/>
+              </a:rPr>
+              <a:t>Count-controlled: for</a:t>
+            </a:r>
+          </a:p>
+        </p:txBody>
+      </p:sp>
+      <p:sp>
+        <p:nvSpPr>
+          <p:cNvPr id="8" name="Rounded Rectangle 7"/>
+          <p:cNvSpPr/>
+          <p:nvPr/>
+        </p:nvSpPr>
+        <p:spPr>
+          <a:xfrm>
+            <a:off x="548640" y="2377440"/>
+            <a:ext cx="5364327" cy="3794760"/>
+          </a:xfrm>
+          <a:prstGeom prst="roundRect">
+            <a:avLst>
+              <a:gd name="adj" fmla="val 4000"/>
+            </a:avLst>
+          </a:prstGeom>
+          <a:solidFill>
+            <a:srgbClr val="EAF3FF"/>
+          </a:solidFill>
+          <a:ln>
+            <a:noFill/>
+          </a:ln>
+          <a:effectLst/>
+        </p:spPr>
+        <p:style>
+          <a:lnRef idx="1">
+            <a:schemeClr val="accent1"/>
+          </a:lnRef>
+          <a:fillRef idx="3">
+            <a:schemeClr val="accent1"/>
+          </a:fillRef>
+          <a:effectRef idx="2">
+            <a:schemeClr val="accent1"/>
+          </a:effectRef>
+          <a:fontRef idx="minor">
+            <a:schemeClr val="lt1"/>
+          </a:fontRef>
+        </p:style>
+        <p:txBody>
+          <a:bodyPr rtlCol="0" anchor="ctr"/>
+          <a:lstStyle/>
+          <a:p/>
+        </p:txBody>
+      </p:sp>
+      <p:sp>
+        <p:nvSpPr>
+          <p:cNvPr id="9" name="TextBox 8"/>
+          <p:cNvSpPr txBox="1"/>
+          <p:nvPr/>
+        </p:nvSpPr>
+        <p:spPr>
+          <a:xfrm>
+            <a:off x="822959" y="2606040"/>
+            <a:ext cx="4815687" cy="3337560"/>
+          </a:xfrm>
+          <a:prstGeom prst="rect">
+            <a:avLst/>
+          </a:prstGeom>
+          <a:noFill/>
+        </p:spPr>
+        <p:txBody>
+          <a:bodyPr wrap="square" lIns="0" rIns="0" tIns="0" bIns="0">
+            <a:spAutoFit/>
+          </a:bodyPr>
+          <a:lstStyle/>
+          <a:p>
+            <a:pPr marL="274320" indent="-274320">
+              <a:spcAft>
+                <a:spcPts val="990"/>
+              </a:spcAft>
+              <a:buClr>
+                <a:srgbClr val="0645AD"/>
+              </a:buClr>
+              <a:buFont typeface="Arial"/>
+              <a:buChar char="•"/>
+            </a:pPr>
+            <a:r>
+              <a:rPr sz="2200" b="0">
+                <a:solidFill>
+                  <a:srgbClr val="202122"/>
+                </a:solidFill>
+                <a:latin typeface="Calibri"/>
+              </a:rPr>
+              <a:t>Repeats a known number of times</a:t>
+            </a:r>
+          </a:p>
+          <a:p>
+            <a:pPr marL="274320" indent="-274320">
+              <a:spcAft>
+                <a:spcPts val="990"/>
+              </a:spcAft>
+              <a:buClr>
+                <a:srgbClr val="0645AD"/>
+              </a:buClr>
+              <a:buFont typeface="Arial"/>
+              <a:buChar char="•"/>
+            </a:pPr>
+            <a:r>
+              <a:rPr sz="2200" b="0">
+                <a:solidFill>
+                  <a:srgbClr val="202122"/>
+                </a:solidFill>
+                <a:latin typeface="Calibri"/>
+              </a:rPr>
+              <a:t>for i in range(10):</a:t>
+            </a:r>
+          </a:p>
+          <a:p>
+            <a:pPr marL="274320" indent="-274320">
+              <a:spcAft>
+                <a:spcPts val="990"/>
+              </a:spcAft>
+              <a:buClr>
+                <a:srgbClr val="0645AD"/>
+              </a:buClr>
+              <a:buFont typeface="Arial"/>
+              <a:buChar char="•"/>
+            </a:pPr>
+            <a:r>
+              <a:rPr sz="2200" b="1">
+                <a:solidFill>
+                  <a:srgbClr val="202122"/>
+                </a:solidFill>
+                <a:latin typeface="Calibri"/>
+              </a:rPr>
+              <a:t>Also loops over lists:</a:t>
+            </a:r>
+            <a:r>
+              <a:rPr sz="2200" b="0">
+                <a:solidFill>
+                  <a:srgbClr val="202122"/>
+                </a:solidFill>
+                <a:latin typeface="Calibri"/>
+              </a:rPr>
+              <a:t> for name in names:</a:t>
+            </a:r>
+          </a:p>
+          <a:p>
+            <a:pPr marL="274320" indent="-274320">
+              <a:spcAft>
+                <a:spcPts val="990"/>
+              </a:spcAft>
+              <a:buClr>
+                <a:srgbClr val="0645AD"/>
+              </a:buClr>
+              <a:buFont typeface="Arial"/>
+              <a:buChar char="•"/>
+            </a:pPr>
+            <a:r>
+              <a:rPr sz="2200" b="0">
+                <a:solidFill>
+                  <a:srgbClr val="202122"/>
+                </a:solidFill>
+                <a:latin typeface="Calibri"/>
+              </a:rPr>
+              <a:t>Cannot loop forever by mistake</a:t>
+            </a:r>
+          </a:p>
+        </p:txBody>
+      </p:sp>
+      <p:sp>
+        <p:nvSpPr>
+          <p:cNvPr id="10" name="Rounded Rectangle 9"/>
+          <p:cNvSpPr/>
+          <p:nvPr/>
+        </p:nvSpPr>
+        <p:spPr>
+          <a:xfrm>
+            <a:off x="6278727" y="1600200"/>
+            <a:ext cx="5364327" cy="640080"/>
+          </a:xfrm>
+          <a:prstGeom prst="roundRect">
+            <a:avLst>
+              <a:gd name="adj" fmla="val 15000"/>
+            </a:avLst>
+          </a:prstGeom>
+          <a:solidFill>
+            <a:srgbClr val="0645AD"/>
+          </a:solidFill>
+          <a:ln>
+            <a:noFill/>
+          </a:ln>
+          <a:effectLst/>
+        </p:spPr>
+        <p:style>
+          <a:lnRef idx="1">
+            <a:schemeClr val="accent1"/>
+          </a:lnRef>
+          <a:fillRef idx="3">
+            <a:schemeClr val="accent1"/>
+          </a:fillRef>
+          <a:effectRef idx="2">
+            <a:schemeClr val="accent1"/>
+          </a:effectRef>
+          <a:fontRef idx="minor">
+            <a:schemeClr val="lt1"/>
+          </a:fontRef>
+        </p:style>
+        <p:txBody>
+          <a:bodyPr rtlCol="0" anchor="ctr"/>
+          <a:lstStyle/>
+          <a:p/>
+        </p:txBody>
+      </p:sp>
+      <p:sp>
+        <p:nvSpPr>
+          <p:cNvPr id="11" name="TextBox 10"/>
+          <p:cNvSpPr txBox="1"/>
+          <p:nvPr/>
+        </p:nvSpPr>
+        <p:spPr>
+          <a:xfrm>
+            <a:off x="6507327" y="1600200"/>
+            <a:ext cx="4907127" cy="640080"/>
+          </a:xfrm>
+          <a:prstGeom prst="rect">
+            <a:avLst/>
+          </a:prstGeom>
+          <a:noFill/>
+        </p:spPr>
+        <p:txBody>
+          <a:bodyPr wrap="square" anchor="ctr" lIns="0" rIns="0" tIns="0" bIns="0"/>
+          <a:lstStyle/>
+          <a:p>
+            <a:pPr algn="l"/>
+            <a:r>
+              <a:rPr sz="2000" b="1" i="0">
+                <a:solidFill>
+                  <a:srgbClr val="FFFFFF"/>
+                </a:solidFill>
+                <a:latin typeface="Calibri"/>
+              </a:rPr>
+              <a:t>Condition-controlled: while</a:t>
+            </a:r>
+          </a:p>
+        </p:txBody>
+      </p:sp>
+      <p:sp>
+        <p:nvSpPr>
+          <p:cNvPr id="12" name="Rounded Rectangle 11"/>
+          <p:cNvSpPr/>
+          <p:nvPr/>
+        </p:nvSpPr>
+        <p:spPr>
+          <a:xfrm>
+            <a:off x="6278727" y="2377440"/>
+            <a:ext cx="5364327" cy="3794760"/>
+          </a:xfrm>
+          <a:prstGeom prst="roundRect">
+            <a:avLst>
+              <a:gd name="adj" fmla="val 4000"/>
+            </a:avLst>
+          </a:prstGeom>
+          <a:solidFill>
+            <a:srgbClr val="EAF3FF"/>
+          </a:solidFill>
+          <a:ln>
+            <a:noFill/>
+          </a:ln>
+          <a:effectLst/>
+        </p:spPr>
+        <p:style>
+          <a:lnRef idx="1">
+            <a:schemeClr val="accent1"/>
+          </a:lnRef>
+          <a:fillRef idx="3">
+            <a:schemeClr val="accent1"/>
+          </a:fillRef>
+          <a:effectRef idx="2">
+            <a:schemeClr val="accent1"/>
+          </a:effectRef>
+          <a:fontRef idx="minor">
+            <a:schemeClr val="lt1"/>
+          </a:fontRef>
+        </p:style>
+        <p:txBody>
+          <a:bodyPr rtlCol="0" anchor="ctr"/>
+          <a:lstStyle/>
+          <a:p/>
+        </p:txBody>
+      </p:sp>
+      <p:sp>
+        <p:nvSpPr>
+          <p:cNvPr id="13" name="TextBox 12"/>
+          <p:cNvSpPr txBox="1"/>
+          <p:nvPr/>
+        </p:nvSpPr>
+        <p:spPr>
+          <a:xfrm>
+            <a:off x="6553047" y="2606040"/>
+            <a:ext cx="4815687" cy="3337560"/>
+          </a:xfrm>
+          <a:prstGeom prst="rect">
+            <a:avLst/>
+          </a:prstGeom>
+          <a:noFill/>
+        </p:spPr>
+        <p:txBody>
+          <a:bodyPr wrap="square" lIns="0" rIns="0" tIns="0" bIns="0">
+            <a:spAutoFit/>
+          </a:bodyPr>
+          <a:lstStyle/>
+          <a:p>
+            <a:pPr marL="274320" indent="-274320">
+              <a:spcAft>
+                <a:spcPts val="990"/>
+              </a:spcAft>
+              <a:buClr>
+                <a:srgbClr val="0645AD"/>
+              </a:buClr>
+              <a:buFont typeface="Arial"/>
+              <a:buChar char="•"/>
+            </a:pPr>
+            <a:r>
+              <a:rPr sz="2200" b="0">
+                <a:solidFill>
+                  <a:srgbClr val="202122"/>
+                </a:solidFill>
+                <a:latin typeface="Calibri"/>
+              </a:rPr>
+              <a:t>Repeats while a condition is True</a:t>
+            </a:r>
+          </a:p>
+          <a:p>
+            <a:pPr marL="274320" indent="-274320">
+              <a:spcAft>
+                <a:spcPts val="990"/>
+              </a:spcAft>
+              <a:buClr>
+                <a:srgbClr val="0645AD"/>
+              </a:buClr>
+              <a:buFont typeface="Arial"/>
+              <a:buChar char="•"/>
+            </a:pPr>
+            <a:r>
+              <a:rPr sz="2200" b="0">
+                <a:solidFill>
+                  <a:srgbClr val="202122"/>
+                </a:solidFill>
+                <a:latin typeface="Calibri"/>
+              </a:rPr>
+              <a:t>while guess != answer:</a:t>
+            </a:r>
+          </a:p>
+          <a:p>
+            <a:pPr marL="274320" indent="-274320">
+              <a:spcAft>
+                <a:spcPts val="990"/>
+              </a:spcAft>
+              <a:buClr>
+                <a:srgbClr val="0645AD"/>
+              </a:buClr>
+              <a:buFont typeface="Arial"/>
+              <a:buChar char="•"/>
+            </a:pPr>
+            <a:r>
+              <a:rPr sz="2200" b="0">
+                <a:solidFill>
+                  <a:srgbClr val="202122"/>
+                </a:solidFill>
+                <a:latin typeface="Calibri"/>
+              </a:rPr>
+              <a:t>Good when you do not know how many times</a:t>
+            </a:r>
+          </a:p>
+          <a:p>
+            <a:pPr marL="274320" indent="-274320">
+              <a:spcAft>
+                <a:spcPts val="990"/>
+              </a:spcAft>
+              <a:buClr>
+                <a:srgbClr val="0645AD"/>
+              </a:buClr>
+              <a:buFont typeface="Arial"/>
+              <a:buChar char="•"/>
+            </a:pPr>
+            <a:r>
+              <a:rPr sz="2200" b="1">
+                <a:solidFill>
+                  <a:srgbClr val="202122"/>
+                </a:solidFill>
+                <a:latin typeface="Calibri"/>
+              </a:rPr>
+              <a:t>Risk:</a:t>
+            </a:r>
+            <a:r>
+              <a:rPr sz="2200" b="0">
+                <a:solidFill>
+                  <a:srgbClr val="202122"/>
+                </a:solidFill>
+                <a:latin typeface="Calibri"/>
+              </a:rPr>
+              <a:t> an infinite loop if the condition never changes</a:t>
+            </a:r>
+          </a:p>
+        </p:txBody>
+      </p:sp>
+    </p:spTree>
+  </p:cSld>
+  <p:clrMapOvr>
+    <a:masterClrMapping/>
+  </p:clrMapOvr>
+</p:sld>
+</file>
+
+<file path=ppt/slides/slide12.xml><?xml version="1.0" encoding="utf-8"?>
+<p:sld xmlns:a="http://schemas.openxmlformats.org/drawingml/2006/main" xmlns:p="http://schemas.openxmlformats.org/presentationml/2006/main" xmlns:r="http://schemas.openxmlformats.org/officeDocument/2006/relationships">
+  <p:cSld>
+    <p:bg>
+      <p:bgPr>
+        <a:solidFill>
+          <a:srgbClr val="FFFFFF"/>
+        </a:solidFill>
+        <a:effectLst/>
+      </p:bgPr>
+    </p:bg>
+    <p:spTree>
+      <p:nvGrpSpPr>
+        <p:cNvPr id="1" name=""/>
+        <p:cNvGrpSpPr/>
+        <p:nvPr/>
+      </p:nvGrpSpPr>
+      <p:grpSpPr/>
+      <p:sp>
+        <p:nvSpPr>
+          <p:cNvPr id="2" name="TextBox 1"/>
+          <p:cNvSpPr txBox="1"/>
+          <p:nvPr/>
+        </p:nvSpPr>
+        <p:spPr>
+          <a:xfrm>
+            <a:off x="548640" y="320040"/>
+            <a:ext cx="11094415" cy="274320"/>
+          </a:xfrm>
+          <a:prstGeom prst="rect">
+            <a:avLst/>
+          </a:prstGeom>
+          <a:noFill/>
+        </p:spPr>
+        <p:txBody>
+          <a:bodyPr wrap="square" anchor="t" lIns="0" rIns="0" tIns="0" bIns="0"/>
+          <a:lstStyle/>
+          <a:p>
+            <a:pPr algn="l"/>
+            <a:r>
+              <a:rPr sz="1100" b="1" i="0">
+                <a:solidFill>
+                  <a:srgbClr val="54595D"/>
+                </a:solidFill>
+                <a:latin typeface="Calibri"/>
+              </a:rPr>
+              <a:t>CORE COMPONENT  ·  Core Paper 1</a:t>
+            </a:r>
+          </a:p>
+        </p:txBody>
+      </p:sp>
+      <p:sp>
+        <p:nvSpPr>
+          <p:cNvPr id="3" name="TextBox 2"/>
+          <p:cNvSpPr txBox="1"/>
+          <p:nvPr/>
+        </p:nvSpPr>
+        <p:spPr>
+          <a:xfrm>
+            <a:off x="548640" y="566928"/>
+            <a:ext cx="11094415" cy="822960"/>
+          </a:xfrm>
+          <a:prstGeom prst="rect">
+            <a:avLst/>
+          </a:prstGeom>
+          <a:noFill/>
+        </p:spPr>
+        <p:txBody>
+          <a:bodyPr wrap="square" anchor="ctr" lIns="0" rIns="0" tIns="0" bIns="0"/>
+          <a:lstStyle/>
+          <a:p>
+            <a:pPr algn="l"/>
+            <a:r>
+              <a:rPr sz="3200" b="1" i="0">
+                <a:solidFill>
+                  <a:srgbClr val="03306E"/>
+                </a:solidFill>
+                <a:latin typeface="Cambria"/>
+              </a:rPr>
+              <a:t>Quick check: Iteration</a:t>
+            </a:r>
+          </a:p>
+        </p:txBody>
+      </p:sp>
+      <p:sp>
+        <p:nvSpPr>
+          <p:cNvPr id="4" name="TextBox 3"/>
+          <p:cNvSpPr txBox="1"/>
+          <p:nvPr/>
+        </p:nvSpPr>
+        <p:spPr>
+          <a:xfrm>
+            <a:off x="548640" y="6446520"/>
+            <a:ext cx="8229600" cy="274320"/>
+          </a:xfrm>
+          <a:prstGeom prst="rect">
+            <a:avLst/>
+          </a:prstGeom>
+          <a:noFill/>
+        </p:spPr>
+        <p:txBody>
+          <a:bodyPr wrap="square" anchor="t" lIns="0" rIns="0" tIns="0" bIns="0"/>
+          <a:lstStyle/>
+          <a:p>
+            <a:pPr algn="l"/>
+            <a:r>
+              <a:rPr sz="1000" b="0" i="0">
+                <a:solidFill>
+                  <a:srgbClr val="54595D"/>
+                </a:solidFill>
+                <a:latin typeface="Calibri"/>
+              </a:rPr>
+              <a:t>Digital Software Development T Level  ·  Operators, Input, Output and Program Flow</a:t>
+            </a:r>
+          </a:p>
+        </p:txBody>
+      </p:sp>
+      <p:sp>
+        <p:nvSpPr>
+          <p:cNvPr id="5" name="TextBox 4"/>
+          <p:cNvSpPr txBox="1"/>
+          <p:nvPr/>
+        </p:nvSpPr>
+        <p:spPr>
+          <a:xfrm>
+            <a:off x="10728655" y="6446520"/>
+            <a:ext cx="914400" cy="274320"/>
+          </a:xfrm>
+          <a:prstGeom prst="rect">
+            <a:avLst/>
+          </a:prstGeom>
+          <a:noFill/>
+        </p:spPr>
+        <p:txBody>
+          <a:bodyPr wrap="square" anchor="t" lIns="0" rIns="0" tIns="0" bIns="0"/>
+          <a:lstStyle/>
+          <a:p>
+            <a:pPr algn="r"/>
+            <a:r>
+              <a:rPr sz="1000" b="0" i="0">
+                <a:solidFill>
+                  <a:srgbClr val="54595D"/>
+                </a:solidFill>
+                <a:latin typeface="Calibri"/>
+              </a:rPr>
+              <a:t>12</a:t>
+            </a:r>
+          </a:p>
+        </p:txBody>
+      </p:sp>
+      <p:sp>
+        <p:nvSpPr>
+          <p:cNvPr id="6" name="Oval 5"/>
+          <p:cNvSpPr/>
+          <p:nvPr/>
+        </p:nvSpPr>
+        <p:spPr>
+          <a:xfrm>
+            <a:off x="548640" y="1691640"/>
+            <a:ext cx="502920" cy="502920"/>
+          </a:xfrm>
+          <a:prstGeom prst="ellipse">
+            <a:avLst/>
+          </a:prstGeom>
+          <a:solidFill>
+            <a:srgbClr val="F2B705"/>
+          </a:solidFill>
+          <a:ln>
+            <a:noFill/>
+          </a:ln>
+          <a:effectLst/>
+        </p:spPr>
+        <p:style>
+          <a:lnRef idx="1">
+            <a:schemeClr val="accent1"/>
+          </a:lnRef>
+          <a:fillRef idx="3">
+            <a:schemeClr val="accent1"/>
+          </a:fillRef>
+          <a:effectRef idx="2">
+            <a:schemeClr val="accent1"/>
+          </a:effectRef>
+          <a:fontRef idx="minor">
+            <a:schemeClr val="lt1"/>
+          </a:fontRef>
+        </p:style>
+        <p:txBody>
+          <a:bodyPr rtlCol="0" anchor="ctr" lIns="0" rIns="0" tIns="0" bIns="0"/>
+          <a:lstStyle/>
+          <a:p>
+            <a:pPr algn="ctr"/>
+            <a:r>
+              <a:rPr sz="1600" b="1">
+                <a:solidFill>
+                  <a:srgbClr val="202122"/>
+                </a:solidFill>
+                <a:latin typeface="Calibri"/>
+              </a:rPr>
+              <a:t>1</a:t>
+            </a:r>
+          </a:p>
+        </p:txBody>
+      </p:sp>
+      <p:sp>
+        <p:nvSpPr>
+          <p:cNvPr id="7" name="TextBox 6"/>
+          <p:cNvSpPr txBox="1"/>
+          <p:nvPr/>
+        </p:nvSpPr>
+        <p:spPr>
+          <a:xfrm>
+            <a:off x="1371600" y="1645920"/>
+            <a:ext cx="10271455" cy="1188720"/>
+          </a:xfrm>
+          <a:prstGeom prst="rect">
+            <a:avLst/>
+          </a:prstGeom>
+          <a:noFill/>
+        </p:spPr>
+        <p:txBody>
+          <a:bodyPr wrap="square" anchor="t" lIns="0" rIns="0" tIns="0" bIns="0"/>
+          <a:lstStyle/>
+          <a:p>
+            <a:pPr algn="l"/>
+            <a:r>
+              <a:rPr sz="2400" b="0" i="0">
+                <a:solidFill>
+                  <a:srgbClr val="202122"/>
+                </a:solidFill>
+                <a:latin typeface="Calibri"/>
+              </a:rPr>
+              <a:t>How many times does for i in range(5) run?</a:t>
+            </a:r>
+          </a:p>
+        </p:txBody>
+      </p:sp>
+      <p:sp>
+        <p:nvSpPr>
+          <p:cNvPr id="8" name="Oval 7"/>
+          <p:cNvSpPr/>
+          <p:nvPr/>
+        </p:nvSpPr>
+        <p:spPr>
+          <a:xfrm>
+            <a:off x="548640" y="3108960"/>
+            <a:ext cx="502920" cy="502920"/>
+          </a:xfrm>
+          <a:prstGeom prst="ellipse">
+            <a:avLst/>
+          </a:prstGeom>
+          <a:solidFill>
+            <a:srgbClr val="F2B705"/>
+          </a:solidFill>
+          <a:ln>
+            <a:noFill/>
+          </a:ln>
+          <a:effectLst/>
+        </p:spPr>
+        <p:style>
+          <a:lnRef idx="1">
+            <a:schemeClr val="accent1"/>
+          </a:lnRef>
+          <a:fillRef idx="3">
+            <a:schemeClr val="accent1"/>
+          </a:fillRef>
+          <a:effectRef idx="2">
+            <a:schemeClr val="accent1"/>
+          </a:effectRef>
+          <a:fontRef idx="minor">
+            <a:schemeClr val="lt1"/>
+          </a:fontRef>
+        </p:style>
+        <p:txBody>
+          <a:bodyPr rtlCol="0" anchor="ctr" lIns="0" rIns="0" tIns="0" bIns="0"/>
+          <a:lstStyle/>
+          <a:p>
+            <a:pPr algn="ctr"/>
+            <a:r>
+              <a:rPr sz="1600" b="1">
+                <a:solidFill>
+                  <a:srgbClr val="202122"/>
+                </a:solidFill>
+                <a:latin typeface="Calibri"/>
+              </a:rPr>
+              <a:t>2</a:t>
+            </a:r>
+          </a:p>
+        </p:txBody>
+      </p:sp>
+      <p:sp>
+        <p:nvSpPr>
+          <p:cNvPr id="9" name="TextBox 8"/>
+          <p:cNvSpPr txBox="1"/>
+          <p:nvPr/>
+        </p:nvSpPr>
+        <p:spPr>
+          <a:xfrm>
+            <a:off x="1371600" y="3063240"/>
+            <a:ext cx="10271455" cy="1188720"/>
+          </a:xfrm>
+          <a:prstGeom prst="rect">
+            <a:avLst/>
+          </a:prstGeom>
+          <a:noFill/>
+        </p:spPr>
+        <p:txBody>
+          <a:bodyPr wrap="square" anchor="t" lIns="0" rIns="0" tIns="0" bIns="0"/>
+          <a:lstStyle/>
+          <a:p>
+            <a:pPr algn="l"/>
+            <a:r>
+              <a:rPr sz="2400" b="0" i="0">
+                <a:solidFill>
+                  <a:srgbClr val="202122"/>
+                </a:solidFill>
+                <a:latin typeface="Calibri"/>
+              </a:rPr>
+              <a:t>Which loop suits 'keep asking until valid'?</a:t>
+            </a:r>
+          </a:p>
+        </p:txBody>
+      </p:sp>
+      <p:sp>
+        <p:nvSpPr>
+          <p:cNvPr id="10" name="Oval 9"/>
+          <p:cNvSpPr/>
+          <p:nvPr/>
+        </p:nvSpPr>
+        <p:spPr>
+          <a:xfrm>
+            <a:off x="548640" y="4526280"/>
+            <a:ext cx="502920" cy="502920"/>
+          </a:xfrm>
+          <a:prstGeom prst="ellipse">
+            <a:avLst/>
+          </a:prstGeom>
+          <a:solidFill>
+            <a:srgbClr val="F2B705"/>
+          </a:solidFill>
+          <a:ln>
+            <a:noFill/>
+          </a:ln>
+          <a:effectLst/>
+        </p:spPr>
+        <p:style>
+          <a:lnRef idx="1">
+            <a:schemeClr val="accent1"/>
+          </a:lnRef>
+          <a:fillRef idx="3">
+            <a:schemeClr val="accent1"/>
+          </a:fillRef>
+          <a:effectRef idx="2">
+            <a:schemeClr val="accent1"/>
+          </a:effectRef>
+          <a:fontRef idx="minor">
+            <a:schemeClr val="lt1"/>
+          </a:fontRef>
+        </p:style>
+        <p:txBody>
+          <a:bodyPr rtlCol="0" anchor="ctr" lIns="0" rIns="0" tIns="0" bIns="0"/>
+          <a:lstStyle/>
+          <a:p>
+            <a:pPr algn="ctr"/>
+            <a:r>
+              <a:rPr sz="1600" b="1">
+                <a:solidFill>
+                  <a:srgbClr val="202122"/>
+                </a:solidFill>
+                <a:latin typeface="Calibri"/>
+              </a:rPr>
+              <a:t>3</a:t>
+            </a:r>
+          </a:p>
+        </p:txBody>
+      </p:sp>
+      <p:sp>
+        <p:nvSpPr>
+          <p:cNvPr id="11" name="TextBox 10"/>
+          <p:cNvSpPr txBox="1"/>
+          <p:nvPr/>
+        </p:nvSpPr>
+        <p:spPr>
+          <a:xfrm>
+            <a:off x="1371600" y="4480560"/>
+            <a:ext cx="10271455" cy="1188720"/>
+          </a:xfrm>
+          <a:prstGeom prst="rect">
+            <a:avLst/>
+          </a:prstGeom>
+          <a:noFill/>
+        </p:spPr>
+        <p:txBody>
+          <a:bodyPr wrap="square" anchor="t" lIns="0" rIns="0" tIns="0" bIns="0"/>
+          <a:lstStyle/>
+          <a:p>
+            <a:pPr algn="l"/>
+            <a:r>
+              <a:rPr sz="2400" b="0" i="0">
+                <a:solidFill>
+                  <a:srgbClr val="202122"/>
+                </a:solidFill>
+                <a:latin typeface="Calibri"/>
+              </a:rPr>
+              <a:t>What causes an infinite loop?</a:t>
+            </a:r>
+          </a:p>
+        </p:txBody>
+      </p:sp>
+      <p:sp>
+        <p:nvSpPr>
+          <p:cNvPr id="12" name="TextBox 11"/>
+          <p:cNvSpPr txBox="1"/>
+          <p:nvPr/>
+        </p:nvSpPr>
+        <p:spPr>
+          <a:xfrm>
+            <a:off x="548640" y="5852160"/>
+            <a:ext cx="11094415" cy="365760"/>
+          </a:xfrm>
+          <a:prstGeom prst="rect">
+            <a:avLst/>
+          </a:prstGeom>
+          <a:noFill/>
+        </p:spPr>
+        <p:txBody>
+          <a:bodyPr wrap="square" anchor="t" lIns="0" rIns="0" tIns="0" bIns="0"/>
+          <a:lstStyle/>
+          <a:p>
+            <a:pPr algn="l"/>
+            <a:r>
+              <a:rPr sz="1300" b="0" i="1">
+                <a:solidFill>
+                  <a:srgbClr val="54595D"/>
+                </a:solidFill>
+                <a:latin typeface="Calibri"/>
+              </a:rPr>
+              <a:t>Answer on mini whiteboards or in your book. Answers are in the speaker notes.</a:t>
+            </a:r>
+          </a:p>
+        </p:txBody>
+      </p:sp>
+    </p:spTree>
+  </p:cSld>
+  <p:clrMapOvr>
+    <a:masterClrMapping/>
+  </p:clrMapOvr>
+</p:sld>
+</file>
+
+<file path=ppt/slides/slide13.xml><?xml version="1.0" encoding="utf-8"?>
+<p:sld xmlns:a="http://schemas.openxmlformats.org/drawingml/2006/main" xmlns:p="http://schemas.openxmlformats.org/presentationml/2006/main" xmlns:r="http://schemas.openxmlformats.org/officeDocument/2006/relationships">
+  <p:cSld>
+    <p:bg>
+      <p:bgPr>
+        <a:solidFill>
+          <a:srgbClr val="FFFFFF"/>
+        </a:solidFill>
+        <a:effectLst/>
+      </p:bgPr>
+    </p:bg>
+    <p:spTree>
+      <p:nvGrpSpPr>
+        <p:cNvPr id="1" name=""/>
+        <p:cNvGrpSpPr/>
+        <p:nvPr/>
+      </p:nvGrpSpPr>
+      <p:grpSpPr/>
+      <p:sp>
+        <p:nvSpPr>
+          <p:cNvPr id="2" name="TextBox 1"/>
+          <p:cNvSpPr txBox="1"/>
+          <p:nvPr/>
+        </p:nvSpPr>
+        <p:spPr>
+          <a:xfrm>
+            <a:off x="548640" y="320040"/>
+            <a:ext cx="11094415" cy="274320"/>
+          </a:xfrm>
+          <a:prstGeom prst="rect">
+            <a:avLst/>
+          </a:prstGeom>
+          <a:noFill/>
+        </p:spPr>
+        <p:txBody>
+          <a:bodyPr wrap="square" anchor="t" lIns="0" rIns="0" tIns="0" bIns="0"/>
+          <a:lstStyle/>
+          <a:p>
+            <a:pPr algn="l"/>
+            <a:r>
+              <a:rPr sz="1100" b="1" i="0">
+                <a:solidFill>
+                  <a:srgbClr val="54595D"/>
+                </a:solidFill>
+                <a:latin typeface="Calibri"/>
+              </a:rPr>
+              <a:t>CORE COMPONENT  ·  Core Paper 1</a:t>
+            </a:r>
+          </a:p>
+        </p:txBody>
+      </p:sp>
+      <p:sp>
+        <p:nvSpPr>
+          <p:cNvPr id="3" name="TextBox 2"/>
+          <p:cNvSpPr txBox="1"/>
+          <p:nvPr/>
+        </p:nvSpPr>
+        <p:spPr>
+          <a:xfrm>
+            <a:off x="548640" y="566928"/>
+            <a:ext cx="11094415" cy="822960"/>
+          </a:xfrm>
+          <a:prstGeom prst="rect">
+            <a:avLst/>
+          </a:prstGeom>
+          <a:noFill/>
+        </p:spPr>
+        <p:txBody>
+          <a:bodyPr wrap="square" anchor="ctr" lIns="0" rIns="0" tIns="0" bIns="0"/>
+          <a:lstStyle/>
+          <a:p>
+            <a:pPr algn="l"/>
+            <a:r>
+              <a:rPr sz="3200" b="1" i="0">
+                <a:solidFill>
+                  <a:srgbClr val="03306E"/>
+                </a:solidFill>
+                <a:latin typeface="Cambria"/>
+              </a:rPr>
+              <a:t>Check your understanding</a:t>
+            </a:r>
+          </a:p>
+        </p:txBody>
+      </p:sp>
+      <p:sp>
+        <p:nvSpPr>
+          <p:cNvPr id="4" name="TextBox 3"/>
+          <p:cNvSpPr txBox="1"/>
+          <p:nvPr/>
+        </p:nvSpPr>
+        <p:spPr>
+          <a:xfrm>
+            <a:off x="548640" y="6446520"/>
+            <a:ext cx="8229600" cy="274320"/>
+          </a:xfrm>
+          <a:prstGeom prst="rect">
+            <a:avLst/>
+          </a:prstGeom>
+          <a:noFill/>
+        </p:spPr>
+        <p:txBody>
+          <a:bodyPr wrap="square" anchor="t" lIns="0" rIns="0" tIns="0" bIns="0"/>
+          <a:lstStyle/>
+          <a:p>
+            <a:pPr algn="l"/>
+            <a:r>
+              <a:rPr sz="1000" b="0" i="0">
+                <a:solidFill>
+                  <a:srgbClr val="54595D"/>
+                </a:solidFill>
+                <a:latin typeface="Calibri"/>
+              </a:rPr>
+              <a:t>Digital Software Development T Level  ·  Operators, Input, Output and Program Flow</a:t>
+            </a:r>
+          </a:p>
+        </p:txBody>
+      </p:sp>
+      <p:sp>
+        <p:nvSpPr>
+          <p:cNvPr id="5" name="TextBox 4"/>
+          <p:cNvSpPr txBox="1"/>
+          <p:nvPr/>
+        </p:nvSpPr>
+        <p:spPr>
+          <a:xfrm>
+            <a:off x="10728655" y="6446520"/>
+            <a:ext cx="914400" cy="274320"/>
+          </a:xfrm>
+          <a:prstGeom prst="rect">
+            <a:avLst/>
+          </a:prstGeom>
+          <a:noFill/>
+        </p:spPr>
+        <p:txBody>
+          <a:bodyPr wrap="square" anchor="t" lIns="0" rIns="0" tIns="0" bIns="0"/>
+          <a:lstStyle/>
+          <a:p>
+            <a:pPr algn="r"/>
+            <a:r>
+              <a:rPr sz="1000" b="0" i="0">
+                <a:solidFill>
+                  <a:srgbClr val="54595D"/>
+                </a:solidFill>
+                <a:latin typeface="Calibri"/>
+              </a:rPr>
+              <a:t>13</a:t>
+            </a:r>
+          </a:p>
+        </p:txBody>
+      </p:sp>
+      <p:sp>
+        <p:nvSpPr>
+          <p:cNvPr id="6" name="Oval 5"/>
+          <p:cNvSpPr/>
+          <p:nvPr/>
+        </p:nvSpPr>
+        <p:spPr>
+          <a:xfrm>
+            <a:off x="548640" y="1618488"/>
+            <a:ext cx="411480" cy="411480"/>
+          </a:xfrm>
+          <a:prstGeom prst="ellipse">
+            <a:avLst/>
+          </a:prstGeom>
+          <a:solidFill>
+            <a:srgbClr val="F2B705"/>
+          </a:solidFill>
+          <a:ln>
+            <a:noFill/>
+          </a:ln>
+          <a:effectLst/>
+        </p:spPr>
+        <p:style>
+          <a:lnRef idx="1">
+            <a:schemeClr val="accent1"/>
+          </a:lnRef>
+          <a:fillRef idx="3">
+            <a:schemeClr val="accent1"/>
+          </a:fillRef>
+          <a:effectRef idx="2">
+            <a:schemeClr val="accent1"/>
+          </a:effectRef>
+          <a:fontRef idx="minor">
+            <a:schemeClr val="lt1"/>
+          </a:fontRef>
+        </p:style>
+        <p:txBody>
+          <a:bodyPr rtlCol="0" anchor="ctr" lIns="0" rIns="0" tIns="0" bIns="0"/>
+          <a:lstStyle/>
+          <a:p>
+            <a:pPr algn="ctr"/>
+            <a:r>
+              <a:rPr sz="1400" b="1">
+                <a:solidFill>
+                  <a:srgbClr val="202122"/>
+                </a:solidFill>
+                <a:latin typeface="Calibri"/>
+              </a:rPr>
+              <a:t>1</a:t>
+            </a:r>
+          </a:p>
+        </p:txBody>
+      </p:sp>
+      <p:sp>
+        <p:nvSpPr>
+          <p:cNvPr id="7" name="TextBox 6"/>
+          <p:cNvSpPr txBox="1"/>
+          <p:nvPr/>
+        </p:nvSpPr>
+        <p:spPr>
+          <a:xfrm>
+            <a:off x="1234440" y="1600200"/>
+            <a:ext cx="10408615" cy="791870"/>
+          </a:xfrm>
+          <a:prstGeom prst="rect">
+            <a:avLst/>
+          </a:prstGeom>
+          <a:noFill/>
+        </p:spPr>
+        <p:txBody>
+          <a:bodyPr wrap="square" anchor="t" lIns="0" rIns="0" tIns="0" bIns="0"/>
+          <a:lstStyle/>
+          <a:p>
+            <a:pPr algn="l"/>
+            <a:r>
+              <a:rPr sz="2200" b="0" i="0">
+                <a:solidFill>
+                  <a:srgbClr val="202122"/>
+                </a:solidFill>
+                <a:latin typeface="Calibri"/>
+              </a:rPr>
+              <a:t>What does 20 % 6 evaluate to?</a:t>
+            </a:r>
+          </a:p>
+        </p:txBody>
+      </p:sp>
+      <p:sp>
+        <p:nvSpPr>
+          <p:cNvPr id="8" name="Oval 7"/>
+          <p:cNvSpPr/>
+          <p:nvPr/>
+        </p:nvSpPr>
+        <p:spPr>
+          <a:xfrm>
+            <a:off x="548640" y="2574950"/>
+            <a:ext cx="411480" cy="411480"/>
+          </a:xfrm>
+          <a:prstGeom prst="ellipse">
+            <a:avLst/>
+          </a:prstGeom>
+          <a:solidFill>
+            <a:srgbClr val="F2B705"/>
+          </a:solidFill>
+          <a:ln>
+            <a:noFill/>
+          </a:ln>
+          <a:effectLst/>
+        </p:spPr>
+        <p:style>
+          <a:lnRef idx="1">
+            <a:schemeClr val="accent1"/>
+          </a:lnRef>
+          <a:fillRef idx="3">
+            <a:schemeClr val="accent1"/>
+          </a:fillRef>
+          <a:effectRef idx="2">
+            <a:schemeClr val="accent1"/>
+          </a:effectRef>
+          <a:fontRef idx="minor">
+            <a:schemeClr val="lt1"/>
+          </a:fontRef>
+        </p:style>
+        <p:txBody>
+          <a:bodyPr rtlCol="0" anchor="ctr" lIns="0" rIns="0" tIns="0" bIns="0"/>
+          <a:lstStyle/>
+          <a:p>
+            <a:pPr algn="ctr"/>
+            <a:r>
+              <a:rPr sz="1400" b="1">
+                <a:solidFill>
+                  <a:srgbClr val="202122"/>
+                </a:solidFill>
+                <a:latin typeface="Calibri"/>
+              </a:rPr>
+              <a:t>2</a:t>
+            </a:r>
+          </a:p>
+        </p:txBody>
+      </p:sp>
+      <p:sp>
+        <p:nvSpPr>
+          <p:cNvPr id="9" name="TextBox 8"/>
+          <p:cNvSpPr txBox="1"/>
+          <p:nvPr/>
+        </p:nvSpPr>
+        <p:spPr>
+          <a:xfrm>
+            <a:off x="1234440" y="2556662"/>
+            <a:ext cx="10408615" cy="791870"/>
+          </a:xfrm>
+          <a:prstGeom prst="rect">
+            <a:avLst/>
+          </a:prstGeom>
+          <a:noFill/>
+        </p:spPr>
+        <p:txBody>
+          <a:bodyPr wrap="square" anchor="t" lIns="0" rIns="0" tIns="0" bIns="0"/>
+          <a:lstStyle/>
+          <a:p>
+            <a:pPr algn="l"/>
+            <a:r>
+              <a:rPr sz="2200" b="0" i="0">
+                <a:solidFill>
+                  <a:srgbClr val="202122"/>
+                </a:solidFill>
+                <a:latin typeface="Calibri"/>
+              </a:rPr>
+              <a:t>Which operator checks two values are not equal?</a:t>
+            </a:r>
+          </a:p>
+        </p:txBody>
+      </p:sp>
+      <p:sp>
+        <p:nvSpPr>
+          <p:cNvPr id="10" name="Oval 9"/>
+          <p:cNvSpPr/>
+          <p:nvPr/>
+        </p:nvSpPr>
+        <p:spPr>
+          <a:xfrm>
+            <a:off x="548640" y="3531412"/>
+            <a:ext cx="411480" cy="411480"/>
+          </a:xfrm>
+          <a:prstGeom prst="ellipse">
+            <a:avLst/>
+          </a:prstGeom>
+          <a:solidFill>
+            <a:srgbClr val="F2B705"/>
+          </a:solidFill>
+          <a:ln>
+            <a:noFill/>
+          </a:ln>
+          <a:effectLst/>
+        </p:spPr>
+        <p:style>
+          <a:lnRef idx="1">
+            <a:schemeClr val="accent1"/>
+          </a:lnRef>
+          <a:fillRef idx="3">
+            <a:schemeClr val="accent1"/>
+          </a:fillRef>
+          <a:effectRef idx="2">
+            <a:schemeClr val="accent1"/>
+          </a:effectRef>
+          <a:fontRef idx="minor">
+            <a:schemeClr val="lt1"/>
+          </a:fontRef>
+        </p:style>
+        <p:txBody>
+          <a:bodyPr rtlCol="0" anchor="ctr" lIns="0" rIns="0" tIns="0" bIns="0"/>
+          <a:lstStyle/>
+          <a:p>
+            <a:pPr algn="ctr"/>
+            <a:r>
+              <a:rPr sz="1400" b="1">
+                <a:solidFill>
+                  <a:srgbClr val="202122"/>
+                </a:solidFill>
+                <a:latin typeface="Calibri"/>
+              </a:rPr>
+              <a:t>3</a:t>
+            </a:r>
+          </a:p>
+        </p:txBody>
+      </p:sp>
+      <p:sp>
+        <p:nvSpPr>
+          <p:cNvPr id="11" name="TextBox 10"/>
+          <p:cNvSpPr txBox="1"/>
+          <p:nvPr/>
+        </p:nvSpPr>
+        <p:spPr>
+          <a:xfrm>
+            <a:off x="1234440" y="3513124"/>
+            <a:ext cx="10408615" cy="791870"/>
+          </a:xfrm>
+          <a:prstGeom prst="rect">
+            <a:avLst/>
+          </a:prstGeom>
+          <a:noFill/>
+        </p:spPr>
+        <p:txBody>
+          <a:bodyPr wrap="square" anchor="t" lIns="0" rIns="0" tIns="0" bIns="0"/>
+          <a:lstStyle/>
+          <a:p>
+            <a:pPr algn="l"/>
+            <a:r>
+              <a:rPr sz="2200" b="0" i="0">
+                <a:solidFill>
+                  <a:srgbClr val="202122"/>
+                </a:solidFill>
+                <a:latin typeface="Calibri"/>
+              </a:rPr>
+              <a:t>Which file mode adds to the end of a file without deleting it?</a:t>
+            </a:r>
+          </a:p>
+        </p:txBody>
+      </p:sp>
+      <p:sp>
+        <p:nvSpPr>
+          <p:cNvPr id="12" name="Oval 11"/>
+          <p:cNvSpPr/>
+          <p:nvPr/>
+        </p:nvSpPr>
+        <p:spPr>
+          <a:xfrm>
+            <a:off x="548640" y="4487875"/>
+            <a:ext cx="411480" cy="411480"/>
+          </a:xfrm>
+          <a:prstGeom prst="ellipse">
+            <a:avLst/>
+          </a:prstGeom>
+          <a:solidFill>
+            <a:srgbClr val="F2B705"/>
+          </a:solidFill>
+          <a:ln>
+            <a:noFill/>
+          </a:ln>
+          <a:effectLst/>
+        </p:spPr>
+        <p:style>
+          <a:lnRef idx="1">
+            <a:schemeClr val="accent1"/>
+          </a:lnRef>
+          <a:fillRef idx="3">
+            <a:schemeClr val="accent1"/>
+          </a:fillRef>
+          <a:effectRef idx="2">
+            <a:schemeClr val="accent1"/>
+          </a:effectRef>
+          <a:fontRef idx="minor">
+            <a:schemeClr val="lt1"/>
+          </a:fontRef>
+        </p:style>
+        <p:txBody>
+          <a:bodyPr rtlCol="0" anchor="ctr" lIns="0" rIns="0" tIns="0" bIns="0"/>
+          <a:lstStyle/>
+          <a:p>
+            <a:pPr algn="ctr"/>
+            <a:r>
+              <a:rPr sz="1400" b="1">
+                <a:solidFill>
+                  <a:srgbClr val="202122"/>
+                </a:solidFill>
+                <a:latin typeface="Calibri"/>
+              </a:rPr>
+              <a:t>4</a:t>
+            </a:r>
+          </a:p>
+        </p:txBody>
+      </p:sp>
+      <p:sp>
+        <p:nvSpPr>
+          <p:cNvPr id="13" name="TextBox 12"/>
+          <p:cNvSpPr txBox="1"/>
+          <p:nvPr/>
+        </p:nvSpPr>
+        <p:spPr>
+          <a:xfrm>
+            <a:off x="1234440" y="4469587"/>
+            <a:ext cx="10408615" cy="791870"/>
+          </a:xfrm>
+          <a:prstGeom prst="rect">
+            <a:avLst/>
+          </a:prstGeom>
+          <a:noFill/>
+        </p:spPr>
+        <p:txBody>
+          <a:bodyPr wrap="square" anchor="t" lIns="0" rIns="0" tIns="0" bIns="0"/>
+          <a:lstStyle/>
+          <a:p>
+            <a:pPr algn="l"/>
+            <a:r>
+              <a:rPr sz="2200" b="0" i="0">
+                <a:solidFill>
+                  <a:srgbClr val="202122"/>
+                </a:solidFill>
+                <a:latin typeface="Calibri"/>
+              </a:rPr>
+              <a:t>Which loop suits 'keep asking until the password is right'?</a:t>
+            </a:r>
+          </a:p>
+        </p:txBody>
+      </p:sp>
+      <p:sp>
+        <p:nvSpPr>
+          <p:cNvPr id="14" name="Oval 13"/>
+          <p:cNvSpPr/>
+          <p:nvPr/>
+        </p:nvSpPr>
+        <p:spPr>
+          <a:xfrm>
+            <a:off x="548640" y="5444337"/>
+            <a:ext cx="411480" cy="411480"/>
+          </a:xfrm>
+          <a:prstGeom prst="ellipse">
+            <a:avLst/>
+          </a:prstGeom>
+          <a:solidFill>
+            <a:srgbClr val="F2B705"/>
+          </a:solidFill>
+          <a:ln>
+            <a:noFill/>
+          </a:ln>
+          <a:effectLst/>
+        </p:spPr>
+        <p:style>
+          <a:lnRef idx="1">
+            <a:schemeClr val="accent1"/>
+          </a:lnRef>
+          <a:fillRef idx="3">
+            <a:schemeClr val="accent1"/>
+          </a:fillRef>
+          <a:effectRef idx="2">
+            <a:schemeClr val="accent1"/>
+          </a:effectRef>
+          <a:fontRef idx="minor">
+            <a:schemeClr val="lt1"/>
+          </a:fontRef>
+        </p:style>
+        <p:txBody>
+          <a:bodyPr rtlCol="0" anchor="ctr" lIns="0" rIns="0" tIns="0" bIns="0"/>
+          <a:lstStyle/>
+          <a:p>
+            <a:pPr algn="ctr"/>
+            <a:r>
+              <a:rPr sz="1400" b="1">
+                <a:solidFill>
+                  <a:srgbClr val="202122"/>
+                </a:solidFill>
+                <a:latin typeface="Calibri"/>
+              </a:rPr>
+              <a:t>5</a:t>
+            </a:r>
+          </a:p>
+        </p:txBody>
+      </p:sp>
+      <p:sp>
+        <p:nvSpPr>
+          <p:cNvPr id="15" name="TextBox 14"/>
+          <p:cNvSpPr txBox="1"/>
+          <p:nvPr/>
+        </p:nvSpPr>
+        <p:spPr>
+          <a:xfrm>
+            <a:off x="1234440" y="5426049"/>
+            <a:ext cx="10408615" cy="791870"/>
+          </a:xfrm>
+          <a:prstGeom prst="rect">
+            <a:avLst/>
+          </a:prstGeom>
+          <a:noFill/>
+        </p:spPr>
+        <p:txBody>
+          <a:bodyPr wrap="square" anchor="t" lIns="0" rIns="0" tIns="0" bIns="0"/>
+          <a:lstStyle/>
+          <a:p>
+            <a:pPr algn="l"/>
+            <a:r>
+              <a:rPr sz="2200" b="0" i="0">
+                <a:solidFill>
+                  <a:srgbClr val="202122"/>
+                </a:solidFill>
+                <a:latin typeface="Calibri"/>
+              </a:rPr>
+              <a:t>Why must a file be closed?</a:t>
+            </a:r>
+          </a:p>
+        </p:txBody>
+      </p:sp>
+    </p:spTree>
+  </p:cSld>
+  <p:clrMapOvr>
+    <a:masterClrMapping/>
+  </p:clrMapOvr>
+</p:sld>
+</file>
+
+<file path=ppt/slides/slide14.xml><?xml version="1.0" encoding="utf-8"?>
+<p:sld xmlns:a="http://schemas.openxmlformats.org/drawingml/2006/main" xmlns:p="http://schemas.openxmlformats.org/presentationml/2006/main" xmlns:r="http://schemas.openxmlformats.org/officeDocument/2006/relationships">
+  <p:cSld>
+    <p:bg>
+      <p:bgPr>
+        <a:solidFill>
+          <a:srgbClr val="FFFFFF"/>
+        </a:solidFill>
+        <a:effectLst/>
+      </p:bgPr>
+    </p:bg>
+    <p:spTree>
+      <p:nvGrpSpPr>
+        <p:cNvPr id="1" name=""/>
+        <p:cNvGrpSpPr/>
+        <p:nvPr/>
+      </p:nvGrpSpPr>
+      <p:grpSpPr/>
+      <p:sp>
+        <p:nvSpPr>
+          <p:cNvPr id="2" name="TextBox 1"/>
+          <p:cNvSpPr txBox="1"/>
+          <p:nvPr/>
+        </p:nvSpPr>
+        <p:spPr>
+          <a:xfrm>
+            <a:off x="548640" y="320040"/>
+            <a:ext cx="11094415" cy="274320"/>
+          </a:xfrm>
+          <a:prstGeom prst="rect">
+            <a:avLst/>
+          </a:prstGeom>
+          <a:noFill/>
+        </p:spPr>
+        <p:txBody>
+          <a:bodyPr wrap="square" anchor="t" lIns="0" rIns="0" tIns="0" bIns="0"/>
+          <a:lstStyle/>
+          <a:p>
+            <a:pPr algn="l"/>
+            <a:r>
+              <a:rPr sz="1100" b="1" i="0">
+                <a:solidFill>
+                  <a:srgbClr val="54595D"/>
+                </a:solidFill>
+                <a:latin typeface="Calibri"/>
+              </a:rPr>
+              <a:t>CORE COMPONENT  ·  Core Paper 1</a:t>
+            </a:r>
+          </a:p>
+        </p:txBody>
+      </p:sp>
+      <p:sp>
+        <p:nvSpPr>
+          <p:cNvPr id="3" name="TextBox 2"/>
+          <p:cNvSpPr txBox="1"/>
+          <p:nvPr/>
+        </p:nvSpPr>
+        <p:spPr>
+          <a:xfrm>
+            <a:off x="548640" y="566928"/>
+            <a:ext cx="11094415" cy="822960"/>
+          </a:xfrm>
+          <a:prstGeom prst="rect">
+            <a:avLst/>
+          </a:prstGeom>
+          <a:noFill/>
+        </p:spPr>
+        <p:txBody>
+          <a:bodyPr wrap="square" anchor="ctr" lIns="0" rIns="0" tIns="0" bIns="0"/>
+          <a:lstStyle/>
+          <a:p>
+            <a:pPr algn="l"/>
+            <a:r>
+              <a:rPr sz="3200" b="1" i="0">
+                <a:solidFill>
+                  <a:srgbClr val="03306E"/>
+                </a:solidFill>
+                <a:latin typeface="Cambria"/>
+              </a:rPr>
+              <a:t>Answers</a:t>
+            </a:r>
+          </a:p>
+        </p:txBody>
+      </p:sp>
+      <p:sp>
+        <p:nvSpPr>
+          <p:cNvPr id="4" name="TextBox 3"/>
+          <p:cNvSpPr txBox="1"/>
+          <p:nvPr/>
+        </p:nvSpPr>
+        <p:spPr>
+          <a:xfrm>
+            <a:off x="548640" y="6446520"/>
+            <a:ext cx="8229600" cy="274320"/>
+          </a:xfrm>
+          <a:prstGeom prst="rect">
+            <a:avLst/>
+          </a:prstGeom>
+          <a:noFill/>
+        </p:spPr>
+        <p:txBody>
+          <a:bodyPr wrap="square" anchor="t" lIns="0" rIns="0" tIns="0" bIns="0"/>
+          <a:lstStyle/>
+          <a:p>
+            <a:pPr algn="l"/>
+            <a:r>
+              <a:rPr sz="1000" b="0" i="0">
+                <a:solidFill>
+                  <a:srgbClr val="54595D"/>
+                </a:solidFill>
+                <a:latin typeface="Calibri"/>
+              </a:rPr>
+              <a:t>Digital Software Development T Level  ·  Operators, Input, Output and Program Flow</a:t>
+            </a:r>
+          </a:p>
+        </p:txBody>
+      </p:sp>
+      <p:sp>
+        <p:nvSpPr>
+          <p:cNvPr id="5" name="TextBox 4"/>
+          <p:cNvSpPr txBox="1"/>
+          <p:nvPr/>
+        </p:nvSpPr>
+        <p:spPr>
+          <a:xfrm>
+            <a:off x="10728655" y="6446520"/>
+            <a:ext cx="914400" cy="274320"/>
+          </a:xfrm>
+          <a:prstGeom prst="rect">
+            <a:avLst/>
+          </a:prstGeom>
+          <a:noFill/>
+        </p:spPr>
+        <p:txBody>
+          <a:bodyPr wrap="square" anchor="t" lIns="0" rIns="0" tIns="0" bIns="0"/>
+          <a:lstStyle/>
+          <a:p>
+            <a:pPr algn="r"/>
+            <a:r>
+              <a:rPr sz="1000" b="0" i="0">
+                <a:solidFill>
+                  <a:srgbClr val="54595D"/>
+                </a:solidFill>
+                <a:latin typeface="Calibri"/>
+              </a:rPr>
+              <a:t>14</a:t>
+            </a:r>
+          </a:p>
+        </p:txBody>
+      </p:sp>
+      <p:sp>
+        <p:nvSpPr>
+          <p:cNvPr id="6" name="Oval 5"/>
+          <p:cNvSpPr/>
+          <p:nvPr/>
+        </p:nvSpPr>
+        <p:spPr>
+          <a:xfrm>
+            <a:off x="548640" y="1618488"/>
+            <a:ext cx="411480" cy="411480"/>
+          </a:xfrm>
+          <a:prstGeom prst="ellipse">
+            <a:avLst/>
+          </a:prstGeom>
+          <a:solidFill>
+            <a:srgbClr val="F2B705"/>
+          </a:solidFill>
+          <a:ln>
+            <a:noFill/>
+          </a:ln>
+          <a:effectLst/>
+        </p:spPr>
+        <p:style>
+          <a:lnRef idx="1">
+            <a:schemeClr val="accent1"/>
+          </a:lnRef>
+          <a:fillRef idx="3">
+            <a:schemeClr val="accent1"/>
+          </a:fillRef>
+          <a:effectRef idx="2">
+            <a:schemeClr val="accent1"/>
+          </a:effectRef>
+          <a:fontRef idx="minor">
+            <a:schemeClr val="lt1"/>
+          </a:fontRef>
+        </p:style>
+        <p:txBody>
+          <a:bodyPr rtlCol="0" anchor="ctr" lIns="0" rIns="0" tIns="0" bIns="0"/>
+          <a:lstStyle/>
+          <a:p>
+            <a:pPr algn="ctr"/>
+            <a:r>
+              <a:rPr sz="1400" b="1">
+                <a:solidFill>
+                  <a:srgbClr val="202122"/>
+                </a:solidFill>
+                <a:latin typeface="Calibri"/>
+              </a:rPr>
+              <a:t>1</a:t>
+            </a:r>
+          </a:p>
+        </p:txBody>
+      </p:sp>
+      <p:sp>
+        <p:nvSpPr>
+          <p:cNvPr id="7" name="TextBox 6"/>
+          <p:cNvSpPr txBox="1"/>
+          <p:nvPr/>
+        </p:nvSpPr>
+        <p:spPr>
+          <a:xfrm>
+            <a:off x="1234440" y="1600200"/>
+            <a:ext cx="10408615" cy="791870"/>
+          </a:xfrm>
+          <a:prstGeom prst="rect">
+            <a:avLst/>
+          </a:prstGeom>
+          <a:noFill/>
+        </p:spPr>
+        <p:txBody>
+          <a:bodyPr wrap="square" anchor="t" lIns="0" rIns="0" tIns="0" bIns="0"/>
+          <a:lstStyle/>
+          <a:p>
+            <a:pPr algn="l"/>
+            <a:r>
+              <a:rPr sz="1800" b="0" i="0">
+                <a:solidFill>
+                  <a:srgbClr val="54595D"/>
+                </a:solidFill>
+                <a:latin typeface="Calibri"/>
+              </a:rPr>
+              <a:t>What does 20 % 6 evaluate to?</a:t>
+            </a:r>
+          </a:p>
+          <a:p>
+            <a:r>
+              <a:rPr sz="1800" b="1">
+                <a:solidFill>
+                  <a:srgbClr val="03306E"/>
+                </a:solidFill>
+                <a:latin typeface="Calibri"/>
+              </a:rPr>
+              <a:t>2.</a:t>
+            </a:r>
+          </a:p>
+        </p:txBody>
+      </p:sp>
+      <p:sp>
+        <p:nvSpPr>
+          <p:cNvPr id="8" name="Oval 7"/>
+          <p:cNvSpPr/>
+          <p:nvPr/>
+        </p:nvSpPr>
+        <p:spPr>
+          <a:xfrm>
+            <a:off x="548640" y="2574950"/>
+            <a:ext cx="411480" cy="411480"/>
+          </a:xfrm>
+          <a:prstGeom prst="ellipse">
+            <a:avLst/>
+          </a:prstGeom>
+          <a:solidFill>
+            <a:srgbClr val="F2B705"/>
+          </a:solidFill>
+          <a:ln>
+            <a:noFill/>
+          </a:ln>
+          <a:effectLst/>
+        </p:spPr>
+        <p:style>
+          <a:lnRef idx="1">
+            <a:schemeClr val="accent1"/>
+          </a:lnRef>
+          <a:fillRef idx="3">
+            <a:schemeClr val="accent1"/>
+          </a:fillRef>
+          <a:effectRef idx="2">
+            <a:schemeClr val="accent1"/>
+          </a:effectRef>
+          <a:fontRef idx="minor">
+            <a:schemeClr val="lt1"/>
+          </a:fontRef>
+        </p:style>
+        <p:txBody>
+          <a:bodyPr rtlCol="0" anchor="ctr" lIns="0" rIns="0" tIns="0" bIns="0"/>
+          <a:lstStyle/>
+          <a:p>
+            <a:pPr algn="ctr"/>
+            <a:r>
+              <a:rPr sz="1400" b="1">
+                <a:solidFill>
+                  <a:srgbClr val="202122"/>
+                </a:solidFill>
+                <a:latin typeface="Calibri"/>
+              </a:rPr>
+              <a:t>2</a:t>
+            </a:r>
+          </a:p>
+        </p:txBody>
+      </p:sp>
+      <p:sp>
+        <p:nvSpPr>
+          <p:cNvPr id="9" name="TextBox 8"/>
+          <p:cNvSpPr txBox="1"/>
+          <p:nvPr/>
+        </p:nvSpPr>
+        <p:spPr>
+          <a:xfrm>
+            <a:off x="1234440" y="2556662"/>
+            <a:ext cx="10408615" cy="791870"/>
+          </a:xfrm>
+          <a:prstGeom prst="rect">
+            <a:avLst/>
+          </a:prstGeom>
+          <a:noFill/>
+        </p:spPr>
+        <p:txBody>
+          <a:bodyPr wrap="square" anchor="t" lIns="0" rIns="0" tIns="0" bIns="0"/>
+          <a:lstStyle/>
+          <a:p>
+            <a:pPr algn="l"/>
+            <a:r>
+              <a:rPr sz="1800" b="0" i="0">
+                <a:solidFill>
+                  <a:srgbClr val="54595D"/>
+                </a:solidFill>
+                <a:latin typeface="Calibri"/>
+              </a:rPr>
+              <a:t>Which operator checks two values are not equal?</a:t>
+            </a:r>
+          </a:p>
+          <a:p>
+            <a:r>
+              <a:rPr sz="1800" b="1">
+                <a:solidFill>
+                  <a:srgbClr val="03306E"/>
+                </a:solidFill>
+                <a:latin typeface="Calibri"/>
+              </a:rPr>
+              <a:t>!=</a:t>
+            </a:r>
+          </a:p>
+        </p:txBody>
+      </p:sp>
+      <p:sp>
+        <p:nvSpPr>
+          <p:cNvPr id="10" name="Oval 9"/>
+          <p:cNvSpPr/>
+          <p:nvPr/>
+        </p:nvSpPr>
+        <p:spPr>
+          <a:xfrm>
+            <a:off x="548640" y="3531412"/>
+            <a:ext cx="411480" cy="411480"/>
+          </a:xfrm>
+          <a:prstGeom prst="ellipse">
+            <a:avLst/>
+          </a:prstGeom>
+          <a:solidFill>
+            <a:srgbClr val="F2B705"/>
+          </a:solidFill>
+          <a:ln>
+            <a:noFill/>
+          </a:ln>
+          <a:effectLst/>
+        </p:spPr>
+        <p:style>
+          <a:lnRef idx="1">
+            <a:schemeClr val="accent1"/>
+          </a:lnRef>
+          <a:fillRef idx="3">
+            <a:schemeClr val="accent1"/>
+          </a:fillRef>
+          <a:effectRef idx="2">
+            <a:schemeClr val="accent1"/>
+          </a:effectRef>
+          <a:fontRef idx="minor">
+            <a:schemeClr val="lt1"/>
+          </a:fontRef>
+        </p:style>
+        <p:txBody>
+          <a:bodyPr rtlCol="0" anchor="ctr" lIns="0" rIns="0" tIns="0" bIns="0"/>
+          <a:lstStyle/>
+          <a:p>
+            <a:pPr algn="ctr"/>
+            <a:r>
+              <a:rPr sz="1400" b="1">
+                <a:solidFill>
+                  <a:srgbClr val="202122"/>
+                </a:solidFill>
+                <a:latin typeface="Calibri"/>
+              </a:rPr>
+              <a:t>3</a:t>
+            </a:r>
+          </a:p>
+        </p:txBody>
+      </p:sp>
+      <p:sp>
+        <p:nvSpPr>
+          <p:cNvPr id="11" name="TextBox 10"/>
+          <p:cNvSpPr txBox="1"/>
+          <p:nvPr/>
+        </p:nvSpPr>
+        <p:spPr>
+          <a:xfrm>
+            <a:off x="1234440" y="3513124"/>
+            <a:ext cx="10408615" cy="791870"/>
+          </a:xfrm>
+          <a:prstGeom prst="rect">
+            <a:avLst/>
+          </a:prstGeom>
+          <a:noFill/>
+        </p:spPr>
+        <p:txBody>
+          <a:bodyPr wrap="square" anchor="t" lIns="0" rIns="0" tIns="0" bIns="0"/>
+          <a:lstStyle/>
+          <a:p>
+            <a:pPr algn="l"/>
+            <a:r>
+              <a:rPr sz="1800" b="0" i="0">
+                <a:solidFill>
+                  <a:srgbClr val="54595D"/>
+                </a:solidFill>
+                <a:latin typeface="Calibri"/>
+              </a:rPr>
+              <a:t>Which file mode adds to the end of a file without deleting it?</a:t>
+            </a:r>
+          </a:p>
+          <a:p>
+            <a:r>
+              <a:rPr sz="1800" b="1">
+                <a:solidFill>
+                  <a:srgbClr val="03306E"/>
+                </a:solidFill>
+                <a:latin typeface="Calibri"/>
+              </a:rPr>
+              <a:t>'a' (append).</a:t>
+            </a:r>
+          </a:p>
+        </p:txBody>
+      </p:sp>
+      <p:sp>
+        <p:nvSpPr>
+          <p:cNvPr id="12" name="Oval 11"/>
+          <p:cNvSpPr/>
+          <p:nvPr/>
+        </p:nvSpPr>
+        <p:spPr>
+          <a:xfrm>
+            <a:off x="548640" y="4487875"/>
+            <a:ext cx="411480" cy="411480"/>
+          </a:xfrm>
+          <a:prstGeom prst="ellipse">
+            <a:avLst/>
+          </a:prstGeom>
+          <a:solidFill>
+            <a:srgbClr val="F2B705"/>
+          </a:solidFill>
+          <a:ln>
+            <a:noFill/>
+          </a:ln>
+          <a:effectLst/>
+        </p:spPr>
+        <p:style>
+          <a:lnRef idx="1">
+            <a:schemeClr val="accent1"/>
+          </a:lnRef>
+          <a:fillRef idx="3">
+            <a:schemeClr val="accent1"/>
+          </a:fillRef>
+          <a:effectRef idx="2">
+            <a:schemeClr val="accent1"/>
+          </a:effectRef>
+          <a:fontRef idx="minor">
+            <a:schemeClr val="lt1"/>
+          </a:fontRef>
+        </p:style>
+        <p:txBody>
+          <a:bodyPr rtlCol="0" anchor="ctr" lIns="0" rIns="0" tIns="0" bIns="0"/>
+          <a:lstStyle/>
+          <a:p>
+            <a:pPr algn="ctr"/>
+            <a:r>
+              <a:rPr sz="1400" b="1">
+                <a:solidFill>
+                  <a:srgbClr val="202122"/>
+                </a:solidFill>
+                <a:latin typeface="Calibri"/>
+              </a:rPr>
+              <a:t>4</a:t>
+            </a:r>
+          </a:p>
+        </p:txBody>
+      </p:sp>
+      <p:sp>
+        <p:nvSpPr>
+          <p:cNvPr id="13" name="TextBox 12"/>
+          <p:cNvSpPr txBox="1"/>
+          <p:nvPr/>
+        </p:nvSpPr>
+        <p:spPr>
+          <a:xfrm>
+            <a:off x="1234440" y="4469587"/>
+            <a:ext cx="10408615" cy="791870"/>
+          </a:xfrm>
+          <a:prstGeom prst="rect">
+            <a:avLst/>
+          </a:prstGeom>
+          <a:noFill/>
+        </p:spPr>
+        <p:txBody>
+          <a:bodyPr wrap="square" anchor="t" lIns="0" rIns="0" tIns="0" bIns="0"/>
+          <a:lstStyle/>
+          <a:p>
+            <a:pPr algn="l"/>
+            <a:r>
+              <a:rPr sz="1800" b="0" i="0">
+                <a:solidFill>
+                  <a:srgbClr val="54595D"/>
+                </a:solidFill>
+                <a:latin typeface="Calibri"/>
+              </a:rPr>
+              <a:t>Which loop suits 'keep asking until the password is right'?</a:t>
+            </a:r>
+          </a:p>
+          <a:p>
+            <a:r>
+              <a:rPr sz="1800" b="1">
+                <a:solidFill>
+                  <a:srgbClr val="03306E"/>
+                </a:solidFill>
+                <a:latin typeface="Calibri"/>
+              </a:rPr>
+              <a:t>A while loop.</a:t>
+            </a:r>
+          </a:p>
+        </p:txBody>
+      </p:sp>
+      <p:sp>
+        <p:nvSpPr>
+          <p:cNvPr id="14" name="Oval 13"/>
+          <p:cNvSpPr/>
+          <p:nvPr/>
+        </p:nvSpPr>
+        <p:spPr>
+          <a:xfrm>
+            <a:off x="548640" y="5444337"/>
+            <a:ext cx="411480" cy="411480"/>
+          </a:xfrm>
+          <a:prstGeom prst="ellipse">
+            <a:avLst/>
+          </a:prstGeom>
+          <a:solidFill>
+            <a:srgbClr val="F2B705"/>
+          </a:solidFill>
+          <a:ln>
+            <a:noFill/>
+          </a:ln>
+          <a:effectLst/>
+        </p:spPr>
+        <p:style>
+          <a:lnRef idx="1">
+            <a:schemeClr val="accent1"/>
+          </a:lnRef>
+          <a:fillRef idx="3">
+            <a:schemeClr val="accent1"/>
+          </a:fillRef>
+          <a:effectRef idx="2">
+            <a:schemeClr val="accent1"/>
+          </a:effectRef>
+          <a:fontRef idx="minor">
+            <a:schemeClr val="lt1"/>
+          </a:fontRef>
+        </p:style>
+        <p:txBody>
+          <a:bodyPr rtlCol="0" anchor="ctr" lIns="0" rIns="0" tIns="0" bIns="0"/>
+          <a:lstStyle/>
+          <a:p>
+            <a:pPr algn="ctr"/>
+            <a:r>
+              <a:rPr sz="1400" b="1">
+                <a:solidFill>
+                  <a:srgbClr val="202122"/>
+                </a:solidFill>
+                <a:latin typeface="Calibri"/>
+              </a:rPr>
+              <a:t>5</a:t>
+            </a:r>
+          </a:p>
+        </p:txBody>
+      </p:sp>
+      <p:sp>
+        <p:nvSpPr>
+          <p:cNvPr id="15" name="TextBox 14"/>
+          <p:cNvSpPr txBox="1"/>
+          <p:nvPr/>
+        </p:nvSpPr>
+        <p:spPr>
+          <a:xfrm>
+            <a:off x="1234440" y="5426049"/>
+            <a:ext cx="10408615" cy="791870"/>
+          </a:xfrm>
+          <a:prstGeom prst="rect">
+            <a:avLst/>
+          </a:prstGeom>
+          <a:noFill/>
+        </p:spPr>
+        <p:txBody>
+          <a:bodyPr wrap="square" anchor="t" lIns="0" rIns="0" tIns="0" bIns="0"/>
+          <a:lstStyle/>
+          <a:p>
+            <a:pPr algn="l"/>
+            <a:r>
+              <a:rPr sz="1800" b="0" i="0">
+                <a:solidFill>
+                  <a:srgbClr val="54595D"/>
+                </a:solidFill>
+                <a:latin typeface="Calibri"/>
+              </a:rPr>
+              <a:t>Why must a file be closed?</a:t>
+            </a:r>
+          </a:p>
+          <a:p>
+            <a:r>
+              <a:rPr sz="1800" b="1">
+                <a:solidFill>
+                  <a:srgbClr val="03306E"/>
+                </a:solidFill>
+                <a:latin typeface="Calibri"/>
+              </a:rPr>
+              <a:t>So data is saved and the file is released.</a:t>
+            </a:r>
+          </a:p>
+        </p:txBody>
+      </p:sp>
+    </p:spTree>
+  </p:cSld>
+  <p:clrMapOvr>
+    <a:masterClrMapping/>
+  </p:clrMapOvr>
+</p:sld>
+</file>
+
+<file path=ppt/slides/slide15.xml><?xml version="1.0" encoding="utf-8"?>
+<p:sld xmlns:a="http://schemas.openxmlformats.org/drawingml/2006/main" xmlns:p="http://schemas.openxmlformats.org/presentationml/2006/main" xmlns:r="http://schemas.openxmlformats.org/officeDocument/2006/relationships">
+  <p:cSld>
+    <p:bg>
+      <p:bgPr>
+        <a:solidFill>
+          <a:srgbClr val="FFFFFF"/>
+        </a:solidFill>
+        <a:effectLst/>
+      </p:bgPr>
+    </p:bg>
+    <p:spTree>
+      <p:nvGrpSpPr>
+        <p:cNvPr id="1" name=""/>
+        <p:cNvGrpSpPr/>
+        <p:nvPr/>
+      </p:nvGrpSpPr>
+      <p:grpSpPr/>
+      <p:sp>
+        <p:nvSpPr>
+          <p:cNvPr id="2" name="TextBox 1"/>
+          <p:cNvSpPr txBox="1"/>
+          <p:nvPr/>
+        </p:nvSpPr>
+        <p:spPr>
+          <a:xfrm>
+            <a:off x="548640" y="320040"/>
+            <a:ext cx="11094415" cy="274320"/>
+          </a:xfrm>
+          <a:prstGeom prst="rect">
+            <a:avLst/>
+          </a:prstGeom>
+          <a:noFill/>
+        </p:spPr>
+        <p:txBody>
+          <a:bodyPr wrap="square" anchor="t" lIns="0" rIns="0" tIns="0" bIns="0"/>
+          <a:lstStyle/>
+          <a:p>
+            <a:pPr algn="l"/>
+            <a:r>
+              <a:rPr sz="1100" b="1" i="0">
+                <a:solidFill>
+                  <a:srgbClr val="54595D"/>
+                </a:solidFill>
+                <a:latin typeface="Calibri"/>
+              </a:rPr>
+              <a:t>CORE COMPONENT  ·  Core Paper 1</a:t>
+            </a:r>
+          </a:p>
+        </p:txBody>
+      </p:sp>
+      <p:sp>
+        <p:nvSpPr>
+          <p:cNvPr id="3" name="TextBox 2"/>
+          <p:cNvSpPr txBox="1"/>
+          <p:nvPr/>
+        </p:nvSpPr>
+        <p:spPr>
+          <a:xfrm>
+            <a:off x="548640" y="566928"/>
+            <a:ext cx="11094415" cy="822960"/>
+          </a:xfrm>
+          <a:prstGeom prst="rect">
+            <a:avLst/>
+          </a:prstGeom>
+          <a:noFill/>
+        </p:spPr>
+        <p:txBody>
+          <a:bodyPr wrap="square" anchor="ctr" lIns="0" rIns="0" tIns="0" bIns="0"/>
+          <a:lstStyle/>
+          <a:p>
+            <a:pPr algn="l"/>
+            <a:r>
+              <a:rPr sz="3200" b="1" i="0">
+                <a:solidFill>
+                  <a:srgbClr val="03306E"/>
+                </a:solidFill>
+                <a:latin typeface="Cambria"/>
+              </a:rPr>
+              <a:t>Activity: High score table</a:t>
+            </a:r>
+          </a:p>
+        </p:txBody>
+      </p:sp>
+      <p:sp>
+        <p:nvSpPr>
+          <p:cNvPr id="4" name="TextBox 3"/>
+          <p:cNvSpPr txBox="1"/>
+          <p:nvPr/>
+        </p:nvSpPr>
+        <p:spPr>
+          <a:xfrm>
+            <a:off x="548640" y="6446520"/>
+            <a:ext cx="8229600" cy="274320"/>
+          </a:xfrm>
+          <a:prstGeom prst="rect">
+            <a:avLst/>
+          </a:prstGeom>
+          <a:noFill/>
+        </p:spPr>
+        <p:txBody>
+          <a:bodyPr wrap="square" anchor="t" lIns="0" rIns="0" tIns="0" bIns="0"/>
+          <a:lstStyle/>
+          <a:p>
+            <a:pPr algn="l"/>
+            <a:r>
+              <a:rPr sz="1000" b="0" i="0">
+                <a:solidFill>
+                  <a:srgbClr val="54595D"/>
+                </a:solidFill>
+                <a:latin typeface="Calibri"/>
+              </a:rPr>
+              <a:t>Digital Software Development T Level  ·  Operators, Input, Output and Program Flow</a:t>
+            </a:r>
+          </a:p>
+        </p:txBody>
+      </p:sp>
+      <p:sp>
+        <p:nvSpPr>
+          <p:cNvPr id="5" name="TextBox 4"/>
+          <p:cNvSpPr txBox="1"/>
+          <p:nvPr/>
+        </p:nvSpPr>
+        <p:spPr>
+          <a:xfrm>
+            <a:off x="10728655" y="6446520"/>
+            <a:ext cx="914400" cy="274320"/>
+          </a:xfrm>
+          <a:prstGeom prst="rect">
+            <a:avLst/>
+          </a:prstGeom>
+          <a:noFill/>
+        </p:spPr>
+        <p:txBody>
+          <a:bodyPr wrap="square" anchor="t" lIns="0" rIns="0" tIns="0" bIns="0"/>
+          <a:lstStyle/>
+          <a:p>
+            <a:pPr algn="r"/>
+            <a:r>
+              <a:rPr sz="1000" b="0" i="0">
+                <a:solidFill>
+                  <a:srgbClr val="54595D"/>
+                </a:solidFill>
+                <a:latin typeface="Calibri"/>
+              </a:rPr>
+              <a:t>15</a:t>
+            </a:r>
+          </a:p>
+        </p:txBody>
+      </p:sp>
+      <p:sp>
+        <p:nvSpPr>
+          <p:cNvPr id="6" name="Rounded Rectangle 5"/>
+          <p:cNvSpPr/>
+          <p:nvPr/>
+        </p:nvSpPr>
+        <p:spPr>
+          <a:xfrm>
+            <a:off x="548640" y="1508760"/>
+            <a:ext cx="2011680" cy="457200"/>
+          </a:xfrm>
+          <a:prstGeom prst="roundRect">
+            <a:avLst>
+              <a:gd name="adj" fmla="val 50000"/>
+            </a:avLst>
+          </a:prstGeom>
+          <a:solidFill>
+            <a:srgbClr val="F2B705"/>
+          </a:solidFill>
+          <a:ln>
+            <a:noFill/>
+          </a:ln>
+          <a:effectLst/>
+        </p:spPr>
+        <p:style>
+          <a:lnRef idx="1">
+            <a:schemeClr val="accent1"/>
+          </a:lnRef>
+          <a:fillRef idx="3">
+            <a:schemeClr val="accent1"/>
+          </a:fillRef>
+          <a:effectRef idx="2">
+            <a:schemeClr val="accent1"/>
+          </a:effectRef>
+          <a:fontRef idx="minor">
+            <a:schemeClr val="lt1"/>
+          </a:fontRef>
+        </p:style>
+        <p:txBody>
+          <a:bodyPr rtlCol="0" anchor="ctr"/>
+          <a:lstStyle/>
+          <a:p/>
+        </p:txBody>
+      </p:sp>
+      <p:sp>
+        <p:nvSpPr>
+          <p:cNvPr id="7" name="TextBox 6"/>
+          <p:cNvSpPr txBox="1"/>
+          <p:nvPr/>
+        </p:nvSpPr>
+        <p:spPr>
+          <a:xfrm>
+            <a:off x="548640" y="1508760"/>
+            <a:ext cx="2011680" cy="457200"/>
+          </a:xfrm>
+          <a:prstGeom prst="rect">
+            <a:avLst/>
+          </a:prstGeom>
+          <a:noFill/>
+        </p:spPr>
+        <p:txBody>
+          <a:bodyPr wrap="square" anchor="ctr" lIns="0" rIns="0" tIns="0" bIns="0"/>
+          <a:lstStyle/>
+          <a:p>
+            <a:pPr algn="ctr"/>
+            <a:r>
+              <a:rPr sz="1400" b="1" i="0">
+                <a:solidFill>
+                  <a:srgbClr val="202122"/>
+                </a:solidFill>
+                <a:latin typeface="Calibri"/>
+              </a:rPr>
+              <a:t>30 minutes</a:t>
+            </a:r>
+          </a:p>
+        </p:txBody>
+      </p:sp>
+      <p:sp>
+        <p:nvSpPr>
+          <p:cNvPr id="8" name="TextBox 7"/>
+          <p:cNvSpPr txBox="1"/>
+          <p:nvPr/>
+        </p:nvSpPr>
+        <p:spPr>
+          <a:xfrm>
+            <a:off x="2743200" y="1508760"/>
+            <a:ext cx="4754880" cy="457200"/>
+          </a:xfrm>
+          <a:prstGeom prst="rect">
+            <a:avLst/>
+          </a:prstGeom>
+          <a:noFill/>
+        </p:spPr>
+        <p:txBody>
+          <a:bodyPr wrap="square" anchor="ctr" lIns="0" rIns="0" tIns="0" bIns="0"/>
+          <a:lstStyle/>
+          <a:p>
+            <a:pPr algn="l"/>
+            <a:r>
+              <a:rPr sz="1400" b="0" i="1">
+                <a:solidFill>
+                  <a:srgbClr val="54595D"/>
+                </a:solidFill>
+                <a:latin typeface="Calibri"/>
+              </a:rPr>
+              <a:t>Individual, in Python</a:t>
+            </a:r>
+          </a:p>
+        </p:txBody>
+      </p:sp>
+      <p:sp>
+        <p:nvSpPr>
+          <p:cNvPr id="9" name="Oval 8"/>
+          <p:cNvSpPr/>
+          <p:nvPr/>
+        </p:nvSpPr>
+        <p:spPr>
+          <a:xfrm>
+            <a:off x="548640" y="2482596"/>
+            <a:ext cx="384048" cy="384048"/>
+          </a:xfrm>
+          <a:prstGeom prst="ellipse">
+            <a:avLst/>
+          </a:prstGeom>
+          <a:solidFill>
+            <a:srgbClr val="0645AD"/>
+          </a:solidFill>
+          <a:ln>
+            <a:noFill/>
+          </a:ln>
+          <a:effectLst/>
+        </p:spPr>
+        <p:style>
+          <a:lnRef idx="1">
+            <a:schemeClr val="accent1"/>
+          </a:lnRef>
+          <a:fillRef idx="3">
+            <a:schemeClr val="accent1"/>
+          </a:fillRef>
+          <a:effectRef idx="2">
+            <a:schemeClr val="accent1"/>
+          </a:effectRef>
+          <a:fontRef idx="minor">
+            <a:schemeClr val="lt1"/>
+          </a:fontRef>
+        </p:style>
+        <p:txBody>
+          <a:bodyPr rtlCol="0" anchor="ctr" lIns="0" rIns="0" tIns="0" bIns="0"/>
+          <a:lstStyle/>
+          <a:p>
+            <a:pPr algn="ctr"/>
+            <a:r>
+              <a:rPr sz="1300" b="1">
+                <a:solidFill>
+                  <a:srgbClr val="FFFFFF"/>
+                </a:solidFill>
+                <a:latin typeface="Calibri"/>
+              </a:rPr>
+              <a:t>1</a:t>
+            </a:r>
+          </a:p>
+        </p:txBody>
+      </p:sp>
+      <p:sp>
+        <p:nvSpPr>
+          <p:cNvPr id="10" name="TextBox 9"/>
+          <p:cNvSpPr txBox="1"/>
+          <p:nvPr/>
+        </p:nvSpPr>
+        <p:spPr>
+          <a:xfrm>
+            <a:off x="1143000" y="2240280"/>
+            <a:ext cx="5943600" cy="868680"/>
+          </a:xfrm>
+          <a:prstGeom prst="rect">
+            <a:avLst/>
+          </a:prstGeom>
+          <a:noFill/>
+        </p:spPr>
+        <p:txBody>
+          <a:bodyPr wrap="square" anchor="ctr" lIns="0" rIns="0" tIns="0" bIns="0"/>
+          <a:lstStyle/>
+          <a:p>
+            <a:pPr algn="l"/>
+            <a:r>
+              <a:rPr sz="1700" b="0" i="0">
+                <a:solidFill>
+                  <a:srgbClr val="202122"/>
+                </a:solidFill>
+                <a:latin typeface="Calibri"/>
+              </a:rPr>
+              <a:t>Write a menu using match case: 1 add score, 2 show scores, 3 quit.</a:t>
+            </a:r>
+          </a:p>
+        </p:txBody>
+      </p:sp>
+      <p:sp>
+        <p:nvSpPr>
+          <p:cNvPr id="11" name="Oval 10"/>
+          <p:cNvSpPr/>
+          <p:nvPr/>
+        </p:nvSpPr>
+        <p:spPr>
+          <a:xfrm>
+            <a:off x="548640" y="3461004"/>
+            <a:ext cx="384048" cy="384048"/>
+          </a:xfrm>
+          <a:prstGeom prst="ellipse">
+            <a:avLst/>
+          </a:prstGeom>
+          <a:solidFill>
+            <a:srgbClr val="0645AD"/>
+          </a:solidFill>
+          <a:ln>
+            <a:noFill/>
+          </a:ln>
+          <a:effectLst/>
+        </p:spPr>
+        <p:style>
+          <a:lnRef idx="1">
+            <a:schemeClr val="accent1"/>
+          </a:lnRef>
+          <a:fillRef idx="3">
+            <a:schemeClr val="accent1"/>
+          </a:fillRef>
+          <a:effectRef idx="2">
+            <a:schemeClr val="accent1"/>
+          </a:effectRef>
+          <a:fontRef idx="minor">
+            <a:schemeClr val="lt1"/>
+          </a:fontRef>
+        </p:style>
+        <p:txBody>
+          <a:bodyPr rtlCol="0" anchor="ctr" lIns="0" rIns="0" tIns="0" bIns="0"/>
+          <a:lstStyle/>
+          <a:p>
+            <a:pPr algn="ctr"/>
+            <a:r>
+              <a:rPr sz="1300" b="1">
+                <a:solidFill>
+                  <a:srgbClr val="FFFFFF"/>
+                </a:solidFill>
+                <a:latin typeface="Calibri"/>
+              </a:rPr>
+              <a:t>2</a:t>
+            </a:r>
+          </a:p>
+        </p:txBody>
+      </p:sp>
+      <p:sp>
+        <p:nvSpPr>
+          <p:cNvPr id="12" name="TextBox 11"/>
+          <p:cNvSpPr txBox="1"/>
+          <p:nvPr/>
+        </p:nvSpPr>
+        <p:spPr>
+          <a:xfrm>
+            <a:off x="1143000" y="3218688"/>
+            <a:ext cx="5943600" cy="868680"/>
+          </a:xfrm>
+          <a:prstGeom prst="rect">
+            <a:avLst/>
+          </a:prstGeom>
+          <a:noFill/>
+        </p:spPr>
+        <p:txBody>
+          <a:bodyPr wrap="square" anchor="ctr" lIns="0" rIns="0" tIns="0" bIns="0"/>
+          <a:lstStyle/>
+          <a:p>
+            <a:pPr algn="l"/>
+            <a:r>
+              <a:rPr sz="1700" b="0" i="0">
+                <a:solidFill>
+                  <a:srgbClr val="202122"/>
+                </a:solidFill>
+                <a:latin typeface="Calibri"/>
+              </a:rPr>
+              <a:t>Option 1 appends 'name,score' to scores.txt.</a:t>
+            </a:r>
+          </a:p>
+        </p:txBody>
+      </p:sp>
+      <p:sp>
+        <p:nvSpPr>
+          <p:cNvPr id="13" name="Oval 12"/>
+          <p:cNvSpPr/>
+          <p:nvPr/>
+        </p:nvSpPr>
+        <p:spPr>
+          <a:xfrm>
+            <a:off x="548640" y="4439412"/>
+            <a:ext cx="384048" cy="384048"/>
+          </a:xfrm>
+          <a:prstGeom prst="ellipse">
+            <a:avLst/>
+          </a:prstGeom>
+          <a:solidFill>
+            <a:srgbClr val="0645AD"/>
+          </a:solidFill>
+          <a:ln>
+            <a:noFill/>
+          </a:ln>
+          <a:effectLst/>
+        </p:spPr>
+        <p:style>
+          <a:lnRef idx="1">
+            <a:schemeClr val="accent1"/>
+          </a:lnRef>
+          <a:fillRef idx="3">
+            <a:schemeClr val="accent1"/>
+          </a:fillRef>
+          <a:effectRef idx="2">
+            <a:schemeClr val="accent1"/>
+          </a:effectRef>
+          <a:fontRef idx="minor">
+            <a:schemeClr val="lt1"/>
+          </a:fontRef>
+        </p:style>
+        <p:txBody>
+          <a:bodyPr rtlCol="0" anchor="ctr" lIns="0" rIns="0" tIns="0" bIns="0"/>
+          <a:lstStyle/>
+          <a:p>
+            <a:pPr algn="ctr"/>
+            <a:r>
+              <a:rPr sz="1300" b="1">
+                <a:solidFill>
+                  <a:srgbClr val="FFFFFF"/>
+                </a:solidFill>
+                <a:latin typeface="Calibri"/>
+              </a:rPr>
+              <a:t>3</a:t>
+            </a:r>
+          </a:p>
+        </p:txBody>
+      </p:sp>
+      <p:sp>
+        <p:nvSpPr>
+          <p:cNvPr id="14" name="TextBox 13"/>
+          <p:cNvSpPr txBox="1"/>
+          <p:nvPr/>
+        </p:nvSpPr>
+        <p:spPr>
+          <a:xfrm>
+            <a:off x="1143000" y="4197096"/>
+            <a:ext cx="5943600" cy="868680"/>
+          </a:xfrm>
+          <a:prstGeom prst="rect">
+            <a:avLst/>
+          </a:prstGeom>
+          <a:noFill/>
+        </p:spPr>
+        <p:txBody>
+          <a:bodyPr wrap="square" anchor="ctr" lIns="0" rIns="0" tIns="0" bIns="0"/>
+          <a:lstStyle/>
+          <a:p>
+            <a:pPr algn="l"/>
+            <a:r>
+              <a:rPr sz="1700" b="0" i="0">
+                <a:solidFill>
+                  <a:srgbClr val="202122"/>
+                </a:solidFill>
+                <a:latin typeface="Calibri"/>
+              </a:rPr>
+              <a:t>Option 2 reads the file and prints each score using split().</a:t>
+            </a:r>
+          </a:p>
+        </p:txBody>
+      </p:sp>
+      <p:sp>
+        <p:nvSpPr>
+          <p:cNvPr id="15" name="Oval 14"/>
+          <p:cNvSpPr/>
+          <p:nvPr/>
+        </p:nvSpPr>
+        <p:spPr>
+          <a:xfrm>
+            <a:off x="548640" y="5417820"/>
+            <a:ext cx="384048" cy="384048"/>
+          </a:xfrm>
+          <a:prstGeom prst="ellipse">
+            <a:avLst/>
+          </a:prstGeom>
+          <a:solidFill>
+            <a:srgbClr val="0645AD"/>
+          </a:solidFill>
+          <a:ln>
+            <a:noFill/>
+          </a:ln>
+          <a:effectLst/>
+        </p:spPr>
+        <p:style>
+          <a:lnRef idx="1">
+            <a:schemeClr val="accent1"/>
+          </a:lnRef>
+          <a:fillRef idx="3">
+            <a:schemeClr val="accent1"/>
+          </a:fillRef>
+          <a:effectRef idx="2">
+            <a:schemeClr val="accent1"/>
+          </a:effectRef>
+          <a:fontRef idx="minor">
+            <a:schemeClr val="lt1"/>
+          </a:fontRef>
+        </p:style>
+        <p:txBody>
+          <a:bodyPr rtlCol="0" anchor="ctr" lIns="0" rIns="0" tIns="0" bIns="0"/>
+          <a:lstStyle/>
+          <a:p>
+            <a:pPr algn="ctr"/>
+            <a:r>
+              <a:rPr sz="1300" b="1">
+                <a:solidFill>
+                  <a:srgbClr val="FFFFFF"/>
+                </a:solidFill>
+                <a:latin typeface="Calibri"/>
+              </a:rPr>
+              <a:t>4</a:t>
+            </a:r>
+          </a:p>
+        </p:txBody>
+      </p:sp>
+      <p:sp>
+        <p:nvSpPr>
+          <p:cNvPr id="16" name="TextBox 15"/>
+          <p:cNvSpPr txBox="1"/>
+          <p:nvPr/>
+        </p:nvSpPr>
+        <p:spPr>
+          <a:xfrm>
+            <a:off x="1143000" y="5175504"/>
+            <a:ext cx="5943600" cy="868680"/>
+          </a:xfrm>
+          <a:prstGeom prst="rect">
+            <a:avLst/>
+          </a:prstGeom>
+          <a:noFill/>
+        </p:spPr>
+        <p:txBody>
+          <a:bodyPr wrap="square" anchor="ctr" lIns="0" rIns="0" tIns="0" bIns="0"/>
+          <a:lstStyle/>
+          <a:p>
+            <a:pPr algn="l"/>
+            <a:r>
+              <a:rPr sz="1700" b="0" i="0">
+                <a:solidFill>
+                  <a:srgbClr val="202122"/>
+                </a:solidFill>
+                <a:latin typeface="Calibri"/>
+              </a:rPr>
+              <a:t>Loop the menu with while until the user quits.</a:t>
+            </a:r>
+          </a:p>
+        </p:txBody>
+      </p:sp>
+      <p:sp>
+        <p:nvSpPr>
+          <p:cNvPr id="17" name="Rounded Rectangle 16"/>
+          <p:cNvSpPr/>
+          <p:nvPr/>
+        </p:nvSpPr>
+        <p:spPr>
+          <a:xfrm>
+            <a:off x="7772400" y="1508760"/>
+            <a:ext cx="3867912" cy="4572000"/>
+          </a:xfrm>
+          <a:prstGeom prst="roundRect">
+            <a:avLst>
+              <a:gd name="adj" fmla="val 8000"/>
+            </a:avLst>
+          </a:prstGeom>
+          <a:solidFill>
+            <a:srgbClr val="EAF3FF"/>
+          </a:solidFill>
+          <a:ln>
+            <a:noFill/>
+          </a:ln>
+          <a:effectLst/>
+        </p:spPr>
+        <p:style>
+          <a:lnRef idx="1">
+            <a:schemeClr val="accent1"/>
+          </a:lnRef>
+          <a:fillRef idx="3">
+            <a:schemeClr val="accent1"/>
+          </a:fillRef>
+          <a:effectRef idx="2">
+            <a:schemeClr val="accent1"/>
+          </a:effectRef>
+          <a:fontRef idx="minor">
+            <a:schemeClr val="lt1"/>
+          </a:fontRef>
+        </p:style>
+        <p:txBody>
+          <a:bodyPr rtlCol="0" anchor="ctr"/>
+          <a:lstStyle/>
+          <a:p/>
+        </p:txBody>
+      </p:sp>
+      <p:sp>
+        <p:nvSpPr>
+          <p:cNvPr id="18" name="TextBox 17"/>
+          <p:cNvSpPr txBox="1"/>
+          <p:nvPr/>
+        </p:nvSpPr>
+        <p:spPr>
+          <a:xfrm>
+            <a:off x="8046720" y="1737360"/>
+            <a:ext cx="3291840" cy="365760"/>
+          </a:xfrm>
+          <a:prstGeom prst="rect">
+            <a:avLst/>
+          </a:prstGeom>
+          <a:noFill/>
+        </p:spPr>
+        <p:txBody>
+          <a:bodyPr wrap="square" anchor="t" lIns="0" rIns="0" tIns="0" bIns="0"/>
+          <a:lstStyle/>
+          <a:p>
+            <a:pPr algn="l"/>
+            <a:r>
+              <a:rPr sz="1300" b="1" i="0">
+                <a:solidFill>
+                  <a:srgbClr val="0645AD"/>
+                </a:solidFill>
+                <a:latin typeface="Calibri"/>
+              </a:rPr>
+              <a:t>SUCCESS CRITERIA</a:t>
+            </a:r>
+          </a:p>
+        </p:txBody>
+      </p:sp>
+      <p:sp>
+        <p:nvSpPr>
+          <p:cNvPr id="19" name="TextBox 18"/>
+          <p:cNvSpPr txBox="1"/>
+          <p:nvPr/>
+        </p:nvSpPr>
+        <p:spPr>
+          <a:xfrm>
+            <a:off x="8046720" y="2240280"/>
+            <a:ext cx="3337560" cy="3657600"/>
+          </a:xfrm>
+          <a:prstGeom prst="rect">
+            <a:avLst/>
+          </a:prstGeom>
+          <a:noFill/>
+        </p:spPr>
+        <p:txBody>
+          <a:bodyPr wrap="square" lIns="0" rIns="0" tIns="0" bIns="0">
+            <a:spAutoFit/>
+          </a:bodyPr>
+          <a:lstStyle/>
+          <a:p>
+            <a:pPr marL="274320" indent="-274320">
+              <a:spcAft>
+                <a:spcPts val="810"/>
+              </a:spcAft>
+              <a:buClr>
+                <a:srgbClr val="0645AD"/>
+              </a:buClr>
+              <a:buFont typeface="Arial"/>
+              <a:buChar char="•"/>
+            </a:pPr>
+            <a:r>
+              <a:rPr sz="1800" b="0">
+                <a:solidFill>
+                  <a:srgbClr val="202122"/>
+                </a:solidFill>
+                <a:latin typeface="Calibri"/>
+              </a:rPr>
+              <a:t>Menu loops correctly</a:t>
+            </a:r>
+          </a:p>
+          <a:p>
+            <a:pPr marL="274320" indent="-274320">
+              <a:spcAft>
+                <a:spcPts val="810"/>
+              </a:spcAft>
+              <a:buClr>
+                <a:srgbClr val="0645AD"/>
+              </a:buClr>
+              <a:buFont typeface="Arial"/>
+              <a:buChar char="•"/>
+            </a:pPr>
+            <a:r>
+              <a:rPr sz="1800" b="0">
+                <a:solidFill>
+                  <a:srgbClr val="202122"/>
+                </a:solidFill>
+                <a:latin typeface="Calibri"/>
+              </a:rPr>
+              <a:t>File opened in the right modes</a:t>
+            </a:r>
+          </a:p>
+          <a:p>
+            <a:pPr marL="274320" indent="-274320">
+              <a:spcAft>
+                <a:spcPts val="810"/>
+              </a:spcAft>
+              <a:buClr>
+                <a:srgbClr val="0645AD"/>
+              </a:buClr>
+              <a:buFont typeface="Arial"/>
+              <a:buChar char="•"/>
+            </a:pPr>
+            <a:r>
+              <a:rPr sz="1800" b="0">
+                <a:solidFill>
+                  <a:srgbClr val="202122"/>
+                </a:solidFill>
+                <a:latin typeface="Calibri"/>
+              </a:rPr>
+              <a:t>Output is tidy</a:t>
+            </a:r>
+          </a:p>
+          <a:p>
+            <a:pPr marL="274320" indent="-274320">
+              <a:spcAft>
+                <a:spcPts val="810"/>
+              </a:spcAft>
+              <a:buClr>
+                <a:srgbClr val="0645AD"/>
+              </a:buClr>
+              <a:buFont typeface="Arial"/>
+              <a:buChar char="•"/>
+            </a:pPr>
+            <a:r>
+              <a:rPr sz="1800" b="0">
+                <a:solidFill>
+                  <a:srgbClr val="202122"/>
+                </a:solidFill>
+                <a:latin typeface="Calibri"/>
+              </a:rPr>
+              <a:t>Invalid menu options handled</a:t>
+            </a:r>
+          </a:p>
+        </p:txBody>
+      </p:sp>
+    </p:spTree>
+  </p:cSld>
+  <p:clrMapOvr>
+    <a:masterClrMapping/>
+  </p:clrMapOvr>
+</p:sld>
+</file>
+
+<file path=ppt/slides/slide16.xml><?xml version="1.0" encoding="utf-8"?>
+<p:sld xmlns:a="http://schemas.openxmlformats.org/drawingml/2006/main" xmlns:p="http://schemas.openxmlformats.org/presentationml/2006/main" xmlns:r="http://schemas.openxmlformats.org/officeDocument/2006/relationships">
+  <p:cSld>
+    <p:bg>
+      <p:bgPr>
+        <a:solidFill>
           <a:srgbClr val="03306E"/>
         </a:solidFill>
         <a:effectLst/>
@@ -5277,6 +9047,416 @@
                 <a:latin typeface="Calibri"/>
               </a:rPr>
               <a:t>3</a:t>
+            </a:r>
+          </a:p>
+        </p:txBody>
+      </p:sp>
+      <p:sp>
+        <p:nvSpPr>
+          <p:cNvPr id="6" name="TextBox 5"/>
+          <p:cNvSpPr txBox="1"/>
+          <p:nvPr/>
+        </p:nvSpPr>
+        <p:spPr>
+          <a:xfrm>
+            <a:off x="548640" y="1554480"/>
+            <a:ext cx="6720840" cy="4617720"/>
+          </a:xfrm>
+          <a:prstGeom prst="rect">
+            <a:avLst/>
+          </a:prstGeom>
+          <a:noFill/>
+        </p:spPr>
+        <p:txBody>
+          <a:bodyPr wrap="square" lIns="0" rIns="0" tIns="0" bIns="0">
+            <a:spAutoFit/>
+          </a:bodyPr>
+          <a:lstStyle/>
+          <a:p>
+            <a:pPr>
+              <a:spcAft>
+                <a:spcPts val="1320"/>
+              </a:spcAft>
+            </a:pPr>
+            <a:r>
+              <a:rPr sz="2200" b="1">
+                <a:solidFill>
+                  <a:srgbClr val="202122"/>
+                </a:solidFill>
+                <a:latin typeface="Calibri"/>
+              </a:rPr>
+              <a:t>Arithmetic operators do maths:</a:t>
+            </a:r>
+            <a:r>
+              <a:rPr sz="2200" b="0">
+                <a:solidFill>
+                  <a:srgbClr val="202122"/>
+                </a:solidFill>
+                <a:latin typeface="Calibri"/>
+              </a:rPr>
+              <a:t> + - * /, ** for powers, // for integer division (the whole number part) and % for modulus (the remainder). 17 // 5 is 3 and 17 % 5 is 2.</a:t>
+            </a:r>
+          </a:p>
+          <a:p>
+            <a:pPr>
+              <a:spcAft>
+                <a:spcPts val="1320"/>
+              </a:spcAft>
+            </a:pPr>
+            <a:r>
+              <a:rPr sz="2200" b="0">
+                <a:solidFill>
+                  <a:srgbClr val="202122"/>
+                </a:solidFill>
+                <a:latin typeface="Calibri"/>
+              </a:rPr>
+              <a:t>Relational operators compare values and give True or False: == (equal), != (not equal), &lt;, &gt;, &lt;= and &gt;=. Don't confuse = (assign) with == (compare).</a:t>
+            </a:r>
+          </a:p>
+          <a:p>
+            <a:pPr>
+              <a:spcAft>
+                <a:spcPts val="1320"/>
+              </a:spcAft>
+            </a:pPr>
+            <a:r>
+              <a:rPr sz="2200" b="1">
+                <a:solidFill>
+                  <a:srgbClr val="202122"/>
+                </a:solidFill>
+                <a:latin typeface="Calibri"/>
+              </a:rPr>
+              <a:t>Boolean operators combine conditions:</a:t>
+            </a:r>
+            <a:r>
+              <a:rPr sz="2200" b="0">
+                <a:solidFill>
+                  <a:srgbClr val="202122"/>
+                </a:solidFill>
+                <a:latin typeface="Calibri"/>
+              </a:rPr>
+              <a:t> and (both true), or (either true) and not (reverses it).</a:t>
+            </a:r>
+          </a:p>
+        </p:txBody>
+      </p:sp>
+      <p:sp>
+        <p:nvSpPr>
+          <p:cNvPr id="7" name="Rounded Rectangle 6"/>
+          <p:cNvSpPr/>
+          <p:nvPr/>
+        </p:nvSpPr>
+        <p:spPr>
+          <a:xfrm>
+            <a:off x="7772400" y="1554480"/>
+            <a:ext cx="3867912" cy="4526280"/>
+          </a:xfrm>
+          <a:prstGeom prst="roundRect">
+            <a:avLst>
+              <a:gd name="adj" fmla="val 8000"/>
+            </a:avLst>
+          </a:prstGeom>
+          <a:solidFill>
+            <a:srgbClr val="03306E"/>
+          </a:solidFill>
+          <a:ln>
+            <a:noFill/>
+          </a:ln>
+          <a:effectLst/>
+        </p:spPr>
+        <p:style>
+          <a:lnRef idx="1">
+            <a:schemeClr val="accent1"/>
+          </a:lnRef>
+          <a:fillRef idx="3">
+            <a:schemeClr val="accent1"/>
+          </a:fillRef>
+          <a:effectRef idx="2">
+            <a:schemeClr val="accent1"/>
+          </a:effectRef>
+          <a:fontRef idx="minor">
+            <a:schemeClr val="lt1"/>
+          </a:fontRef>
+        </p:style>
+        <p:txBody>
+          <a:bodyPr rtlCol="0" anchor="ctr"/>
+          <a:lstStyle/>
+          <a:p/>
+        </p:txBody>
+      </p:sp>
+      <p:sp>
+        <p:nvSpPr>
+          <p:cNvPr id="8" name="Oval 7"/>
+          <p:cNvSpPr/>
+          <p:nvPr/>
+        </p:nvSpPr>
+        <p:spPr>
+          <a:xfrm>
+            <a:off x="8046720" y="1828800"/>
+            <a:ext cx="548640" cy="548640"/>
+          </a:xfrm>
+          <a:prstGeom prst="ellipse">
+            <a:avLst/>
+          </a:prstGeom>
+          <a:solidFill>
+            <a:srgbClr val="F2B705"/>
+          </a:solidFill>
+          <a:ln>
+            <a:noFill/>
+          </a:ln>
+          <a:effectLst/>
+        </p:spPr>
+        <p:style>
+          <a:lnRef idx="1">
+            <a:schemeClr val="accent1"/>
+          </a:lnRef>
+          <a:fillRef idx="3">
+            <a:schemeClr val="accent1"/>
+          </a:fillRef>
+          <a:effectRef idx="2">
+            <a:schemeClr val="accent1"/>
+          </a:effectRef>
+          <a:fontRef idx="minor">
+            <a:schemeClr val="lt1"/>
+          </a:fontRef>
+        </p:style>
+        <p:txBody>
+          <a:bodyPr rtlCol="0" anchor="ctr" lIns="0" rIns="0" tIns="0" bIns="0"/>
+          <a:lstStyle/>
+          <a:p>
+            <a:pPr algn="ctr"/>
+            <a:r>
+              <a:rPr sz="1300" b="1">
+                <a:solidFill>
+                  <a:srgbClr val="202122"/>
+                </a:solidFill>
+                <a:latin typeface="Calibri"/>
+              </a:rPr>
+              <a:t>e.g.</a:t>
+            </a:r>
+          </a:p>
+        </p:txBody>
+      </p:sp>
+      <p:sp>
+        <p:nvSpPr>
+          <p:cNvPr id="9" name="TextBox 8"/>
+          <p:cNvSpPr txBox="1"/>
+          <p:nvPr/>
+        </p:nvSpPr>
+        <p:spPr>
+          <a:xfrm>
+            <a:off x="8046720" y="2560320"/>
+            <a:ext cx="3291840" cy="365760"/>
+          </a:xfrm>
+          <a:prstGeom prst="rect">
+            <a:avLst/>
+          </a:prstGeom>
+          <a:noFill/>
+        </p:spPr>
+        <p:txBody>
+          <a:bodyPr wrap="square" anchor="t" lIns="0" rIns="0" tIns="0" bIns="0"/>
+          <a:lstStyle/>
+          <a:p>
+            <a:pPr algn="l"/>
+            <a:r>
+              <a:rPr sz="1300" b="1" i="0">
+                <a:solidFill>
+                  <a:srgbClr val="A9C8F0"/>
+                </a:solidFill>
+                <a:latin typeface="Calibri"/>
+              </a:rPr>
+              <a:t>EXAMPLE</a:t>
+            </a:r>
+          </a:p>
+        </p:txBody>
+      </p:sp>
+      <p:sp>
+        <p:nvSpPr>
+          <p:cNvPr id="10" name="TextBox 9"/>
+          <p:cNvSpPr txBox="1"/>
+          <p:nvPr/>
+        </p:nvSpPr>
+        <p:spPr>
+          <a:xfrm>
+            <a:off x="8046720" y="2971800"/>
+            <a:ext cx="3291840" cy="2971800"/>
+          </a:xfrm>
+          <a:prstGeom prst="rect">
+            <a:avLst/>
+          </a:prstGeom>
+          <a:noFill/>
+        </p:spPr>
+        <p:txBody>
+          <a:bodyPr wrap="square" anchor="t" lIns="0" rIns="0" tIns="0" bIns="0"/>
+          <a:lstStyle/>
+          <a:p>
+            <a:pPr algn="l"/>
+            <a:r>
+              <a:rPr sz="1900" b="0" i="0">
+                <a:solidFill>
+                  <a:srgbClr val="FFFFFF"/>
+                </a:solidFill>
+                <a:latin typeface="Cambria"/>
+              </a:rPr>
+              <a:t>Is a number even? n % 2 == 0. Can someone vote? age &gt;= 18 and registered. Is a user a guest? not logged_in.</a:t>
+            </a:r>
+          </a:p>
+        </p:txBody>
+      </p:sp>
+    </p:spTree>
+  </p:cSld>
+  <p:clrMapOvr>
+    <a:masterClrMapping/>
+  </p:clrMapOvr>
+</p:sld>
+</file>
+
+<file path=ppt/slides/slide4.xml><?xml version="1.0" encoding="utf-8"?>
+<p:sld xmlns:a="http://schemas.openxmlformats.org/drawingml/2006/main" xmlns:p="http://schemas.openxmlformats.org/presentationml/2006/main" xmlns:r="http://schemas.openxmlformats.org/officeDocument/2006/relationships">
+  <p:cSld>
+    <p:bg>
+      <p:bgPr>
+        <a:solidFill>
+          <a:srgbClr val="FFFFFF"/>
+        </a:solidFill>
+        <a:effectLst/>
+      </p:bgPr>
+    </p:bg>
+    <p:spTree>
+      <p:nvGrpSpPr>
+        <p:cNvPr id="1" name=""/>
+        <p:cNvGrpSpPr/>
+        <p:nvPr/>
+      </p:nvGrpSpPr>
+      <p:grpSpPr/>
+      <p:sp>
+        <p:nvSpPr>
+          <p:cNvPr id="2" name="TextBox 1"/>
+          <p:cNvSpPr txBox="1"/>
+          <p:nvPr/>
+        </p:nvSpPr>
+        <p:spPr>
+          <a:xfrm>
+            <a:off x="548640" y="320040"/>
+            <a:ext cx="11094415" cy="274320"/>
+          </a:xfrm>
+          <a:prstGeom prst="rect">
+            <a:avLst/>
+          </a:prstGeom>
+          <a:noFill/>
+        </p:spPr>
+        <p:txBody>
+          <a:bodyPr wrap="square" anchor="t" lIns="0" rIns="0" tIns="0" bIns="0"/>
+          <a:lstStyle/>
+          <a:p>
+            <a:pPr algn="l"/>
+            <a:r>
+              <a:rPr sz="1100" b="1" i="0">
+                <a:solidFill>
+                  <a:srgbClr val="54595D"/>
+                </a:solidFill>
+                <a:latin typeface="Calibri"/>
+              </a:rPr>
+              <a:t>CORE COMPONENT  ·  Core Paper 1</a:t>
+            </a:r>
+          </a:p>
+        </p:txBody>
+      </p:sp>
+      <p:sp>
+        <p:nvSpPr>
+          <p:cNvPr id="3" name="TextBox 2"/>
+          <p:cNvSpPr txBox="1"/>
+          <p:nvPr/>
+        </p:nvSpPr>
+        <p:spPr>
+          <a:xfrm>
+            <a:off x="548640" y="566928"/>
+            <a:ext cx="11094415" cy="822960"/>
+          </a:xfrm>
+          <a:prstGeom prst="rect">
+            <a:avLst/>
+          </a:prstGeom>
+          <a:noFill/>
+        </p:spPr>
+        <p:txBody>
+          <a:bodyPr wrap="square" anchor="ctr" lIns="0" rIns="0" tIns="0" bIns="0"/>
+          <a:lstStyle/>
+          <a:p>
+            <a:pPr algn="l"/>
+            <a:r>
+              <a:rPr sz="3200" b="1" i="0">
+                <a:solidFill>
+                  <a:srgbClr val="03306E"/>
+                </a:solidFill>
+                <a:latin typeface="Cambria"/>
+              </a:rPr>
+              <a:t>Operators</a:t>
+            </a:r>
+          </a:p>
+        </p:txBody>
+      </p:sp>
+      <p:sp>
+        <p:nvSpPr>
+          <p:cNvPr id="4" name="TextBox 3"/>
+          <p:cNvSpPr txBox="1"/>
+          <p:nvPr/>
+        </p:nvSpPr>
+        <p:spPr>
+          <a:xfrm>
+            <a:off x="548640" y="6446520"/>
+            <a:ext cx="8229600" cy="274320"/>
+          </a:xfrm>
+          <a:prstGeom prst="rect">
+            <a:avLst/>
+          </a:prstGeom>
+          <a:noFill/>
+        </p:spPr>
+        <p:txBody>
+          <a:bodyPr wrap="square" anchor="t" lIns="0" rIns="0" tIns="0" bIns="0"/>
+          <a:lstStyle/>
+          <a:p>
+            <a:pPr algn="l"/>
+            <a:r>
+              <a:rPr sz="1000" b="0" i="0">
+                <a:solidFill>
+                  <a:srgbClr val="54595D"/>
+                </a:solidFill>
+                <a:latin typeface="Calibri"/>
+              </a:rPr>
+              <a:t>Digital Software Development T Level  ·  Operators, Input, Output and Program Flow</a:t>
+            </a:r>
+          </a:p>
+        </p:txBody>
+      </p:sp>
+      <p:sp>
+        <p:nvSpPr>
+          <p:cNvPr id="5" name="TextBox 4"/>
+          <p:cNvSpPr txBox="1"/>
+          <p:nvPr/>
+        </p:nvSpPr>
+        <p:spPr>
+          <a:xfrm>
+            <a:off x="10728655" y="6446520"/>
+            <a:ext cx="914400" cy="274320"/>
+          </a:xfrm>
+          <a:prstGeom prst="rect">
+            <a:avLst/>
+          </a:prstGeom>
+          <a:noFill/>
+        </p:spPr>
+        <p:txBody>
+          <a:bodyPr wrap="square" anchor="t" lIns="0" rIns="0" tIns="0" bIns="0"/>
+          <a:lstStyle/>
+          <a:p>
+            <a:pPr algn="r"/>
+            <a:r>
+              <a:rPr sz="1000" b="0" i="0">
+                <a:solidFill>
+                  <a:srgbClr val="54595D"/>
+                </a:solidFill>
+                <a:latin typeface="Calibri"/>
+              </a:rPr>
+              <a:t>4</a:t>
             </a:r>
           </a:p>
         </p:txBody>
@@ -5588,858 +9768,6 @@
 </p:sld>
 </file>
 
-<file path=ppt/slides/slide4.xml><?xml version="1.0" encoding="utf-8"?>
-<p:sld xmlns:a="http://schemas.openxmlformats.org/drawingml/2006/main" xmlns:p="http://schemas.openxmlformats.org/presentationml/2006/main" xmlns:r="http://schemas.openxmlformats.org/officeDocument/2006/relationships">
-  <p:cSld>
-    <p:bg>
-      <p:bgPr>
-        <a:solidFill>
-          <a:srgbClr val="FFFFFF"/>
-        </a:solidFill>
-        <a:effectLst/>
-      </p:bgPr>
-    </p:bg>
-    <p:spTree>
-      <p:nvGrpSpPr>
-        <p:cNvPr id="1" name=""/>
-        <p:cNvGrpSpPr/>
-        <p:nvPr/>
-      </p:nvGrpSpPr>
-      <p:grpSpPr/>
-      <p:sp>
-        <p:nvSpPr>
-          <p:cNvPr id="2" name="TextBox 1"/>
-          <p:cNvSpPr txBox="1"/>
-          <p:nvPr/>
-        </p:nvSpPr>
-        <p:spPr>
-          <a:xfrm>
-            <a:off x="548640" y="320040"/>
-            <a:ext cx="11094415" cy="274320"/>
-          </a:xfrm>
-          <a:prstGeom prst="rect">
-            <a:avLst/>
-          </a:prstGeom>
-          <a:noFill/>
-        </p:spPr>
-        <p:txBody>
-          <a:bodyPr wrap="square" anchor="t" lIns="0" rIns="0" tIns="0" bIns="0"/>
-          <a:lstStyle/>
-          <a:p>
-            <a:pPr algn="l"/>
-            <a:r>
-              <a:rPr sz="1100" b="1" i="0">
-                <a:solidFill>
-                  <a:srgbClr val="54595D"/>
-                </a:solidFill>
-                <a:latin typeface="Calibri"/>
-              </a:rPr>
-              <a:t>CORE COMPONENT  ·  Core Paper 1</a:t>
-            </a:r>
-          </a:p>
-        </p:txBody>
-      </p:sp>
-      <p:sp>
-        <p:nvSpPr>
-          <p:cNvPr id="3" name="TextBox 2"/>
-          <p:cNvSpPr txBox="1"/>
-          <p:nvPr/>
-        </p:nvSpPr>
-        <p:spPr>
-          <a:xfrm>
-            <a:off x="548640" y="566928"/>
-            <a:ext cx="11094415" cy="822960"/>
-          </a:xfrm>
-          <a:prstGeom prst="rect">
-            <a:avLst/>
-          </a:prstGeom>
-          <a:noFill/>
-        </p:spPr>
-        <p:txBody>
-          <a:bodyPr wrap="square" anchor="ctr" lIns="0" rIns="0" tIns="0" bIns="0"/>
-          <a:lstStyle/>
-          <a:p>
-            <a:pPr algn="l"/>
-            <a:r>
-              <a:rPr sz="3200" b="1" i="0">
-                <a:solidFill>
-                  <a:srgbClr val="03306E"/>
-                </a:solidFill>
-                <a:latin typeface="Cambria"/>
-              </a:rPr>
-              <a:t>Working with text files</a:t>
-            </a:r>
-          </a:p>
-        </p:txBody>
-      </p:sp>
-      <p:sp>
-        <p:nvSpPr>
-          <p:cNvPr id="4" name="TextBox 3"/>
-          <p:cNvSpPr txBox="1"/>
-          <p:nvPr/>
-        </p:nvSpPr>
-        <p:spPr>
-          <a:xfrm>
-            <a:off x="548640" y="6446520"/>
-            <a:ext cx="8229600" cy="274320"/>
-          </a:xfrm>
-          <a:prstGeom prst="rect">
-            <a:avLst/>
-          </a:prstGeom>
-          <a:noFill/>
-        </p:spPr>
-        <p:txBody>
-          <a:bodyPr wrap="square" anchor="t" lIns="0" rIns="0" tIns="0" bIns="0"/>
-          <a:lstStyle/>
-          <a:p>
-            <a:pPr algn="l"/>
-            <a:r>
-              <a:rPr sz="1000" b="0" i="0">
-                <a:solidFill>
-                  <a:srgbClr val="54595D"/>
-                </a:solidFill>
-                <a:latin typeface="Calibri"/>
-              </a:rPr>
-              <a:t>Digital Software Development T Level  ·  Operators, Input, Output and Program Flow</a:t>
-            </a:r>
-          </a:p>
-        </p:txBody>
-      </p:sp>
-      <p:sp>
-        <p:nvSpPr>
-          <p:cNvPr id="5" name="TextBox 4"/>
-          <p:cNvSpPr txBox="1"/>
-          <p:nvPr/>
-        </p:nvSpPr>
-        <p:spPr>
-          <a:xfrm>
-            <a:off x="10728655" y="6446520"/>
-            <a:ext cx="914400" cy="274320"/>
-          </a:xfrm>
-          <a:prstGeom prst="rect">
-            <a:avLst/>
-          </a:prstGeom>
-          <a:noFill/>
-        </p:spPr>
-        <p:txBody>
-          <a:bodyPr wrap="square" anchor="t" lIns="0" rIns="0" tIns="0" bIns="0"/>
-          <a:lstStyle/>
-          <a:p>
-            <a:pPr algn="r"/>
-            <a:r>
-              <a:rPr sz="1000" b="0" i="0">
-                <a:solidFill>
-                  <a:srgbClr val="54595D"/>
-                </a:solidFill>
-                <a:latin typeface="Calibri"/>
-              </a:rPr>
-              <a:t>4</a:t>
-            </a:r>
-          </a:p>
-        </p:txBody>
-      </p:sp>
-      <p:sp>
-        <p:nvSpPr>
-          <p:cNvPr id="6" name="Rectangle 5"/>
-          <p:cNvSpPr/>
-          <p:nvPr/>
-        </p:nvSpPr>
-        <p:spPr>
-          <a:xfrm>
-            <a:off x="1884006" y="2656332"/>
-            <a:ext cx="8423681" cy="36576"/>
-          </a:xfrm>
-          <a:prstGeom prst="rect">
-            <a:avLst/>
-          </a:prstGeom>
-          <a:solidFill>
-            <a:srgbClr val="A9C8F0"/>
-          </a:solidFill>
-          <a:ln>
-            <a:noFill/>
-          </a:ln>
-          <a:effectLst/>
-        </p:spPr>
-        <p:style>
-          <a:lnRef idx="1">
-            <a:schemeClr val="accent1"/>
-          </a:lnRef>
-          <a:fillRef idx="3">
-            <a:schemeClr val="accent1"/>
-          </a:fillRef>
-          <a:effectRef idx="2">
-            <a:schemeClr val="accent1"/>
-          </a:effectRef>
-          <a:fontRef idx="minor">
-            <a:schemeClr val="lt1"/>
-          </a:fontRef>
-        </p:style>
-        <p:txBody>
-          <a:bodyPr rtlCol="0" anchor="ctr"/>
-          <a:lstStyle/>
-          <a:p/>
-        </p:txBody>
-      </p:sp>
-      <p:sp>
-        <p:nvSpPr>
-          <p:cNvPr id="7" name="Oval 6"/>
-          <p:cNvSpPr/>
-          <p:nvPr/>
-        </p:nvSpPr>
-        <p:spPr>
-          <a:xfrm>
-            <a:off x="1563966" y="2354580"/>
-            <a:ext cx="640080" cy="640080"/>
-          </a:xfrm>
-          <a:prstGeom prst="ellipse">
-            <a:avLst/>
-          </a:prstGeom>
-          <a:solidFill>
-            <a:srgbClr val="F2B705"/>
-          </a:solidFill>
-          <a:ln>
-            <a:noFill/>
-          </a:ln>
-          <a:effectLst/>
-        </p:spPr>
-        <p:style>
-          <a:lnRef idx="1">
-            <a:schemeClr val="accent1"/>
-          </a:lnRef>
-          <a:fillRef idx="3">
-            <a:schemeClr val="accent1"/>
-          </a:fillRef>
-          <a:effectRef idx="2">
-            <a:schemeClr val="accent1"/>
-          </a:effectRef>
-          <a:fontRef idx="minor">
-            <a:schemeClr val="lt1"/>
-          </a:fontRef>
-        </p:style>
-        <p:txBody>
-          <a:bodyPr rtlCol="0" anchor="ctr" lIns="0" rIns="0" tIns="0" bIns="0"/>
-          <a:lstStyle/>
-          <a:p>
-            <a:pPr algn="ctr"/>
-            <a:r>
-              <a:rPr sz="2000" b="1">
-                <a:solidFill>
-                  <a:srgbClr val="202122"/>
-                </a:solidFill>
-                <a:latin typeface="Calibri"/>
-              </a:rPr>
-              <a:t>1</a:t>
-            </a:r>
-          </a:p>
-        </p:txBody>
-      </p:sp>
-      <p:sp>
-        <p:nvSpPr>
-          <p:cNvPr id="8" name="TextBox 7"/>
-          <p:cNvSpPr txBox="1"/>
-          <p:nvPr/>
-        </p:nvSpPr>
-        <p:spPr>
-          <a:xfrm>
-            <a:off x="548640" y="3131820"/>
-            <a:ext cx="2670733" cy="731520"/>
-          </a:xfrm>
-          <a:prstGeom prst="rect">
-            <a:avLst/>
-          </a:prstGeom>
-          <a:noFill/>
-        </p:spPr>
-        <p:txBody>
-          <a:bodyPr wrap="square" anchor="t" lIns="0" rIns="0" tIns="0" bIns="0"/>
-          <a:lstStyle/>
-          <a:p>
-            <a:pPr algn="ctr"/>
-            <a:r>
-              <a:rPr sz="1700" b="1" i="0">
-                <a:solidFill>
-                  <a:srgbClr val="03306E"/>
-                </a:solidFill>
-                <a:latin typeface="Calibri"/>
-              </a:rPr>
-              <a:t>Open</a:t>
-            </a:r>
-          </a:p>
-        </p:txBody>
-      </p:sp>
-      <p:sp>
-        <p:nvSpPr>
-          <p:cNvPr id="9" name="Rounded Rectangle 8"/>
-          <p:cNvSpPr/>
-          <p:nvPr/>
-        </p:nvSpPr>
-        <p:spPr>
-          <a:xfrm>
-            <a:off x="548640" y="3909060"/>
-            <a:ext cx="2670733" cy="1508760"/>
-          </a:xfrm>
-          <a:prstGeom prst="roundRect">
-            <a:avLst>
-              <a:gd name="adj" fmla="val 6000"/>
-            </a:avLst>
-          </a:prstGeom>
-          <a:solidFill>
-            <a:srgbClr val="EAF3FF"/>
-          </a:solidFill>
-          <a:ln>
-            <a:noFill/>
-          </a:ln>
-          <a:effectLst/>
-        </p:spPr>
-        <p:style>
-          <a:lnRef idx="1">
-            <a:schemeClr val="accent1"/>
-          </a:lnRef>
-          <a:fillRef idx="3">
-            <a:schemeClr val="accent1"/>
-          </a:fillRef>
-          <a:effectRef idx="2">
-            <a:schemeClr val="accent1"/>
-          </a:effectRef>
-          <a:fontRef idx="minor">
-            <a:schemeClr val="lt1"/>
-          </a:fontRef>
-        </p:style>
-        <p:txBody>
-          <a:bodyPr rtlCol="0" anchor="ctr"/>
-          <a:lstStyle/>
-          <a:p/>
-        </p:txBody>
-      </p:sp>
-      <p:sp>
-        <p:nvSpPr>
-          <p:cNvPr id="10" name="TextBox 9"/>
-          <p:cNvSpPr txBox="1"/>
-          <p:nvPr/>
-        </p:nvSpPr>
-        <p:spPr>
-          <a:xfrm>
-            <a:off x="685800" y="4046220"/>
-            <a:ext cx="2396413" cy="1234439"/>
-          </a:xfrm>
-          <a:prstGeom prst="rect">
-            <a:avLst/>
-          </a:prstGeom>
-          <a:noFill/>
-        </p:spPr>
-        <p:txBody>
-          <a:bodyPr wrap="square" anchor="t" lIns="0" rIns="0" tIns="0" bIns="0"/>
-          <a:lstStyle/>
-          <a:p>
-            <a:pPr algn="l"/>
-            <a:r>
-              <a:rPr sz="1800" b="0" i="0">
-                <a:solidFill>
-                  <a:srgbClr val="202122"/>
-                </a:solidFill>
-                <a:latin typeface="Calibri"/>
-              </a:rPr>
-              <a:t>open('scores.txt', 'r') to read, 'w' to write, 'a' to append.</a:t>
-            </a:r>
-          </a:p>
-        </p:txBody>
-      </p:sp>
-      <p:sp>
-        <p:nvSpPr>
-          <p:cNvPr id="11" name="Oval 10"/>
-          <p:cNvSpPr/>
-          <p:nvPr/>
-        </p:nvSpPr>
-        <p:spPr>
-          <a:xfrm>
-            <a:off x="4371860" y="2354580"/>
-            <a:ext cx="640080" cy="640080"/>
-          </a:xfrm>
-          <a:prstGeom prst="ellipse">
-            <a:avLst/>
-          </a:prstGeom>
-          <a:solidFill>
-            <a:srgbClr val="F2B705"/>
-          </a:solidFill>
-          <a:ln>
-            <a:noFill/>
-          </a:ln>
-          <a:effectLst/>
-        </p:spPr>
-        <p:style>
-          <a:lnRef idx="1">
-            <a:schemeClr val="accent1"/>
-          </a:lnRef>
-          <a:fillRef idx="3">
-            <a:schemeClr val="accent1"/>
-          </a:fillRef>
-          <a:effectRef idx="2">
-            <a:schemeClr val="accent1"/>
-          </a:effectRef>
-          <a:fontRef idx="minor">
-            <a:schemeClr val="lt1"/>
-          </a:fontRef>
-        </p:style>
-        <p:txBody>
-          <a:bodyPr rtlCol="0" anchor="ctr" lIns="0" rIns="0" tIns="0" bIns="0"/>
-          <a:lstStyle/>
-          <a:p>
-            <a:pPr algn="ctr"/>
-            <a:r>
-              <a:rPr sz="2000" b="1">
-                <a:solidFill>
-                  <a:srgbClr val="202122"/>
-                </a:solidFill>
-                <a:latin typeface="Calibri"/>
-              </a:rPr>
-              <a:t>2</a:t>
-            </a:r>
-          </a:p>
-        </p:txBody>
-      </p:sp>
-      <p:sp>
-        <p:nvSpPr>
-          <p:cNvPr id="12" name="TextBox 11"/>
-          <p:cNvSpPr txBox="1"/>
-          <p:nvPr/>
-        </p:nvSpPr>
-        <p:spPr>
-          <a:xfrm>
-            <a:off x="3356533" y="3131820"/>
-            <a:ext cx="2670733" cy="731520"/>
-          </a:xfrm>
-          <a:prstGeom prst="rect">
-            <a:avLst/>
-          </a:prstGeom>
-          <a:noFill/>
-        </p:spPr>
-        <p:txBody>
-          <a:bodyPr wrap="square" anchor="t" lIns="0" rIns="0" tIns="0" bIns="0"/>
-          <a:lstStyle/>
-          <a:p>
-            <a:pPr algn="ctr"/>
-            <a:r>
-              <a:rPr sz="1700" b="1" i="0">
-                <a:solidFill>
-                  <a:srgbClr val="03306E"/>
-                </a:solidFill>
-                <a:latin typeface="Calibri"/>
-              </a:rPr>
-              <a:t>Read or write</a:t>
-            </a:r>
-          </a:p>
-        </p:txBody>
-      </p:sp>
-      <p:sp>
-        <p:nvSpPr>
-          <p:cNvPr id="13" name="Rounded Rectangle 12"/>
-          <p:cNvSpPr/>
-          <p:nvPr/>
-        </p:nvSpPr>
-        <p:spPr>
-          <a:xfrm>
-            <a:off x="3356533" y="3909060"/>
-            <a:ext cx="2670733" cy="1508760"/>
-          </a:xfrm>
-          <a:prstGeom prst="roundRect">
-            <a:avLst>
-              <a:gd name="adj" fmla="val 6000"/>
-            </a:avLst>
-          </a:prstGeom>
-          <a:solidFill>
-            <a:srgbClr val="EAF3FF"/>
-          </a:solidFill>
-          <a:ln>
-            <a:noFill/>
-          </a:ln>
-          <a:effectLst/>
-        </p:spPr>
-        <p:style>
-          <a:lnRef idx="1">
-            <a:schemeClr val="accent1"/>
-          </a:lnRef>
-          <a:fillRef idx="3">
-            <a:schemeClr val="accent1"/>
-          </a:fillRef>
-          <a:effectRef idx="2">
-            <a:schemeClr val="accent1"/>
-          </a:effectRef>
-          <a:fontRef idx="minor">
-            <a:schemeClr val="lt1"/>
-          </a:fontRef>
-        </p:style>
-        <p:txBody>
-          <a:bodyPr rtlCol="0" anchor="ctr"/>
-          <a:lstStyle/>
-          <a:p/>
-        </p:txBody>
-      </p:sp>
-      <p:sp>
-        <p:nvSpPr>
-          <p:cNvPr id="14" name="TextBox 13"/>
-          <p:cNvSpPr txBox="1"/>
-          <p:nvPr/>
-        </p:nvSpPr>
-        <p:spPr>
-          <a:xfrm>
-            <a:off x="3493693" y="4046220"/>
-            <a:ext cx="2396413" cy="1234439"/>
-          </a:xfrm>
-          <a:prstGeom prst="rect">
-            <a:avLst/>
-          </a:prstGeom>
-          <a:noFill/>
-        </p:spPr>
-        <p:txBody>
-          <a:bodyPr wrap="square" anchor="t" lIns="0" rIns="0" tIns="0" bIns="0"/>
-          <a:lstStyle/>
-          <a:p>
-            <a:pPr algn="l"/>
-            <a:r>
-              <a:rPr sz="1800" b="0" i="0">
-                <a:solidFill>
-                  <a:srgbClr val="202122"/>
-                </a:solidFill>
-                <a:latin typeface="Calibri"/>
-              </a:rPr>
-              <a:t>read(), readline(), readlines(), or write().</a:t>
-            </a:r>
-          </a:p>
-        </p:txBody>
-      </p:sp>
-      <p:sp>
-        <p:nvSpPr>
-          <p:cNvPr id="15" name="Oval 14"/>
-          <p:cNvSpPr/>
-          <p:nvPr/>
-        </p:nvSpPr>
-        <p:spPr>
-          <a:xfrm>
-            <a:off x="7179754" y="2354580"/>
-            <a:ext cx="640080" cy="640080"/>
-          </a:xfrm>
-          <a:prstGeom prst="ellipse">
-            <a:avLst/>
-          </a:prstGeom>
-          <a:solidFill>
-            <a:srgbClr val="F2B705"/>
-          </a:solidFill>
-          <a:ln>
-            <a:noFill/>
-          </a:ln>
-          <a:effectLst/>
-        </p:spPr>
-        <p:style>
-          <a:lnRef idx="1">
-            <a:schemeClr val="accent1"/>
-          </a:lnRef>
-          <a:fillRef idx="3">
-            <a:schemeClr val="accent1"/>
-          </a:fillRef>
-          <a:effectRef idx="2">
-            <a:schemeClr val="accent1"/>
-          </a:effectRef>
-          <a:fontRef idx="minor">
-            <a:schemeClr val="lt1"/>
-          </a:fontRef>
-        </p:style>
-        <p:txBody>
-          <a:bodyPr rtlCol="0" anchor="ctr" lIns="0" rIns="0" tIns="0" bIns="0"/>
-          <a:lstStyle/>
-          <a:p>
-            <a:pPr algn="ctr"/>
-            <a:r>
-              <a:rPr sz="2000" b="1">
-                <a:solidFill>
-                  <a:srgbClr val="202122"/>
-                </a:solidFill>
-                <a:latin typeface="Calibri"/>
-              </a:rPr>
-              <a:t>3</a:t>
-            </a:r>
-          </a:p>
-        </p:txBody>
-      </p:sp>
-      <p:sp>
-        <p:nvSpPr>
-          <p:cNvPr id="16" name="TextBox 15"/>
-          <p:cNvSpPr txBox="1"/>
-          <p:nvPr/>
-        </p:nvSpPr>
-        <p:spPr>
-          <a:xfrm>
-            <a:off x="6164427" y="3131820"/>
-            <a:ext cx="2670733" cy="731520"/>
-          </a:xfrm>
-          <a:prstGeom prst="rect">
-            <a:avLst/>
-          </a:prstGeom>
-          <a:noFill/>
-        </p:spPr>
-        <p:txBody>
-          <a:bodyPr wrap="square" anchor="t" lIns="0" rIns="0" tIns="0" bIns="0"/>
-          <a:lstStyle/>
-          <a:p>
-            <a:pPr algn="ctr"/>
-            <a:r>
-              <a:rPr sz="1700" b="1" i="0">
-                <a:solidFill>
-                  <a:srgbClr val="03306E"/>
-                </a:solidFill>
-                <a:latin typeface="Calibri"/>
-              </a:rPr>
-              <a:t>Process</a:t>
-            </a:r>
-          </a:p>
-        </p:txBody>
-      </p:sp>
-      <p:sp>
-        <p:nvSpPr>
-          <p:cNvPr id="17" name="Rounded Rectangle 16"/>
-          <p:cNvSpPr/>
-          <p:nvPr/>
-        </p:nvSpPr>
-        <p:spPr>
-          <a:xfrm>
-            <a:off x="6164427" y="3909060"/>
-            <a:ext cx="2670733" cy="1508760"/>
-          </a:xfrm>
-          <a:prstGeom prst="roundRect">
-            <a:avLst>
-              <a:gd name="adj" fmla="val 6000"/>
-            </a:avLst>
-          </a:prstGeom>
-          <a:solidFill>
-            <a:srgbClr val="EAF3FF"/>
-          </a:solidFill>
-          <a:ln>
-            <a:noFill/>
-          </a:ln>
-          <a:effectLst/>
-        </p:spPr>
-        <p:style>
-          <a:lnRef idx="1">
-            <a:schemeClr val="accent1"/>
-          </a:lnRef>
-          <a:fillRef idx="3">
-            <a:schemeClr val="accent1"/>
-          </a:fillRef>
-          <a:effectRef idx="2">
-            <a:schemeClr val="accent1"/>
-          </a:effectRef>
-          <a:fontRef idx="minor">
-            <a:schemeClr val="lt1"/>
-          </a:fontRef>
-        </p:style>
-        <p:txBody>
-          <a:bodyPr rtlCol="0" anchor="ctr"/>
-          <a:lstStyle/>
-          <a:p/>
-        </p:txBody>
-      </p:sp>
-      <p:sp>
-        <p:nvSpPr>
-          <p:cNvPr id="18" name="TextBox 17"/>
-          <p:cNvSpPr txBox="1"/>
-          <p:nvPr/>
-        </p:nvSpPr>
-        <p:spPr>
-          <a:xfrm>
-            <a:off x="6301587" y="4046220"/>
-            <a:ext cx="2396413" cy="1234439"/>
-          </a:xfrm>
-          <a:prstGeom prst="rect">
-            <a:avLst/>
-          </a:prstGeom>
-          <a:noFill/>
-        </p:spPr>
-        <p:txBody>
-          <a:bodyPr wrap="square" anchor="t" lIns="0" rIns="0" tIns="0" bIns="0"/>
-          <a:lstStyle/>
-          <a:p>
-            <a:pPr algn="l"/>
-            <a:r>
-              <a:rPr sz="1800" b="0" i="0">
-                <a:solidFill>
-                  <a:srgbClr val="202122"/>
-                </a:solidFill>
-                <a:latin typeface="Calibri"/>
-              </a:rPr>
-              <a:t>line.strip() and line.split(',') to tidy and split each line.</a:t>
-            </a:r>
-          </a:p>
-        </p:txBody>
-      </p:sp>
-      <p:sp>
-        <p:nvSpPr>
-          <p:cNvPr id="19" name="Oval 18"/>
-          <p:cNvSpPr/>
-          <p:nvPr/>
-        </p:nvSpPr>
-        <p:spPr>
-          <a:xfrm>
-            <a:off x="9987648" y="2354580"/>
-            <a:ext cx="640080" cy="640080"/>
-          </a:xfrm>
-          <a:prstGeom prst="ellipse">
-            <a:avLst/>
-          </a:prstGeom>
-          <a:solidFill>
-            <a:srgbClr val="F2B705"/>
-          </a:solidFill>
-          <a:ln>
-            <a:noFill/>
-          </a:ln>
-          <a:effectLst/>
-        </p:spPr>
-        <p:style>
-          <a:lnRef idx="1">
-            <a:schemeClr val="accent1"/>
-          </a:lnRef>
-          <a:fillRef idx="3">
-            <a:schemeClr val="accent1"/>
-          </a:fillRef>
-          <a:effectRef idx="2">
-            <a:schemeClr val="accent1"/>
-          </a:effectRef>
-          <a:fontRef idx="minor">
-            <a:schemeClr val="lt1"/>
-          </a:fontRef>
-        </p:style>
-        <p:txBody>
-          <a:bodyPr rtlCol="0" anchor="ctr" lIns="0" rIns="0" tIns="0" bIns="0"/>
-          <a:lstStyle/>
-          <a:p>
-            <a:pPr algn="ctr"/>
-            <a:r>
-              <a:rPr sz="2000" b="1">
-                <a:solidFill>
-                  <a:srgbClr val="202122"/>
-                </a:solidFill>
-                <a:latin typeface="Calibri"/>
-              </a:rPr>
-              <a:t>4</a:t>
-            </a:r>
-          </a:p>
-        </p:txBody>
-      </p:sp>
-      <p:sp>
-        <p:nvSpPr>
-          <p:cNvPr id="20" name="TextBox 19"/>
-          <p:cNvSpPr txBox="1"/>
-          <p:nvPr/>
-        </p:nvSpPr>
-        <p:spPr>
-          <a:xfrm>
-            <a:off x="8972321" y="3131820"/>
-            <a:ext cx="2670733" cy="731520"/>
-          </a:xfrm>
-          <a:prstGeom prst="rect">
-            <a:avLst/>
-          </a:prstGeom>
-          <a:noFill/>
-        </p:spPr>
-        <p:txBody>
-          <a:bodyPr wrap="square" anchor="t" lIns="0" rIns="0" tIns="0" bIns="0"/>
-          <a:lstStyle/>
-          <a:p>
-            <a:pPr algn="ctr"/>
-            <a:r>
-              <a:rPr sz="1700" b="1" i="0">
-                <a:solidFill>
-                  <a:srgbClr val="03306E"/>
-                </a:solidFill>
-                <a:latin typeface="Calibri"/>
-              </a:rPr>
-              <a:t>Close</a:t>
-            </a:r>
-          </a:p>
-        </p:txBody>
-      </p:sp>
-      <p:sp>
-        <p:nvSpPr>
-          <p:cNvPr id="21" name="Rounded Rectangle 20"/>
-          <p:cNvSpPr/>
-          <p:nvPr/>
-        </p:nvSpPr>
-        <p:spPr>
-          <a:xfrm>
-            <a:off x="8972321" y="3909060"/>
-            <a:ext cx="2670733" cy="1508760"/>
-          </a:xfrm>
-          <a:prstGeom prst="roundRect">
-            <a:avLst>
-              <a:gd name="adj" fmla="val 6000"/>
-            </a:avLst>
-          </a:prstGeom>
-          <a:solidFill>
-            <a:srgbClr val="EAF3FF"/>
-          </a:solidFill>
-          <a:ln>
-            <a:noFill/>
-          </a:ln>
-          <a:effectLst/>
-        </p:spPr>
-        <p:style>
-          <a:lnRef idx="1">
-            <a:schemeClr val="accent1"/>
-          </a:lnRef>
-          <a:fillRef idx="3">
-            <a:schemeClr val="accent1"/>
-          </a:fillRef>
-          <a:effectRef idx="2">
-            <a:schemeClr val="accent1"/>
-          </a:effectRef>
-          <a:fontRef idx="minor">
-            <a:schemeClr val="lt1"/>
-          </a:fontRef>
-        </p:style>
-        <p:txBody>
-          <a:bodyPr rtlCol="0" anchor="ctr"/>
-          <a:lstStyle/>
-          <a:p/>
-        </p:txBody>
-      </p:sp>
-      <p:sp>
-        <p:nvSpPr>
-          <p:cNvPr id="22" name="TextBox 21"/>
-          <p:cNvSpPr txBox="1"/>
-          <p:nvPr/>
-        </p:nvSpPr>
-        <p:spPr>
-          <a:xfrm>
-            <a:off x="9109481" y="4046220"/>
-            <a:ext cx="2396413" cy="1234439"/>
-          </a:xfrm>
-          <a:prstGeom prst="rect">
-            <a:avLst/>
-          </a:prstGeom>
-          <a:noFill/>
-        </p:spPr>
-        <p:txBody>
-          <a:bodyPr wrap="square" anchor="t" lIns="0" rIns="0" tIns="0" bIns="0"/>
-          <a:lstStyle/>
-          <a:p>
-            <a:pPr algn="l"/>
-            <a:r>
-              <a:rPr sz="1800" b="0" i="0">
-                <a:solidFill>
-                  <a:srgbClr val="202122"/>
-                </a:solidFill>
-                <a:latin typeface="Calibri"/>
-              </a:rPr>
-              <a:t>close() so data is saved and the file is released.</a:t>
-            </a:r>
-          </a:p>
-        </p:txBody>
-      </p:sp>
-    </p:spTree>
-  </p:cSld>
-  <p:clrMapOvr>
-    <a:masterClrMapping/>
-  </p:clrMapOvr>
-</p:sld>
-</file>
-
 <file path=ppt/slides/slide5.xml><?xml version="1.0" encoding="utf-8"?>
 <p:sld xmlns:a="http://schemas.openxmlformats.org/drawingml/2006/main" xmlns:p="http://schemas.openxmlformats.org/presentationml/2006/main" xmlns:r="http://schemas.openxmlformats.org/officeDocument/2006/relationships">
   <p:cSld>
@@ -6519,7 +9847,7 @@
                 </a:solidFill>
                 <a:latin typeface="Cambria"/>
               </a:rPr>
-              <a:t>Selection</a:t>
+              <a:t>Quick check: Operators</a:t>
             </a:r>
           </a:p>
         </p:txBody>
@@ -6592,58 +9920,14 @@
       </p:sp>
       <p:sp>
         <p:nvSpPr>
-          <p:cNvPr id="6" name="Rounded Rectangle 5"/>
+          <p:cNvPr id="6" name="Oval 5"/>
           <p:cNvSpPr/>
           <p:nvPr/>
         </p:nvSpPr>
         <p:spPr>
           <a:xfrm>
-            <a:off x="548640" y="1600200"/>
-            <a:ext cx="3515258" cy="4572000"/>
-          </a:xfrm>
-          <a:prstGeom prst="roundRect">
-            <a:avLst>
-              <a:gd name="adj" fmla="val 6000"/>
-            </a:avLst>
-          </a:prstGeom>
-          <a:solidFill>
-            <a:srgbClr val="EAF3FF"/>
-          </a:solidFill>
-          <a:ln>
-            <a:noFill/>
-          </a:ln>
-          <a:effectLst/>
-        </p:spPr>
-        <p:style>
-          <a:lnRef idx="1">
-            <a:schemeClr val="accent1"/>
-          </a:lnRef>
-          <a:fillRef idx="3">
-            <a:schemeClr val="accent1"/>
-          </a:fillRef>
-          <a:effectRef idx="2">
-            <a:schemeClr val="accent1"/>
-          </a:effectRef>
-          <a:fontRef idx="minor">
-            <a:schemeClr val="lt1"/>
-          </a:fontRef>
-        </p:style>
-        <p:txBody>
-          <a:bodyPr rtlCol="0" anchor="ctr"/>
-          <a:lstStyle/>
-          <a:p/>
-        </p:txBody>
-      </p:sp>
-      <p:sp>
-        <p:nvSpPr>
-          <p:cNvPr id="7" name="Oval 6"/>
-          <p:cNvSpPr/>
-          <p:nvPr/>
-        </p:nvSpPr>
-        <p:spPr>
-          <a:xfrm>
-            <a:off x="777240" y="1828800"/>
-            <a:ext cx="457200" cy="457200"/>
+            <a:off x="548640" y="1691640"/>
+            <a:ext cx="502920" cy="502920"/>
           </a:xfrm>
           <a:prstGeom prst="ellipse">
             <a:avLst/>
@@ -6676,7 +9960,7 @@
           <a:p>
             <a:pPr algn="ctr"/>
             <a:r>
-              <a:rPr sz="1500" b="1">
+              <a:rPr sz="1600" b="1">
                 <a:solidFill>
                   <a:srgbClr val="202122"/>
                 </a:solidFill>
@@ -6689,124 +9973,47 @@
       </p:sp>
       <p:sp>
         <p:nvSpPr>
-          <p:cNvPr id="8" name="TextBox 7"/>
+          <p:cNvPr id="7" name="TextBox 6"/>
           <p:cNvSpPr txBox="1"/>
           <p:nvPr/>
         </p:nvSpPr>
         <p:spPr>
           <a:xfrm>
-            <a:off x="1371600" y="1801368"/>
-            <a:ext cx="2509418" cy="512064"/>
-          </a:xfrm>
-          <a:prstGeom prst="rect">
-            <a:avLst/>
-          </a:prstGeom>
-          <a:noFill/>
-        </p:spPr>
-        <p:txBody>
-          <a:bodyPr wrap="square" anchor="ctr" lIns="0" rIns="0" tIns="0" bIns="0"/>
+            <a:off x="1371600" y="1645920"/>
+            <a:ext cx="10271455" cy="1188720"/>
+          </a:xfrm>
+          <a:prstGeom prst="rect">
+            <a:avLst/>
+          </a:prstGeom>
+          <a:noFill/>
+        </p:spPr>
+        <p:txBody>
+          <a:bodyPr wrap="square" anchor="t" lIns="0" rIns="0" tIns="0" bIns="0"/>
           <a:lstStyle/>
           <a:p>
             <a:pPr algn="l"/>
             <a:r>
-              <a:rPr sz="1900" b="1" i="0">
-                <a:solidFill>
-                  <a:srgbClr val="03306E"/>
-                </a:solidFill>
-                <a:latin typeface="Calibri"/>
-              </a:rPr>
-              <a:t>if / elif / else</a:t>
-            </a:r>
-          </a:p>
-        </p:txBody>
-      </p:sp>
-      <p:sp>
-        <p:nvSpPr>
-          <p:cNvPr id="9" name="TextBox 8"/>
-          <p:cNvSpPr txBox="1"/>
-          <p:nvPr/>
-        </p:nvSpPr>
-        <p:spPr>
-          <a:xfrm>
-            <a:off x="777240" y="2468880"/>
-            <a:ext cx="3058058" cy="3566160"/>
-          </a:xfrm>
-          <a:prstGeom prst="rect">
-            <a:avLst/>
-          </a:prstGeom>
-          <a:noFill/>
-        </p:spPr>
-        <p:txBody>
-          <a:bodyPr wrap="square" anchor="t" lIns="0" rIns="0" tIns="0" bIns="0"/>
-          <a:lstStyle/>
-          <a:p>
-            <a:pPr algn="l"/>
-            <a:r>
-              <a:rPr sz="2000" b="0" i="0">
+              <a:rPr sz="2400" b="0" i="0">
                 <a:solidFill>
                   <a:srgbClr val="202122"/>
                 </a:solidFill>
                 <a:latin typeface="Calibri"/>
               </a:rPr>
-              <a:t>Checks conditions in order and runs the first block that is True.</a:t>
-            </a:r>
-          </a:p>
-        </p:txBody>
-      </p:sp>
-      <p:sp>
-        <p:nvSpPr>
-          <p:cNvPr id="10" name="Rounded Rectangle 9"/>
+              <a:t>What does 20 // 6 give?</a:t>
+            </a:r>
+          </a:p>
+        </p:txBody>
+      </p:sp>
+      <p:sp>
+        <p:nvSpPr>
+          <p:cNvPr id="8" name="Oval 7"/>
           <p:cNvSpPr/>
           <p:nvPr/>
         </p:nvSpPr>
         <p:spPr>
           <a:xfrm>
-            <a:off x="4338218" y="1600200"/>
-            <a:ext cx="3515258" cy="4572000"/>
-          </a:xfrm>
-          <a:prstGeom prst="roundRect">
-            <a:avLst>
-              <a:gd name="adj" fmla="val 6000"/>
-            </a:avLst>
-          </a:prstGeom>
-          <a:solidFill>
-            <a:srgbClr val="EAF3FF"/>
-          </a:solidFill>
-          <a:ln>
-            <a:noFill/>
-          </a:ln>
-          <a:effectLst/>
-        </p:spPr>
-        <p:style>
-          <a:lnRef idx="1">
-            <a:schemeClr val="accent1"/>
-          </a:lnRef>
-          <a:fillRef idx="3">
-            <a:schemeClr val="accent1"/>
-          </a:fillRef>
-          <a:effectRef idx="2">
-            <a:schemeClr val="accent1"/>
-          </a:effectRef>
-          <a:fontRef idx="minor">
-            <a:schemeClr val="lt1"/>
-          </a:fontRef>
-        </p:style>
-        <p:txBody>
-          <a:bodyPr rtlCol="0" anchor="ctr"/>
-          <a:lstStyle/>
-          <a:p/>
-        </p:txBody>
-      </p:sp>
-      <p:sp>
-        <p:nvSpPr>
-          <p:cNvPr id="11" name="Oval 10"/>
-          <p:cNvSpPr/>
-          <p:nvPr/>
-        </p:nvSpPr>
-        <p:spPr>
-          <a:xfrm>
-            <a:off x="4566818" y="1828800"/>
-            <a:ext cx="457200" cy="457200"/>
+            <a:off x="548640" y="3108960"/>
+            <a:ext cx="502920" cy="502920"/>
           </a:xfrm>
           <a:prstGeom prst="ellipse">
             <a:avLst/>
@@ -6839,7 +10046,7 @@
           <a:p>
             <a:pPr algn="ctr"/>
             <a:r>
-              <a:rPr sz="1500" b="1">
+              <a:rPr sz="1600" b="1">
                 <a:solidFill>
                   <a:srgbClr val="202122"/>
                 </a:solidFill>
@@ -6852,124 +10059,47 @@
       </p:sp>
       <p:sp>
         <p:nvSpPr>
-          <p:cNvPr id="12" name="TextBox 11"/>
+          <p:cNvPr id="9" name="TextBox 8"/>
           <p:cNvSpPr txBox="1"/>
           <p:nvPr/>
         </p:nvSpPr>
         <p:spPr>
           <a:xfrm>
-            <a:off x="5161178" y="1801368"/>
-            <a:ext cx="2509418" cy="512064"/>
-          </a:xfrm>
-          <a:prstGeom prst="rect">
-            <a:avLst/>
-          </a:prstGeom>
-          <a:noFill/>
-        </p:spPr>
-        <p:txBody>
-          <a:bodyPr wrap="square" anchor="ctr" lIns="0" rIns="0" tIns="0" bIns="0"/>
+            <a:off x="1371600" y="3063240"/>
+            <a:ext cx="10271455" cy="1188720"/>
+          </a:xfrm>
+          <a:prstGeom prst="rect">
+            <a:avLst/>
+          </a:prstGeom>
+          <a:noFill/>
+        </p:spPr>
+        <p:txBody>
+          <a:bodyPr wrap="square" anchor="t" lIns="0" rIns="0" tIns="0" bIns="0"/>
           <a:lstStyle/>
           <a:p>
             <a:pPr algn="l"/>
             <a:r>
-              <a:rPr sz="1900" b="1" i="0">
-                <a:solidFill>
-                  <a:srgbClr val="03306E"/>
-                </a:solidFill>
-                <a:latin typeface="Calibri"/>
-              </a:rPr>
-              <a:t>match case</a:t>
-            </a:r>
-          </a:p>
-        </p:txBody>
-      </p:sp>
-      <p:sp>
-        <p:nvSpPr>
-          <p:cNvPr id="13" name="TextBox 12"/>
-          <p:cNvSpPr txBox="1"/>
-          <p:nvPr/>
-        </p:nvSpPr>
-        <p:spPr>
-          <a:xfrm>
-            <a:off x="4566818" y="2468880"/>
-            <a:ext cx="3058058" cy="3566160"/>
-          </a:xfrm>
-          <a:prstGeom prst="rect">
-            <a:avLst/>
-          </a:prstGeom>
-          <a:noFill/>
-        </p:spPr>
-        <p:txBody>
-          <a:bodyPr wrap="square" anchor="t" lIns="0" rIns="0" tIns="0" bIns="0"/>
-          <a:lstStyle/>
-          <a:p>
-            <a:pPr algn="l"/>
-            <a:r>
-              <a:rPr sz="2000" b="0" i="0">
+              <a:rPr sz="2400" b="0" i="0">
                 <a:solidFill>
                   <a:srgbClr val="202122"/>
                 </a:solidFill>
                 <a:latin typeface="Calibri"/>
               </a:rPr>
-              <a:t>Compares one value against several patterns. Tidy for menus.</a:t>
-            </a:r>
-          </a:p>
-        </p:txBody>
-      </p:sp>
-      <p:sp>
-        <p:nvSpPr>
-          <p:cNvPr id="14" name="Rounded Rectangle 13"/>
+              <a:t>What does 20 % 6 give?</a:t>
+            </a:r>
+          </a:p>
+        </p:txBody>
+      </p:sp>
+      <p:sp>
+        <p:nvSpPr>
+          <p:cNvPr id="10" name="Oval 9"/>
           <p:cNvSpPr/>
           <p:nvPr/>
         </p:nvSpPr>
         <p:spPr>
           <a:xfrm>
-            <a:off x="8127796" y="1600200"/>
-            <a:ext cx="3515258" cy="4572000"/>
-          </a:xfrm>
-          <a:prstGeom prst="roundRect">
-            <a:avLst>
-              <a:gd name="adj" fmla="val 6000"/>
-            </a:avLst>
-          </a:prstGeom>
-          <a:solidFill>
-            <a:srgbClr val="EAF3FF"/>
-          </a:solidFill>
-          <a:ln>
-            <a:noFill/>
-          </a:ln>
-          <a:effectLst/>
-        </p:spPr>
-        <p:style>
-          <a:lnRef idx="1">
-            <a:schemeClr val="accent1"/>
-          </a:lnRef>
-          <a:fillRef idx="3">
-            <a:schemeClr val="accent1"/>
-          </a:fillRef>
-          <a:effectRef idx="2">
-            <a:schemeClr val="accent1"/>
-          </a:effectRef>
-          <a:fontRef idx="minor">
-            <a:schemeClr val="lt1"/>
-          </a:fontRef>
-        </p:style>
-        <p:txBody>
-          <a:bodyPr rtlCol="0" anchor="ctr"/>
-          <a:lstStyle/>
-          <a:p/>
-        </p:txBody>
-      </p:sp>
-      <p:sp>
-        <p:nvSpPr>
-          <p:cNvPr id="15" name="Oval 14"/>
-          <p:cNvSpPr/>
-          <p:nvPr/>
-        </p:nvSpPr>
-        <p:spPr>
-          <a:xfrm>
-            <a:off x="8356396" y="1828800"/>
-            <a:ext cx="457200" cy="457200"/>
+            <a:off x="548640" y="4526280"/>
+            <a:ext cx="502920" cy="502920"/>
           </a:xfrm>
           <a:prstGeom prst="ellipse">
             <a:avLst/>
@@ -7002,7 +10132,7 @@
           <a:p>
             <a:pPr algn="ctr"/>
             <a:r>
-              <a:rPr sz="1500" b="1">
+              <a:rPr sz="1600" b="1">
                 <a:solidFill>
                   <a:srgbClr val="202122"/>
                 </a:solidFill>
@@ -7015,47 +10145,47 @@
       </p:sp>
       <p:sp>
         <p:nvSpPr>
-          <p:cNvPr id="16" name="TextBox 15"/>
+          <p:cNvPr id="11" name="TextBox 10"/>
           <p:cNvSpPr txBox="1"/>
           <p:nvPr/>
         </p:nvSpPr>
         <p:spPr>
           <a:xfrm>
-            <a:off x="8950756" y="1801368"/>
-            <a:ext cx="2509418" cy="512064"/>
-          </a:xfrm>
-          <a:prstGeom prst="rect">
-            <a:avLst/>
-          </a:prstGeom>
-          <a:noFill/>
-        </p:spPr>
-        <p:txBody>
-          <a:bodyPr wrap="square" anchor="ctr" lIns="0" rIns="0" tIns="0" bIns="0"/>
+            <a:off x="1371600" y="4480560"/>
+            <a:ext cx="10271455" cy="1188720"/>
+          </a:xfrm>
+          <a:prstGeom prst="rect">
+            <a:avLst/>
+          </a:prstGeom>
+          <a:noFill/>
+        </p:spPr>
+        <p:txBody>
+          <a:bodyPr wrap="square" anchor="t" lIns="0" rIns="0" tIns="0" bIns="0"/>
           <a:lstStyle/>
           <a:p>
             <a:pPr algn="l"/>
             <a:r>
-              <a:rPr sz="1900" b="1" i="0">
-                <a:solidFill>
-                  <a:srgbClr val="03306E"/>
-                </a:solidFill>
-                <a:latin typeface="Calibri"/>
-              </a:rPr>
-              <a:t>try except</a:t>
-            </a:r>
-          </a:p>
-        </p:txBody>
-      </p:sp>
-      <p:sp>
-        <p:nvSpPr>
-          <p:cNvPr id="17" name="TextBox 16"/>
+              <a:rPr sz="2400" b="0" i="0">
+                <a:solidFill>
+                  <a:srgbClr val="202122"/>
+                </a:solidFill>
+                <a:latin typeface="Calibri"/>
+              </a:rPr>
+              <a:t>What is the difference between = and ==?</a:t>
+            </a:r>
+          </a:p>
+        </p:txBody>
+      </p:sp>
+      <p:sp>
+        <p:nvSpPr>
+          <p:cNvPr id="12" name="TextBox 11"/>
           <p:cNvSpPr txBox="1"/>
           <p:nvPr/>
         </p:nvSpPr>
         <p:spPr>
           <a:xfrm>
-            <a:off x="8356396" y="2468880"/>
-            <a:ext cx="3058058" cy="3566160"/>
+            <a:off x="548640" y="5852160"/>
+            <a:ext cx="11094415" cy="365760"/>
           </a:xfrm>
           <a:prstGeom prst="rect">
             <a:avLst/>
@@ -7068,13 +10198,13 @@
           <a:p>
             <a:pPr algn="l"/>
             <a:r>
-              <a:rPr sz="2000" b="0" i="0">
-                <a:solidFill>
-                  <a:srgbClr val="202122"/>
-                </a:solidFill>
-                <a:latin typeface="Calibri"/>
-              </a:rPr>
-              <a:t>Catches errors, e.g. when a user types letters instead of a number.</a:t>
+              <a:rPr sz="1300" b="0" i="1">
+                <a:solidFill>
+                  <a:srgbClr val="54595D"/>
+                </a:solidFill>
+                <a:latin typeface="Calibri"/>
+              </a:rPr>
+              <a:t>Answer on mini whiteboards or in your book. Answers are in the speaker notes.</a:t>
             </a:r>
           </a:p>
         </p:txBody>
@@ -7166,7 +10296,7 @@
                 </a:solidFill>
                 <a:latin typeface="Cambria"/>
               </a:rPr>
-              <a:t>Iteration</a:t>
+              <a:t>Working with text files</a:t>
             </a:r>
           </a:p>
         </p:txBody>
@@ -7239,18 +10369,105 @@
       </p:sp>
       <p:sp>
         <p:nvSpPr>
-          <p:cNvPr id="6" name="Rounded Rectangle 5"/>
+          <p:cNvPr id="6" name="TextBox 5"/>
+          <p:cNvSpPr txBox="1"/>
+          <p:nvPr/>
+        </p:nvSpPr>
+        <p:spPr>
+          <a:xfrm>
+            <a:off x="548640" y="1554480"/>
+            <a:ext cx="6720840" cy="4617720"/>
+          </a:xfrm>
+          <a:prstGeom prst="rect">
+            <a:avLst/>
+          </a:prstGeom>
+          <a:noFill/>
+        </p:spPr>
+        <p:txBody>
+          <a:bodyPr wrap="square" lIns="0" rIns="0" tIns="0" bIns="0">
+            <a:spAutoFit/>
+          </a:bodyPr>
+          <a:lstStyle/>
+          <a:p>
+            <a:pPr>
+              <a:spcAft>
+                <a:spcPts val="1320"/>
+              </a:spcAft>
+            </a:pPr>
+            <a:r>
+              <a:rPr sz="2200" b="0">
+                <a:solidFill>
+                  <a:srgbClr val="202122"/>
+                </a:solidFill>
+                <a:latin typeface="Calibri"/>
+              </a:rPr>
+              <a:t>Text files let programs save data between runs.</a:t>
+            </a:r>
+          </a:p>
+          <a:p>
+            <a:pPr>
+              <a:spcAft>
+                <a:spcPts val="1320"/>
+              </a:spcAft>
+            </a:pPr>
+            <a:r>
+              <a:rPr sz="2200" b="0">
+                <a:solidFill>
+                  <a:srgbClr val="202122"/>
+                </a:solidFill>
+                <a:latin typeface="Calibri"/>
+              </a:rPr>
+              <a:t>open() opens a file in a mode: 'r' to read, 'w' to write (replacing the contents) or 'a' to append (adding to the end). read() gets everything, readline() one line and readlines() a list of lines. write() adds text.</a:t>
+            </a:r>
+          </a:p>
+          <a:p>
+            <a:pPr>
+              <a:spcAft>
+                <a:spcPts val="1320"/>
+              </a:spcAft>
+            </a:pPr>
+            <a:r>
+              <a:rPr sz="2200" b="0">
+                <a:solidFill>
+                  <a:srgbClr val="202122"/>
+                </a:solidFill>
+                <a:latin typeface="Calibri"/>
+              </a:rPr>
+              <a:t>Each line usually ends with a newline, so line.strip() removes it, and line.split(',') breaks a line into parts.</a:t>
+            </a:r>
+          </a:p>
+          <a:p>
+            <a:pPr>
+              <a:spcAft>
+                <a:spcPts val="1320"/>
+              </a:spcAft>
+            </a:pPr>
+            <a:r>
+              <a:rPr sz="2200" b="0">
+                <a:solidFill>
+                  <a:srgbClr val="202122"/>
+                </a:solidFill>
+                <a:latin typeface="Calibri"/>
+              </a:rPr>
+              <a:t>Always close() the file, or use 'with open(...)', so data is saved and the file is released.</a:t>
+            </a:r>
+          </a:p>
+        </p:txBody>
+      </p:sp>
+      <p:sp>
+        <p:nvSpPr>
+          <p:cNvPr id="7" name="Rounded Rectangle 6"/>
           <p:cNvSpPr/>
           <p:nvPr/>
         </p:nvSpPr>
         <p:spPr>
           <a:xfrm>
-            <a:off x="548640" y="1600200"/>
-            <a:ext cx="5364327" cy="640080"/>
+            <a:off x="7772400" y="1554480"/>
+            <a:ext cx="3867912" cy="4526280"/>
           </a:xfrm>
           <a:prstGeom prst="roundRect">
             <a:avLst>
-              <a:gd name="adj" fmla="val 15000"/>
+              <a:gd name="adj" fmla="val 8000"/>
             </a:avLst>
           </a:prstGeom>
           <a:solidFill>
@@ -7283,55 +10500,20 @@
       </p:sp>
       <p:sp>
         <p:nvSpPr>
-          <p:cNvPr id="7" name="TextBox 6"/>
-          <p:cNvSpPr txBox="1"/>
-          <p:nvPr/>
-        </p:nvSpPr>
-        <p:spPr>
-          <a:xfrm>
-            <a:off x="777240" y="1600200"/>
-            <a:ext cx="4907127" cy="640080"/>
-          </a:xfrm>
-          <a:prstGeom prst="rect">
-            <a:avLst/>
-          </a:prstGeom>
-          <a:noFill/>
-        </p:spPr>
-        <p:txBody>
-          <a:bodyPr wrap="square" anchor="ctr" lIns="0" rIns="0" tIns="0" bIns="0"/>
-          <a:lstStyle/>
-          <a:p>
-            <a:pPr algn="l"/>
-            <a:r>
-              <a:rPr sz="2000" b="1" i="0">
-                <a:solidFill>
-                  <a:srgbClr val="FFFFFF"/>
-                </a:solidFill>
-                <a:latin typeface="Calibri"/>
-              </a:rPr>
-              <a:t>Count-controlled: for</a:t>
-            </a:r>
-          </a:p>
-        </p:txBody>
-      </p:sp>
-      <p:sp>
-        <p:nvSpPr>
-          <p:cNvPr id="8" name="Rounded Rectangle 7"/>
+          <p:cNvPr id="8" name="Oval 7"/>
           <p:cNvSpPr/>
           <p:nvPr/>
         </p:nvSpPr>
         <p:spPr>
           <a:xfrm>
-            <a:off x="548640" y="2377440"/>
-            <a:ext cx="5364327" cy="3794760"/>
-          </a:xfrm>
-          <a:prstGeom prst="roundRect">
-            <a:avLst>
-              <a:gd name="adj" fmla="val 4000"/>
-            </a:avLst>
+            <a:off x="8046720" y="1828800"/>
+            <a:ext cx="548640" cy="548640"/>
+          </a:xfrm>
+          <a:prstGeom prst="ellipse">
+            <a:avLst/>
           </a:prstGeom>
           <a:solidFill>
-            <a:srgbClr val="EAF3FF"/>
+            <a:srgbClr val="F2B705"/>
           </a:solidFill>
           <a:ln>
             <a:noFill/>
@@ -7353,9 +10535,20 @@
           </a:fontRef>
         </p:style>
         <p:txBody>
-          <a:bodyPr rtlCol="0" anchor="ctr"/>
-          <a:lstStyle/>
-          <a:p/>
+          <a:bodyPr rtlCol="0" anchor="ctr" lIns="0" rIns="0" tIns="0" bIns="0"/>
+          <a:lstStyle/>
+          <a:p>
+            <a:pPr algn="ctr"/>
+            <a:r>
+              <a:rPr sz="1300" b="1">
+                <a:solidFill>
+                  <a:srgbClr val="202122"/>
+                </a:solidFill>
+                <a:latin typeface="Calibri"/>
+              </a:rPr>
+              <a:t>e.g.</a:t>
+            </a:r>
+          </a:p>
         </p:txBody>
       </p:sp>
       <p:sp>
@@ -7366,347 +10559,60 @@
         </p:nvSpPr>
         <p:spPr>
           <a:xfrm>
-            <a:off x="822959" y="2606040"/>
-            <a:ext cx="4815687" cy="3337560"/>
-          </a:xfrm>
-          <a:prstGeom prst="rect">
-            <a:avLst/>
-          </a:prstGeom>
-          <a:noFill/>
-        </p:spPr>
-        <p:txBody>
-          <a:bodyPr wrap="square" lIns="0" rIns="0" tIns="0" bIns="0">
-            <a:spAutoFit/>
-          </a:bodyPr>
-          <a:lstStyle/>
-          <a:p>
-            <a:pPr marL="274320" indent="-274320">
-              <a:spcAft>
-                <a:spcPts val="990"/>
-              </a:spcAft>
-              <a:buClr>
-                <a:srgbClr val="0645AD"/>
-              </a:buClr>
-              <a:buFont typeface="Arial"/>
-              <a:buChar char="•"/>
-            </a:pPr>
-            <a:r>
-              <a:rPr sz="2200" b="0">
-                <a:solidFill>
-                  <a:srgbClr val="202122"/>
-                </a:solidFill>
-                <a:latin typeface="Calibri"/>
-              </a:rPr>
-              <a:t>Repeats a known number of times</a:t>
-            </a:r>
-          </a:p>
-          <a:p>
-            <a:pPr marL="274320" indent="-274320">
-              <a:spcAft>
-                <a:spcPts val="990"/>
-              </a:spcAft>
-              <a:buClr>
-                <a:srgbClr val="0645AD"/>
-              </a:buClr>
-              <a:buFont typeface="Arial"/>
-              <a:buChar char="•"/>
-            </a:pPr>
-            <a:r>
-              <a:rPr sz="2200" b="0">
-                <a:solidFill>
-                  <a:srgbClr val="202122"/>
-                </a:solidFill>
-                <a:latin typeface="Calibri"/>
-              </a:rPr>
-              <a:t>for i in range(10):</a:t>
-            </a:r>
-          </a:p>
-          <a:p>
-            <a:pPr marL="274320" indent="-274320">
-              <a:spcAft>
-                <a:spcPts val="990"/>
-              </a:spcAft>
-              <a:buClr>
-                <a:srgbClr val="0645AD"/>
-              </a:buClr>
-              <a:buFont typeface="Arial"/>
-              <a:buChar char="•"/>
-            </a:pPr>
-            <a:r>
-              <a:rPr sz="2200" b="1">
-                <a:solidFill>
-                  <a:srgbClr val="202122"/>
-                </a:solidFill>
-                <a:latin typeface="Calibri"/>
-              </a:rPr>
-              <a:t>Also loops over lists:</a:t>
-            </a:r>
-            <a:r>
-              <a:rPr sz="2200" b="0">
-                <a:solidFill>
-                  <a:srgbClr val="202122"/>
-                </a:solidFill>
-                <a:latin typeface="Calibri"/>
-              </a:rPr>
-              <a:t> for name in names:</a:t>
-            </a:r>
-          </a:p>
-          <a:p>
-            <a:pPr marL="274320" indent="-274320">
-              <a:spcAft>
-                <a:spcPts val="990"/>
-              </a:spcAft>
-              <a:buClr>
-                <a:srgbClr val="0645AD"/>
-              </a:buClr>
-              <a:buFont typeface="Arial"/>
-              <a:buChar char="•"/>
-            </a:pPr>
-            <a:r>
-              <a:rPr sz="2200" b="0">
-                <a:solidFill>
-                  <a:srgbClr val="202122"/>
-                </a:solidFill>
-                <a:latin typeface="Calibri"/>
-              </a:rPr>
-              <a:t>Cannot loop forever by mistake</a:t>
-            </a:r>
-          </a:p>
-        </p:txBody>
-      </p:sp>
-      <p:sp>
-        <p:nvSpPr>
-          <p:cNvPr id="10" name="Rounded Rectangle 9"/>
-          <p:cNvSpPr/>
-          <p:nvPr/>
-        </p:nvSpPr>
-        <p:spPr>
-          <a:xfrm>
-            <a:off x="6278727" y="1600200"/>
-            <a:ext cx="5364327" cy="640080"/>
-          </a:xfrm>
-          <a:prstGeom prst="roundRect">
-            <a:avLst>
-              <a:gd name="adj" fmla="val 15000"/>
-            </a:avLst>
-          </a:prstGeom>
-          <a:solidFill>
-            <a:srgbClr val="0645AD"/>
-          </a:solidFill>
-          <a:ln>
-            <a:noFill/>
-          </a:ln>
-          <a:effectLst/>
-        </p:spPr>
-        <p:style>
-          <a:lnRef idx="1">
-            <a:schemeClr val="accent1"/>
-          </a:lnRef>
-          <a:fillRef idx="3">
-            <a:schemeClr val="accent1"/>
-          </a:fillRef>
-          <a:effectRef idx="2">
-            <a:schemeClr val="accent1"/>
-          </a:effectRef>
-          <a:fontRef idx="minor">
-            <a:schemeClr val="lt1"/>
-          </a:fontRef>
-        </p:style>
-        <p:txBody>
-          <a:bodyPr rtlCol="0" anchor="ctr"/>
-          <a:lstStyle/>
-          <a:p/>
-        </p:txBody>
-      </p:sp>
-      <p:sp>
-        <p:nvSpPr>
-          <p:cNvPr id="11" name="TextBox 10"/>
+            <a:off x="8046720" y="2560320"/>
+            <a:ext cx="3291840" cy="365760"/>
+          </a:xfrm>
+          <a:prstGeom prst="rect">
+            <a:avLst/>
+          </a:prstGeom>
+          <a:noFill/>
+        </p:spPr>
+        <p:txBody>
+          <a:bodyPr wrap="square" anchor="t" lIns="0" rIns="0" tIns="0" bIns="0"/>
+          <a:lstStyle/>
+          <a:p>
+            <a:pPr algn="l"/>
+            <a:r>
+              <a:rPr sz="1300" b="1" i="0">
+                <a:solidFill>
+                  <a:srgbClr val="A9C8F0"/>
+                </a:solidFill>
+                <a:latin typeface="Calibri"/>
+              </a:rPr>
+              <a:t>EXAMPLE</a:t>
+            </a:r>
+          </a:p>
+        </p:txBody>
+      </p:sp>
+      <p:sp>
+        <p:nvSpPr>
+          <p:cNvPr id="10" name="TextBox 9"/>
           <p:cNvSpPr txBox="1"/>
           <p:nvPr/>
         </p:nvSpPr>
         <p:spPr>
           <a:xfrm>
-            <a:off x="6507327" y="1600200"/>
-            <a:ext cx="4907127" cy="640080"/>
-          </a:xfrm>
-          <a:prstGeom prst="rect">
-            <a:avLst/>
-          </a:prstGeom>
-          <a:noFill/>
-        </p:spPr>
-        <p:txBody>
-          <a:bodyPr wrap="square" anchor="ctr" lIns="0" rIns="0" tIns="0" bIns="0"/>
+            <a:off x="8046720" y="2971800"/>
+            <a:ext cx="3291840" cy="2971800"/>
+          </a:xfrm>
+          <a:prstGeom prst="rect">
+            <a:avLst/>
+          </a:prstGeom>
+          <a:noFill/>
+        </p:spPr>
+        <p:txBody>
+          <a:bodyPr wrap="square" anchor="t" lIns="0" rIns="0" tIns="0" bIns="0"/>
           <a:lstStyle/>
           <a:p>
             <a:pPr algn="l"/>
             <a:r>
-              <a:rPr sz="2000" b="1" i="0">
+              <a:rPr sz="1900" b="0" i="0">
                 <a:solidFill>
                   <a:srgbClr val="FFFFFF"/>
                 </a:solidFill>
-                <a:latin typeface="Calibri"/>
-              </a:rPr>
-              <a:t>Condition-controlled: while</a:t>
-            </a:r>
-          </a:p>
-        </p:txBody>
-      </p:sp>
-      <p:sp>
-        <p:nvSpPr>
-          <p:cNvPr id="12" name="Rounded Rectangle 11"/>
-          <p:cNvSpPr/>
-          <p:nvPr/>
-        </p:nvSpPr>
-        <p:spPr>
-          <a:xfrm>
-            <a:off x="6278727" y="2377440"/>
-            <a:ext cx="5364327" cy="3794760"/>
-          </a:xfrm>
-          <a:prstGeom prst="roundRect">
-            <a:avLst>
-              <a:gd name="adj" fmla="val 4000"/>
-            </a:avLst>
-          </a:prstGeom>
-          <a:solidFill>
-            <a:srgbClr val="EAF3FF"/>
-          </a:solidFill>
-          <a:ln>
-            <a:noFill/>
-          </a:ln>
-          <a:effectLst/>
-        </p:spPr>
-        <p:style>
-          <a:lnRef idx="1">
-            <a:schemeClr val="accent1"/>
-          </a:lnRef>
-          <a:fillRef idx="3">
-            <a:schemeClr val="accent1"/>
-          </a:fillRef>
-          <a:effectRef idx="2">
-            <a:schemeClr val="accent1"/>
-          </a:effectRef>
-          <a:fontRef idx="minor">
-            <a:schemeClr val="lt1"/>
-          </a:fontRef>
-        </p:style>
-        <p:txBody>
-          <a:bodyPr rtlCol="0" anchor="ctr"/>
-          <a:lstStyle/>
-          <a:p/>
-        </p:txBody>
-      </p:sp>
-      <p:sp>
-        <p:nvSpPr>
-          <p:cNvPr id="13" name="TextBox 12"/>
-          <p:cNvSpPr txBox="1"/>
-          <p:nvPr/>
-        </p:nvSpPr>
-        <p:spPr>
-          <a:xfrm>
-            <a:off x="6553047" y="2606040"/>
-            <a:ext cx="4815687" cy="3337560"/>
-          </a:xfrm>
-          <a:prstGeom prst="rect">
-            <a:avLst/>
-          </a:prstGeom>
-          <a:noFill/>
-        </p:spPr>
-        <p:txBody>
-          <a:bodyPr wrap="square" lIns="0" rIns="0" tIns="0" bIns="0">
-            <a:spAutoFit/>
-          </a:bodyPr>
-          <a:lstStyle/>
-          <a:p>
-            <a:pPr marL="274320" indent="-274320">
-              <a:spcAft>
-                <a:spcPts val="990"/>
-              </a:spcAft>
-              <a:buClr>
-                <a:srgbClr val="0645AD"/>
-              </a:buClr>
-              <a:buFont typeface="Arial"/>
-              <a:buChar char="•"/>
-            </a:pPr>
-            <a:r>
-              <a:rPr sz="2200" b="0">
-                <a:solidFill>
-                  <a:srgbClr val="202122"/>
-                </a:solidFill>
-                <a:latin typeface="Calibri"/>
-              </a:rPr>
-              <a:t>Repeats while a condition is True</a:t>
-            </a:r>
-          </a:p>
-          <a:p>
-            <a:pPr marL="274320" indent="-274320">
-              <a:spcAft>
-                <a:spcPts val="990"/>
-              </a:spcAft>
-              <a:buClr>
-                <a:srgbClr val="0645AD"/>
-              </a:buClr>
-              <a:buFont typeface="Arial"/>
-              <a:buChar char="•"/>
-            </a:pPr>
-            <a:r>
-              <a:rPr sz="2200" b="0">
-                <a:solidFill>
-                  <a:srgbClr val="202122"/>
-                </a:solidFill>
-                <a:latin typeface="Calibri"/>
-              </a:rPr>
-              <a:t>while guess != answer:</a:t>
-            </a:r>
-          </a:p>
-          <a:p>
-            <a:pPr marL="274320" indent="-274320">
-              <a:spcAft>
-                <a:spcPts val="990"/>
-              </a:spcAft>
-              <a:buClr>
-                <a:srgbClr val="0645AD"/>
-              </a:buClr>
-              <a:buFont typeface="Arial"/>
-              <a:buChar char="•"/>
-            </a:pPr>
-            <a:r>
-              <a:rPr sz="2200" b="0">
-                <a:solidFill>
-                  <a:srgbClr val="202122"/>
-                </a:solidFill>
-                <a:latin typeface="Calibri"/>
-              </a:rPr>
-              <a:t>Good when you do not know how many times</a:t>
-            </a:r>
-          </a:p>
-          <a:p>
-            <a:pPr marL="274320" indent="-274320">
-              <a:spcAft>
-                <a:spcPts val="990"/>
-              </a:spcAft>
-              <a:buClr>
-                <a:srgbClr val="0645AD"/>
-              </a:buClr>
-              <a:buFont typeface="Arial"/>
-              <a:buChar char="•"/>
-            </a:pPr>
-            <a:r>
-              <a:rPr sz="2200" b="1">
-                <a:solidFill>
-                  <a:srgbClr val="202122"/>
-                </a:solidFill>
-                <a:latin typeface="Calibri"/>
-              </a:rPr>
-              <a:t>Risk:</a:t>
-            </a:r>
-            <a:r>
-              <a:rPr sz="2200" b="0">
-                <a:solidFill>
-                  <a:srgbClr val="202122"/>
-                </a:solidFill>
-                <a:latin typeface="Calibri"/>
-              </a:rPr>
-              <a:t> an infinite loop if the condition never changes</a:t>
+                <a:latin typeface="Cambria"/>
+              </a:rPr>
+              <a:t>with open('scores.txt', 'a') as f: f.write('Ali,12\n') adds a score without deleting the others.</a:t>
             </a:r>
           </a:p>
         </p:txBody>
@@ -7798,7 +10704,7 @@
                 </a:solidFill>
                 <a:latin typeface="Cambria"/>
               </a:rPr>
-              <a:t>Check your understanding</a:t>
+              <a:t>Working with text files</a:t>
             </a:r>
           </a:p>
         </p:txBody>
@@ -7871,14 +10777,56 @@
       </p:sp>
       <p:sp>
         <p:nvSpPr>
-          <p:cNvPr id="6" name="Oval 5"/>
+          <p:cNvPr id="6" name="Rectangle 5"/>
           <p:cNvSpPr/>
           <p:nvPr/>
         </p:nvSpPr>
         <p:spPr>
           <a:xfrm>
-            <a:off x="548640" y="1618488"/>
-            <a:ext cx="411480" cy="411480"/>
+            <a:off x="1884006" y="2656332"/>
+            <a:ext cx="8423681" cy="36576"/>
+          </a:xfrm>
+          <a:prstGeom prst="rect">
+            <a:avLst/>
+          </a:prstGeom>
+          <a:solidFill>
+            <a:srgbClr val="A9C8F0"/>
+          </a:solidFill>
+          <a:ln>
+            <a:noFill/>
+          </a:ln>
+          <a:effectLst/>
+        </p:spPr>
+        <p:style>
+          <a:lnRef idx="1">
+            <a:schemeClr val="accent1"/>
+          </a:lnRef>
+          <a:fillRef idx="3">
+            <a:schemeClr val="accent1"/>
+          </a:fillRef>
+          <a:effectRef idx="2">
+            <a:schemeClr val="accent1"/>
+          </a:effectRef>
+          <a:fontRef idx="minor">
+            <a:schemeClr val="lt1"/>
+          </a:fontRef>
+        </p:style>
+        <p:txBody>
+          <a:bodyPr rtlCol="0" anchor="ctr"/>
+          <a:lstStyle/>
+          <a:p/>
+        </p:txBody>
+      </p:sp>
+      <p:sp>
+        <p:nvSpPr>
+          <p:cNvPr id="7" name="Oval 6"/>
+          <p:cNvSpPr/>
+          <p:nvPr/>
+        </p:nvSpPr>
+        <p:spPr>
+          <a:xfrm>
+            <a:off x="1563966" y="2354580"/>
+            <a:ext cx="640080" cy="640080"/>
           </a:xfrm>
           <a:prstGeom prst="ellipse">
             <a:avLst/>
@@ -7911,7 +10859,7 @@
           <a:p>
             <a:pPr algn="ctr"/>
             <a:r>
-              <a:rPr sz="1400" b="1">
+              <a:rPr sz="2000" b="1">
                 <a:solidFill>
                   <a:srgbClr val="202122"/>
                 </a:solidFill>
@@ -7924,14 +10872,14 @@
       </p:sp>
       <p:sp>
         <p:nvSpPr>
-          <p:cNvPr id="7" name="TextBox 6"/>
+          <p:cNvPr id="8" name="TextBox 7"/>
           <p:cNvSpPr txBox="1"/>
           <p:nvPr/>
         </p:nvSpPr>
         <p:spPr>
           <a:xfrm>
-            <a:off x="1234440" y="1600200"/>
-            <a:ext cx="10408615" cy="791870"/>
+            <a:off x="548640" y="3131820"/>
+            <a:ext cx="2670733" cy="731520"/>
           </a:xfrm>
           <a:prstGeom prst="rect">
             <a:avLst/>
@@ -7942,29 +10890,106 @@
           <a:bodyPr wrap="square" anchor="t" lIns="0" rIns="0" tIns="0" bIns="0"/>
           <a:lstStyle/>
           <a:p>
+            <a:pPr algn="ctr"/>
+            <a:r>
+              <a:rPr sz="1700" b="1" i="0">
+                <a:solidFill>
+                  <a:srgbClr val="03306E"/>
+                </a:solidFill>
+                <a:latin typeface="Calibri"/>
+              </a:rPr>
+              <a:t>Open</a:t>
+            </a:r>
+          </a:p>
+        </p:txBody>
+      </p:sp>
+      <p:sp>
+        <p:nvSpPr>
+          <p:cNvPr id="9" name="Rounded Rectangle 8"/>
+          <p:cNvSpPr/>
+          <p:nvPr/>
+        </p:nvSpPr>
+        <p:spPr>
+          <a:xfrm>
+            <a:off x="548640" y="3909060"/>
+            <a:ext cx="2670733" cy="1508760"/>
+          </a:xfrm>
+          <a:prstGeom prst="roundRect">
+            <a:avLst>
+              <a:gd name="adj" fmla="val 6000"/>
+            </a:avLst>
+          </a:prstGeom>
+          <a:solidFill>
+            <a:srgbClr val="EAF3FF"/>
+          </a:solidFill>
+          <a:ln>
+            <a:noFill/>
+          </a:ln>
+          <a:effectLst/>
+        </p:spPr>
+        <p:style>
+          <a:lnRef idx="1">
+            <a:schemeClr val="accent1"/>
+          </a:lnRef>
+          <a:fillRef idx="3">
+            <a:schemeClr val="accent1"/>
+          </a:fillRef>
+          <a:effectRef idx="2">
+            <a:schemeClr val="accent1"/>
+          </a:effectRef>
+          <a:fontRef idx="minor">
+            <a:schemeClr val="lt1"/>
+          </a:fontRef>
+        </p:style>
+        <p:txBody>
+          <a:bodyPr rtlCol="0" anchor="ctr"/>
+          <a:lstStyle/>
+          <a:p/>
+        </p:txBody>
+      </p:sp>
+      <p:sp>
+        <p:nvSpPr>
+          <p:cNvPr id="10" name="TextBox 9"/>
+          <p:cNvSpPr txBox="1"/>
+          <p:nvPr/>
+        </p:nvSpPr>
+        <p:spPr>
+          <a:xfrm>
+            <a:off x="685800" y="4046220"/>
+            <a:ext cx="2396413" cy="1234439"/>
+          </a:xfrm>
+          <a:prstGeom prst="rect">
+            <a:avLst/>
+          </a:prstGeom>
+          <a:noFill/>
+        </p:spPr>
+        <p:txBody>
+          <a:bodyPr wrap="square" anchor="t" lIns="0" rIns="0" tIns="0" bIns="0"/>
+          <a:lstStyle/>
+          <a:p>
             <a:pPr algn="l"/>
             <a:r>
-              <a:rPr sz="2200" b="0" i="0">
+              <a:rPr sz="1800" b="0" i="0">
                 <a:solidFill>
                   <a:srgbClr val="202122"/>
                 </a:solidFill>
                 <a:latin typeface="Calibri"/>
               </a:rPr>
-              <a:t>What does 20 % 6 evaluate to?</a:t>
-            </a:r>
-          </a:p>
-        </p:txBody>
-      </p:sp>
-      <p:sp>
-        <p:nvSpPr>
-          <p:cNvPr id="8" name="Oval 7"/>
+              <a:t>open('scores.txt', 'r') to read, 'w' to write, 'a' to append.</a:t>
+            </a:r>
+          </a:p>
+        </p:txBody>
+      </p:sp>
+      <p:sp>
+        <p:nvSpPr>
+          <p:cNvPr id="11" name="Oval 10"/>
           <p:cNvSpPr/>
           <p:nvPr/>
         </p:nvSpPr>
         <p:spPr>
           <a:xfrm>
-            <a:off x="548640" y="2574950"/>
-            <a:ext cx="411480" cy="411480"/>
+            <a:off x="4371860" y="2354580"/>
+            <a:ext cx="640080" cy="640080"/>
           </a:xfrm>
           <a:prstGeom prst="ellipse">
             <a:avLst/>
@@ -7997,7 +11022,7 @@
           <a:p>
             <a:pPr algn="ctr"/>
             <a:r>
-              <a:rPr sz="1400" b="1">
+              <a:rPr sz="2000" b="1">
                 <a:solidFill>
                   <a:srgbClr val="202122"/>
                 </a:solidFill>
@@ -8010,14 +11035,14 @@
       </p:sp>
       <p:sp>
         <p:nvSpPr>
-          <p:cNvPr id="9" name="TextBox 8"/>
+          <p:cNvPr id="12" name="TextBox 11"/>
           <p:cNvSpPr txBox="1"/>
           <p:nvPr/>
         </p:nvSpPr>
         <p:spPr>
           <a:xfrm>
-            <a:off x="1234440" y="2556662"/>
-            <a:ext cx="10408615" cy="791870"/>
+            <a:off x="3356533" y="3131820"/>
+            <a:ext cx="2670733" cy="731520"/>
           </a:xfrm>
           <a:prstGeom prst="rect">
             <a:avLst/>
@@ -8028,29 +11053,106 @@
           <a:bodyPr wrap="square" anchor="t" lIns="0" rIns="0" tIns="0" bIns="0"/>
           <a:lstStyle/>
           <a:p>
+            <a:pPr algn="ctr"/>
+            <a:r>
+              <a:rPr sz="1700" b="1" i="0">
+                <a:solidFill>
+                  <a:srgbClr val="03306E"/>
+                </a:solidFill>
+                <a:latin typeface="Calibri"/>
+              </a:rPr>
+              <a:t>Read or write</a:t>
+            </a:r>
+          </a:p>
+        </p:txBody>
+      </p:sp>
+      <p:sp>
+        <p:nvSpPr>
+          <p:cNvPr id="13" name="Rounded Rectangle 12"/>
+          <p:cNvSpPr/>
+          <p:nvPr/>
+        </p:nvSpPr>
+        <p:spPr>
+          <a:xfrm>
+            <a:off x="3356533" y="3909060"/>
+            <a:ext cx="2670733" cy="1508760"/>
+          </a:xfrm>
+          <a:prstGeom prst="roundRect">
+            <a:avLst>
+              <a:gd name="adj" fmla="val 6000"/>
+            </a:avLst>
+          </a:prstGeom>
+          <a:solidFill>
+            <a:srgbClr val="EAF3FF"/>
+          </a:solidFill>
+          <a:ln>
+            <a:noFill/>
+          </a:ln>
+          <a:effectLst/>
+        </p:spPr>
+        <p:style>
+          <a:lnRef idx="1">
+            <a:schemeClr val="accent1"/>
+          </a:lnRef>
+          <a:fillRef idx="3">
+            <a:schemeClr val="accent1"/>
+          </a:fillRef>
+          <a:effectRef idx="2">
+            <a:schemeClr val="accent1"/>
+          </a:effectRef>
+          <a:fontRef idx="minor">
+            <a:schemeClr val="lt1"/>
+          </a:fontRef>
+        </p:style>
+        <p:txBody>
+          <a:bodyPr rtlCol="0" anchor="ctr"/>
+          <a:lstStyle/>
+          <a:p/>
+        </p:txBody>
+      </p:sp>
+      <p:sp>
+        <p:nvSpPr>
+          <p:cNvPr id="14" name="TextBox 13"/>
+          <p:cNvSpPr txBox="1"/>
+          <p:nvPr/>
+        </p:nvSpPr>
+        <p:spPr>
+          <a:xfrm>
+            <a:off x="3493693" y="4046220"/>
+            <a:ext cx="2396413" cy="1234439"/>
+          </a:xfrm>
+          <a:prstGeom prst="rect">
+            <a:avLst/>
+          </a:prstGeom>
+          <a:noFill/>
+        </p:spPr>
+        <p:txBody>
+          <a:bodyPr wrap="square" anchor="t" lIns="0" rIns="0" tIns="0" bIns="0"/>
+          <a:lstStyle/>
+          <a:p>
             <a:pPr algn="l"/>
             <a:r>
-              <a:rPr sz="2200" b="0" i="0">
+              <a:rPr sz="1800" b="0" i="0">
                 <a:solidFill>
                   <a:srgbClr val="202122"/>
                 </a:solidFill>
                 <a:latin typeface="Calibri"/>
               </a:rPr>
-              <a:t>Which operator checks two values are not equal?</a:t>
-            </a:r>
-          </a:p>
-        </p:txBody>
-      </p:sp>
-      <p:sp>
-        <p:nvSpPr>
-          <p:cNvPr id="10" name="Oval 9"/>
+              <a:t>read(), readline(), readlines(), or write().</a:t>
+            </a:r>
+          </a:p>
+        </p:txBody>
+      </p:sp>
+      <p:sp>
+        <p:nvSpPr>
+          <p:cNvPr id="15" name="Oval 14"/>
           <p:cNvSpPr/>
           <p:nvPr/>
         </p:nvSpPr>
         <p:spPr>
           <a:xfrm>
-            <a:off x="548640" y="3531412"/>
-            <a:ext cx="411480" cy="411480"/>
+            <a:off x="7179754" y="2354580"/>
+            <a:ext cx="640080" cy="640080"/>
           </a:xfrm>
           <a:prstGeom prst="ellipse">
             <a:avLst/>
@@ -8083,7 +11185,7 @@
           <a:p>
             <a:pPr algn="ctr"/>
             <a:r>
-              <a:rPr sz="1400" b="1">
+              <a:rPr sz="2000" b="1">
                 <a:solidFill>
                   <a:srgbClr val="202122"/>
                 </a:solidFill>
@@ -8096,14 +11198,14 @@
       </p:sp>
       <p:sp>
         <p:nvSpPr>
-          <p:cNvPr id="11" name="TextBox 10"/>
+          <p:cNvPr id="16" name="TextBox 15"/>
           <p:cNvSpPr txBox="1"/>
           <p:nvPr/>
         </p:nvSpPr>
         <p:spPr>
           <a:xfrm>
-            <a:off x="1234440" y="3513124"/>
-            <a:ext cx="10408615" cy="791870"/>
+            <a:off x="6164427" y="3131820"/>
+            <a:ext cx="2670733" cy="731520"/>
           </a:xfrm>
           <a:prstGeom prst="rect">
             <a:avLst/>
@@ -8114,29 +11216,106 @@
           <a:bodyPr wrap="square" anchor="t" lIns="0" rIns="0" tIns="0" bIns="0"/>
           <a:lstStyle/>
           <a:p>
+            <a:pPr algn="ctr"/>
+            <a:r>
+              <a:rPr sz="1700" b="1" i="0">
+                <a:solidFill>
+                  <a:srgbClr val="03306E"/>
+                </a:solidFill>
+                <a:latin typeface="Calibri"/>
+              </a:rPr>
+              <a:t>Process</a:t>
+            </a:r>
+          </a:p>
+        </p:txBody>
+      </p:sp>
+      <p:sp>
+        <p:nvSpPr>
+          <p:cNvPr id="17" name="Rounded Rectangle 16"/>
+          <p:cNvSpPr/>
+          <p:nvPr/>
+        </p:nvSpPr>
+        <p:spPr>
+          <a:xfrm>
+            <a:off x="6164427" y="3909060"/>
+            <a:ext cx="2670733" cy="1508760"/>
+          </a:xfrm>
+          <a:prstGeom prst="roundRect">
+            <a:avLst>
+              <a:gd name="adj" fmla="val 6000"/>
+            </a:avLst>
+          </a:prstGeom>
+          <a:solidFill>
+            <a:srgbClr val="EAF3FF"/>
+          </a:solidFill>
+          <a:ln>
+            <a:noFill/>
+          </a:ln>
+          <a:effectLst/>
+        </p:spPr>
+        <p:style>
+          <a:lnRef idx="1">
+            <a:schemeClr val="accent1"/>
+          </a:lnRef>
+          <a:fillRef idx="3">
+            <a:schemeClr val="accent1"/>
+          </a:fillRef>
+          <a:effectRef idx="2">
+            <a:schemeClr val="accent1"/>
+          </a:effectRef>
+          <a:fontRef idx="minor">
+            <a:schemeClr val="lt1"/>
+          </a:fontRef>
+        </p:style>
+        <p:txBody>
+          <a:bodyPr rtlCol="0" anchor="ctr"/>
+          <a:lstStyle/>
+          <a:p/>
+        </p:txBody>
+      </p:sp>
+      <p:sp>
+        <p:nvSpPr>
+          <p:cNvPr id="18" name="TextBox 17"/>
+          <p:cNvSpPr txBox="1"/>
+          <p:nvPr/>
+        </p:nvSpPr>
+        <p:spPr>
+          <a:xfrm>
+            <a:off x="6301587" y="4046220"/>
+            <a:ext cx="2396413" cy="1234439"/>
+          </a:xfrm>
+          <a:prstGeom prst="rect">
+            <a:avLst/>
+          </a:prstGeom>
+          <a:noFill/>
+        </p:spPr>
+        <p:txBody>
+          <a:bodyPr wrap="square" anchor="t" lIns="0" rIns="0" tIns="0" bIns="0"/>
+          <a:lstStyle/>
+          <a:p>
             <a:pPr algn="l"/>
             <a:r>
-              <a:rPr sz="2200" b="0" i="0">
+              <a:rPr sz="1800" b="0" i="0">
                 <a:solidFill>
                   <a:srgbClr val="202122"/>
                 </a:solidFill>
                 <a:latin typeface="Calibri"/>
               </a:rPr>
-              <a:t>Which file mode adds to the end of a file without deleting it?</a:t>
-            </a:r>
-          </a:p>
-        </p:txBody>
-      </p:sp>
-      <p:sp>
-        <p:nvSpPr>
-          <p:cNvPr id="12" name="Oval 11"/>
+              <a:t>line.strip() and line.split(',') to tidy and split each line.</a:t>
+            </a:r>
+          </a:p>
+        </p:txBody>
+      </p:sp>
+      <p:sp>
+        <p:nvSpPr>
+          <p:cNvPr id="19" name="Oval 18"/>
           <p:cNvSpPr/>
           <p:nvPr/>
         </p:nvSpPr>
         <p:spPr>
           <a:xfrm>
-            <a:off x="548640" y="4487875"/>
-            <a:ext cx="411480" cy="411480"/>
+            <a:off x="9987648" y="2354580"/>
+            <a:ext cx="640080" cy="640080"/>
           </a:xfrm>
           <a:prstGeom prst="ellipse">
             <a:avLst/>
@@ -8169,7 +11348,7 @@
           <a:p>
             <a:pPr algn="ctr"/>
             <a:r>
-              <a:rPr sz="1400" b="1">
+              <a:rPr sz="2000" b="1">
                 <a:solidFill>
                   <a:srgbClr val="202122"/>
                 </a:solidFill>
@@ -8182,14 +11361,14 @@
       </p:sp>
       <p:sp>
         <p:nvSpPr>
-          <p:cNvPr id="13" name="TextBox 12"/>
+          <p:cNvPr id="20" name="TextBox 19"/>
           <p:cNvSpPr txBox="1"/>
           <p:nvPr/>
         </p:nvSpPr>
         <p:spPr>
           <a:xfrm>
-            <a:off x="1234440" y="4469587"/>
-            <a:ext cx="10408615" cy="791870"/>
+            <a:off x="8972321" y="3131820"/>
+            <a:ext cx="2670733" cy="731520"/>
           </a:xfrm>
           <a:prstGeom prst="rect">
             <a:avLst/>
@@ -8200,35 +11379,37 @@
           <a:bodyPr wrap="square" anchor="t" lIns="0" rIns="0" tIns="0" bIns="0"/>
           <a:lstStyle/>
           <a:p>
-            <a:pPr algn="l"/>
-            <a:r>
-              <a:rPr sz="2200" b="0" i="0">
-                <a:solidFill>
-                  <a:srgbClr val="202122"/>
-                </a:solidFill>
-                <a:latin typeface="Calibri"/>
-              </a:rPr>
-              <a:t>Which loop suits 'keep asking until the password is right'?</a:t>
-            </a:r>
-          </a:p>
-        </p:txBody>
-      </p:sp>
-      <p:sp>
-        <p:nvSpPr>
-          <p:cNvPr id="14" name="Oval 13"/>
+            <a:pPr algn="ctr"/>
+            <a:r>
+              <a:rPr sz="1700" b="1" i="0">
+                <a:solidFill>
+                  <a:srgbClr val="03306E"/>
+                </a:solidFill>
+                <a:latin typeface="Calibri"/>
+              </a:rPr>
+              <a:t>Close</a:t>
+            </a:r>
+          </a:p>
+        </p:txBody>
+      </p:sp>
+      <p:sp>
+        <p:nvSpPr>
+          <p:cNvPr id="21" name="Rounded Rectangle 20"/>
           <p:cNvSpPr/>
           <p:nvPr/>
         </p:nvSpPr>
         <p:spPr>
           <a:xfrm>
-            <a:off x="548640" y="5444337"/>
-            <a:ext cx="411480" cy="411480"/>
-          </a:xfrm>
-          <a:prstGeom prst="ellipse">
-            <a:avLst/>
+            <a:off x="8972321" y="3909060"/>
+            <a:ext cx="2670733" cy="1508760"/>
+          </a:xfrm>
+          <a:prstGeom prst="roundRect">
+            <a:avLst>
+              <a:gd name="adj" fmla="val 6000"/>
+            </a:avLst>
           </a:prstGeom>
           <a:solidFill>
-            <a:srgbClr val="F2B705"/>
+            <a:srgbClr val="EAF3FF"/>
           </a:solidFill>
           <a:ln>
             <a:noFill/>
@@ -8250,51 +11431,40 @@
           </a:fontRef>
         </p:style>
         <p:txBody>
-          <a:bodyPr rtlCol="0" anchor="ctr" lIns="0" rIns="0" tIns="0" bIns="0"/>
-          <a:lstStyle/>
-          <a:p>
-            <a:pPr algn="ctr"/>
-            <a:r>
-              <a:rPr sz="1400" b="1">
+          <a:bodyPr rtlCol="0" anchor="ctr"/>
+          <a:lstStyle/>
+          <a:p/>
+        </p:txBody>
+      </p:sp>
+      <p:sp>
+        <p:nvSpPr>
+          <p:cNvPr id="22" name="TextBox 21"/>
+          <p:cNvSpPr txBox="1"/>
+          <p:nvPr/>
+        </p:nvSpPr>
+        <p:spPr>
+          <a:xfrm>
+            <a:off x="9109481" y="4046220"/>
+            <a:ext cx="2396413" cy="1234439"/>
+          </a:xfrm>
+          <a:prstGeom prst="rect">
+            <a:avLst/>
+          </a:prstGeom>
+          <a:noFill/>
+        </p:spPr>
+        <p:txBody>
+          <a:bodyPr wrap="square" anchor="t" lIns="0" rIns="0" tIns="0" bIns="0"/>
+          <a:lstStyle/>
+          <a:p>
+            <a:pPr algn="l"/>
+            <a:r>
+              <a:rPr sz="1800" b="0" i="0">
                 <a:solidFill>
                   <a:srgbClr val="202122"/>
                 </a:solidFill>
                 <a:latin typeface="Calibri"/>
               </a:rPr>
-              <a:t>5</a:t>
-            </a:r>
-          </a:p>
-        </p:txBody>
-      </p:sp>
-      <p:sp>
-        <p:nvSpPr>
-          <p:cNvPr id="15" name="TextBox 14"/>
-          <p:cNvSpPr txBox="1"/>
-          <p:nvPr/>
-        </p:nvSpPr>
-        <p:spPr>
-          <a:xfrm>
-            <a:off x="1234440" y="5426049"/>
-            <a:ext cx="10408615" cy="791870"/>
-          </a:xfrm>
-          <a:prstGeom prst="rect">
-            <a:avLst/>
-          </a:prstGeom>
-          <a:noFill/>
-        </p:spPr>
-        <p:txBody>
-          <a:bodyPr wrap="square" anchor="t" lIns="0" rIns="0" tIns="0" bIns="0"/>
-          <a:lstStyle/>
-          <a:p>
-            <a:pPr algn="l"/>
-            <a:r>
-              <a:rPr sz="2200" b="0" i="0">
-                <a:solidFill>
-                  <a:srgbClr val="202122"/>
-                </a:solidFill>
-                <a:latin typeface="Calibri"/>
-              </a:rPr>
-              <a:t>Why must a file be closed?</a:t>
+              <a:t>close() so data is saved and the file is released.</a:t>
             </a:r>
           </a:p>
         </p:txBody>
@@ -8386,7 +11556,7 @@
                 </a:solidFill>
                 <a:latin typeface="Cambria"/>
               </a:rPr>
-              <a:t>Answers</a:t>
+              <a:t>Quick check: Working with text files</a:t>
             </a:r>
           </a:p>
         </p:txBody>
@@ -8465,8 +11635,8 @@
         </p:nvSpPr>
         <p:spPr>
           <a:xfrm>
-            <a:off x="548640" y="1618488"/>
-            <a:ext cx="411480" cy="411480"/>
+            <a:off x="548640" y="1691640"/>
+            <a:ext cx="502920" cy="502920"/>
           </a:xfrm>
           <a:prstGeom prst="ellipse">
             <a:avLst/>
@@ -8499,7 +11669,7 @@
           <a:p>
             <a:pPr algn="ctr"/>
             <a:r>
-              <a:rPr sz="1400" b="1">
+              <a:rPr sz="1600" b="1">
                 <a:solidFill>
                   <a:srgbClr val="202122"/>
                 </a:solidFill>
@@ -8518,8 +11688,8 @@
         </p:nvSpPr>
         <p:spPr>
           <a:xfrm>
-            <a:off x="1234440" y="1600200"/>
-            <a:ext cx="10408615" cy="791870"/>
+            <a:off x="1371600" y="1645920"/>
+            <a:ext cx="10271455" cy="1188720"/>
           </a:xfrm>
           <a:prstGeom prst="rect">
             <a:avLst/>
@@ -8532,24 +11702,13 @@
           <a:p>
             <a:pPr algn="l"/>
             <a:r>
-              <a:rPr sz="1800" b="0" i="0">
-                <a:solidFill>
-                  <a:srgbClr val="54595D"/>
-                </a:solidFill>
-                <a:latin typeface="Calibri"/>
-              </a:rPr>
-              <a:t>What does 20 % 6 evaluate to?</a:t>
-            </a:r>
-          </a:p>
-          <a:p>
-            <a:r>
-              <a:rPr sz="1800" b="1">
-                <a:solidFill>
-                  <a:srgbClr val="03306E"/>
-                </a:solidFill>
-                <a:latin typeface="Calibri"/>
-              </a:rPr>
-              <a:t>2.</a:t>
+              <a:rPr sz="2400" b="0" i="0">
+                <a:solidFill>
+                  <a:srgbClr val="202122"/>
+                </a:solidFill>
+                <a:latin typeface="Calibri"/>
+              </a:rPr>
+              <a:t>Which mode adds to a file without deleting it?</a:t>
             </a:r>
           </a:p>
         </p:txBody>
@@ -8562,8 +11721,8 @@
         </p:nvSpPr>
         <p:spPr>
           <a:xfrm>
-            <a:off x="548640" y="2574950"/>
-            <a:ext cx="411480" cy="411480"/>
+            <a:off x="548640" y="3108960"/>
+            <a:ext cx="502920" cy="502920"/>
           </a:xfrm>
           <a:prstGeom prst="ellipse">
             <a:avLst/>
@@ -8596,7 +11755,7 @@
           <a:p>
             <a:pPr algn="ctr"/>
             <a:r>
-              <a:rPr sz="1400" b="1">
+              <a:rPr sz="1600" b="1">
                 <a:solidFill>
                   <a:srgbClr val="202122"/>
                 </a:solidFill>
@@ -8615,8 +11774,8 @@
         </p:nvSpPr>
         <p:spPr>
           <a:xfrm>
-            <a:off x="1234440" y="2556662"/>
-            <a:ext cx="10408615" cy="791870"/>
+            <a:off x="1371600" y="3063240"/>
+            <a:ext cx="10271455" cy="1188720"/>
           </a:xfrm>
           <a:prstGeom prst="rect">
             <a:avLst/>
@@ -8629,24 +11788,13 @@
           <a:p>
             <a:pPr algn="l"/>
             <a:r>
-              <a:rPr sz="1800" b="0" i="0">
-                <a:solidFill>
-                  <a:srgbClr val="54595D"/>
-                </a:solidFill>
-                <a:latin typeface="Calibri"/>
-              </a:rPr>
-              <a:t>Which operator checks two values are not equal?</a:t>
-            </a:r>
-          </a:p>
-          <a:p>
-            <a:r>
-              <a:rPr sz="1800" b="1">
-                <a:solidFill>
-                  <a:srgbClr val="03306E"/>
-                </a:solidFill>
-                <a:latin typeface="Calibri"/>
-              </a:rPr>
-              <a:t>!=</a:t>
+              <a:rPr sz="2400" b="0" i="0">
+                <a:solidFill>
+                  <a:srgbClr val="202122"/>
+                </a:solidFill>
+                <a:latin typeface="Calibri"/>
+              </a:rPr>
+              <a:t>What does line.split(',') do?</a:t>
             </a:r>
           </a:p>
         </p:txBody>
@@ -8659,8 +11807,8 @@
         </p:nvSpPr>
         <p:spPr>
           <a:xfrm>
-            <a:off x="548640" y="3531412"/>
-            <a:ext cx="411480" cy="411480"/>
+            <a:off x="548640" y="4526280"/>
+            <a:ext cx="502920" cy="502920"/>
           </a:xfrm>
           <a:prstGeom prst="ellipse">
             <a:avLst/>
@@ -8693,7 +11841,7 @@
           <a:p>
             <a:pPr algn="ctr"/>
             <a:r>
-              <a:rPr sz="1400" b="1">
+              <a:rPr sz="1600" b="1">
                 <a:solidFill>
                   <a:srgbClr val="202122"/>
                 </a:solidFill>
@@ -8712,8 +11860,8 @@
         </p:nvSpPr>
         <p:spPr>
           <a:xfrm>
-            <a:off x="1234440" y="3513124"/>
-            <a:ext cx="10408615" cy="791870"/>
+            <a:off x="1371600" y="4480560"/>
+            <a:ext cx="10271455" cy="1188720"/>
           </a:xfrm>
           <a:prstGeom prst="rect">
             <a:avLst/>
@@ -8726,218 +11874,46 @@
           <a:p>
             <a:pPr algn="l"/>
             <a:r>
-              <a:rPr sz="1800" b="0" i="0">
+              <a:rPr sz="2400" b="0" i="0">
+                <a:solidFill>
+                  <a:srgbClr val="202122"/>
+                </a:solidFill>
+                <a:latin typeface="Calibri"/>
+              </a:rPr>
+              <a:t>What happens if you open an existing file with 'w'?</a:t>
+            </a:r>
+          </a:p>
+        </p:txBody>
+      </p:sp>
+      <p:sp>
+        <p:nvSpPr>
+          <p:cNvPr id="12" name="TextBox 11"/>
+          <p:cNvSpPr txBox="1"/>
+          <p:nvPr/>
+        </p:nvSpPr>
+        <p:spPr>
+          <a:xfrm>
+            <a:off x="548640" y="5852160"/>
+            <a:ext cx="11094415" cy="365760"/>
+          </a:xfrm>
+          <a:prstGeom prst="rect">
+            <a:avLst/>
+          </a:prstGeom>
+          <a:noFill/>
+        </p:spPr>
+        <p:txBody>
+          <a:bodyPr wrap="square" anchor="t" lIns="0" rIns="0" tIns="0" bIns="0"/>
+          <a:lstStyle/>
+          <a:p>
+            <a:pPr algn="l"/>
+            <a:r>
+              <a:rPr sz="1300" b="0" i="1">
                 <a:solidFill>
                   <a:srgbClr val="54595D"/>
                 </a:solidFill>
                 <a:latin typeface="Calibri"/>
               </a:rPr>
-              <a:t>Which file mode adds to the end of a file without deleting it?</a:t>
-            </a:r>
-          </a:p>
-          <a:p>
-            <a:r>
-              <a:rPr sz="1800" b="1">
-                <a:solidFill>
-                  <a:srgbClr val="03306E"/>
-                </a:solidFill>
-                <a:latin typeface="Calibri"/>
-              </a:rPr>
-              <a:t>'a' (append).</a:t>
-            </a:r>
-          </a:p>
-        </p:txBody>
-      </p:sp>
-      <p:sp>
-        <p:nvSpPr>
-          <p:cNvPr id="12" name="Oval 11"/>
-          <p:cNvSpPr/>
-          <p:nvPr/>
-        </p:nvSpPr>
-        <p:spPr>
-          <a:xfrm>
-            <a:off x="548640" y="4487875"/>
-            <a:ext cx="411480" cy="411480"/>
-          </a:xfrm>
-          <a:prstGeom prst="ellipse">
-            <a:avLst/>
-          </a:prstGeom>
-          <a:solidFill>
-            <a:srgbClr val="F2B705"/>
-          </a:solidFill>
-          <a:ln>
-            <a:noFill/>
-          </a:ln>
-          <a:effectLst/>
-        </p:spPr>
-        <p:style>
-          <a:lnRef idx="1">
-            <a:schemeClr val="accent1"/>
-          </a:lnRef>
-          <a:fillRef idx="3">
-            <a:schemeClr val="accent1"/>
-          </a:fillRef>
-          <a:effectRef idx="2">
-            <a:schemeClr val="accent1"/>
-          </a:effectRef>
-          <a:fontRef idx="minor">
-            <a:schemeClr val="lt1"/>
-          </a:fontRef>
-        </p:style>
-        <p:txBody>
-          <a:bodyPr rtlCol="0" anchor="ctr" lIns="0" rIns="0" tIns="0" bIns="0"/>
-          <a:lstStyle/>
-          <a:p>
-            <a:pPr algn="ctr"/>
-            <a:r>
-              <a:rPr sz="1400" b="1">
-                <a:solidFill>
-                  <a:srgbClr val="202122"/>
-                </a:solidFill>
-                <a:latin typeface="Calibri"/>
-              </a:rPr>
-              <a:t>4</a:t>
-            </a:r>
-          </a:p>
-        </p:txBody>
-      </p:sp>
-      <p:sp>
-        <p:nvSpPr>
-          <p:cNvPr id="13" name="TextBox 12"/>
-          <p:cNvSpPr txBox="1"/>
-          <p:nvPr/>
-        </p:nvSpPr>
-        <p:spPr>
-          <a:xfrm>
-            <a:off x="1234440" y="4469587"/>
-            <a:ext cx="10408615" cy="791870"/>
-          </a:xfrm>
-          <a:prstGeom prst="rect">
-            <a:avLst/>
-          </a:prstGeom>
-          <a:noFill/>
-        </p:spPr>
-        <p:txBody>
-          <a:bodyPr wrap="square" anchor="t" lIns="0" rIns="0" tIns="0" bIns="0"/>
-          <a:lstStyle/>
-          <a:p>
-            <a:pPr algn="l"/>
-            <a:r>
-              <a:rPr sz="1800" b="0" i="0">
-                <a:solidFill>
-                  <a:srgbClr val="54595D"/>
-                </a:solidFill>
-                <a:latin typeface="Calibri"/>
-              </a:rPr>
-              <a:t>Which loop suits 'keep asking until the password is right'?</a:t>
-            </a:r>
-          </a:p>
-          <a:p>
-            <a:r>
-              <a:rPr sz="1800" b="1">
-                <a:solidFill>
-                  <a:srgbClr val="03306E"/>
-                </a:solidFill>
-                <a:latin typeface="Calibri"/>
-              </a:rPr>
-              <a:t>A while loop.</a:t>
-            </a:r>
-          </a:p>
-        </p:txBody>
-      </p:sp>
-      <p:sp>
-        <p:nvSpPr>
-          <p:cNvPr id="14" name="Oval 13"/>
-          <p:cNvSpPr/>
-          <p:nvPr/>
-        </p:nvSpPr>
-        <p:spPr>
-          <a:xfrm>
-            <a:off x="548640" y="5444337"/>
-            <a:ext cx="411480" cy="411480"/>
-          </a:xfrm>
-          <a:prstGeom prst="ellipse">
-            <a:avLst/>
-          </a:prstGeom>
-          <a:solidFill>
-            <a:srgbClr val="F2B705"/>
-          </a:solidFill>
-          <a:ln>
-            <a:noFill/>
-          </a:ln>
-          <a:effectLst/>
-        </p:spPr>
-        <p:style>
-          <a:lnRef idx="1">
-            <a:schemeClr val="accent1"/>
-          </a:lnRef>
-          <a:fillRef idx="3">
-            <a:schemeClr val="accent1"/>
-          </a:fillRef>
-          <a:effectRef idx="2">
-            <a:schemeClr val="accent1"/>
-          </a:effectRef>
-          <a:fontRef idx="minor">
-            <a:schemeClr val="lt1"/>
-          </a:fontRef>
-        </p:style>
-        <p:txBody>
-          <a:bodyPr rtlCol="0" anchor="ctr" lIns="0" rIns="0" tIns="0" bIns="0"/>
-          <a:lstStyle/>
-          <a:p>
-            <a:pPr algn="ctr"/>
-            <a:r>
-              <a:rPr sz="1400" b="1">
-                <a:solidFill>
-                  <a:srgbClr val="202122"/>
-                </a:solidFill>
-                <a:latin typeface="Calibri"/>
-              </a:rPr>
-              <a:t>5</a:t>
-            </a:r>
-          </a:p>
-        </p:txBody>
-      </p:sp>
-      <p:sp>
-        <p:nvSpPr>
-          <p:cNvPr id="15" name="TextBox 14"/>
-          <p:cNvSpPr txBox="1"/>
-          <p:nvPr/>
-        </p:nvSpPr>
-        <p:spPr>
-          <a:xfrm>
-            <a:off x="1234440" y="5426049"/>
-            <a:ext cx="10408615" cy="791870"/>
-          </a:xfrm>
-          <a:prstGeom prst="rect">
-            <a:avLst/>
-          </a:prstGeom>
-          <a:noFill/>
-        </p:spPr>
-        <p:txBody>
-          <a:bodyPr wrap="square" anchor="t" lIns="0" rIns="0" tIns="0" bIns="0"/>
-          <a:lstStyle/>
-          <a:p>
-            <a:pPr algn="l"/>
-            <a:r>
-              <a:rPr sz="1800" b="0" i="0">
-                <a:solidFill>
-                  <a:srgbClr val="54595D"/>
-                </a:solidFill>
-                <a:latin typeface="Calibri"/>
-              </a:rPr>
-              <a:t>Why must a file be closed?</a:t>
-            </a:r>
-          </a:p>
-          <a:p>
-            <a:r>
-              <a:rPr sz="1800" b="1">
-                <a:solidFill>
-                  <a:srgbClr val="03306E"/>
-                </a:solidFill>
-                <a:latin typeface="Calibri"/>
-              </a:rPr>
-              <a:t>So data is saved and the file is released.</a:t>
+              <a:t>Answer on mini whiteboards or in your book. Answers are in the speaker notes.</a:t>
             </a:r>
           </a:p>
         </p:txBody>
@@ -9029,7 +12005,7 @@
                 </a:solidFill>
                 <a:latin typeface="Cambria"/>
               </a:rPr>
-              <a:t>Activity: High score table</a:t>
+              <a:t>Selection</a:t>
             </a:r>
           </a:p>
         </p:txBody>
@@ -9108,13 +12084,55 @@
         </p:nvSpPr>
         <p:spPr>
           <a:xfrm>
-            <a:off x="548640" y="1508760"/>
-            <a:ext cx="2011680" cy="457200"/>
+            <a:off x="548640" y="1600200"/>
+            <a:ext cx="3515258" cy="4572000"/>
           </a:xfrm>
           <a:prstGeom prst="roundRect">
             <a:avLst>
-              <a:gd name="adj" fmla="val 50000"/>
+              <a:gd name="adj" fmla="val 6000"/>
             </a:avLst>
+          </a:prstGeom>
+          <a:solidFill>
+            <a:srgbClr val="EAF3FF"/>
+          </a:solidFill>
+          <a:ln>
+            <a:noFill/>
+          </a:ln>
+          <a:effectLst/>
+        </p:spPr>
+        <p:style>
+          <a:lnRef idx="1">
+            <a:schemeClr val="accent1"/>
+          </a:lnRef>
+          <a:fillRef idx="3">
+            <a:schemeClr val="accent1"/>
+          </a:fillRef>
+          <a:effectRef idx="2">
+            <a:schemeClr val="accent1"/>
+          </a:effectRef>
+          <a:fontRef idx="minor">
+            <a:schemeClr val="lt1"/>
+          </a:fontRef>
+        </p:style>
+        <p:txBody>
+          <a:bodyPr rtlCol="0" anchor="ctr"/>
+          <a:lstStyle/>
+          <a:p/>
+        </p:txBody>
+      </p:sp>
+      <p:sp>
+        <p:nvSpPr>
+          <p:cNvPr id="7" name="Oval 6"/>
+          <p:cNvSpPr/>
+          <p:nvPr/>
+        </p:nvSpPr>
+        <p:spPr>
+          <a:xfrm>
+            <a:off x="777240" y="1828800"/>
+            <a:ext cx="457200" cy="457200"/>
+          </a:xfrm>
+          <a:prstGeom prst="ellipse">
+            <a:avLst/>
           </a:prstGeom>
           <a:solidFill>
             <a:srgbClr val="F2B705"/>
@@ -9139,40 +12157,18 @@
           </a:fontRef>
         </p:style>
         <p:txBody>
-          <a:bodyPr rtlCol="0" anchor="ctr"/>
-          <a:lstStyle/>
-          <a:p/>
-        </p:txBody>
-      </p:sp>
-      <p:sp>
-        <p:nvSpPr>
-          <p:cNvPr id="7" name="TextBox 6"/>
-          <p:cNvSpPr txBox="1"/>
-          <p:nvPr/>
-        </p:nvSpPr>
-        <p:spPr>
-          <a:xfrm>
-            <a:off x="548640" y="1508760"/>
-            <a:ext cx="2011680" cy="457200"/>
-          </a:xfrm>
-          <a:prstGeom prst="rect">
-            <a:avLst/>
-          </a:prstGeom>
-          <a:noFill/>
-        </p:spPr>
-        <p:txBody>
-          <a:bodyPr wrap="square" anchor="ctr" lIns="0" rIns="0" tIns="0" bIns="0"/>
+          <a:bodyPr rtlCol="0" anchor="ctr" lIns="0" rIns="0" tIns="0" bIns="0"/>
           <a:lstStyle/>
           <a:p>
             <a:pPr algn="ctr"/>
             <a:r>
-              <a:rPr sz="1400" b="1" i="0">
+              <a:rPr sz="1500" b="1">
                 <a:solidFill>
                   <a:srgbClr val="202122"/>
                 </a:solidFill>
                 <a:latin typeface="Calibri"/>
               </a:rPr>
-              <a:t>30 minutes</a:t>
+              <a:t>1</a:t>
             </a:r>
           </a:p>
         </p:txBody>
@@ -9185,8 +12181,8 @@
         </p:nvSpPr>
         <p:spPr>
           <a:xfrm>
-            <a:off x="2743200" y="1508760"/>
-            <a:ext cx="4754880" cy="457200"/>
+            <a:off x="1371600" y="1801368"/>
+            <a:ext cx="2509418" cy="512064"/>
           </a:xfrm>
           <a:prstGeom prst="rect">
             <a:avLst/>
@@ -9199,375 +12195,64 @@
           <a:p>
             <a:pPr algn="l"/>
             <a:r>
-              <a:rPr sz="1400" b="0" i="1">
-                <a:solidFill>
-                  <a:srgbClr val="54595D"/>
-                </a:solidFill>
-                <a:latin typeface="Calibri"/>
-              </a:rPr>
-              <a:t>Individual, in Python</a:t>
-            </a:r>
-          </a:p>
-        </p:txBody>
-      </p:sp>
-      <p:sp>
-        <p:nvSpPr>
-          <p:cNvPr id="9" name="Oval 8"/>
+              <a:rPr sz="1900" b="1" i="0">
+                <a:solidFill>
+                  <a:srgbClr val="03306E"/>
+                </a:solidFill>
+                <a:latin typeface="Calibri"/>
+              </a:rPr>
+              <a:t>if / elif / else</a:t>
+            </a:r>
+          </a:p>
+        </p:txBody>
+      </p:sp>
+      <p:sp>
+        <p:nvSpPr>
+          <p:cNvPr id="9" name="TextBox 8"/>
+          <p:cNvSpPr txBox="1"/>
+          <p:nvPr/>
+        </p:nvSpPr>
+        <p:spPr>
+          <a:xfrm>
+            <a:off x="777240" y="2468880"/>
+            <a:ext cx="3058058" cy="3566160"/>
+          </a:xfrm>
+          <a:prstGeom prst="rect">
+            <a:avLst/>
+          </a:prstGeom>
+          <a:noFill/>
+        </p:spPr>
+        <p:txBody>
+          <a:bodyPr wrap="square" anchor="t" lIns="0" rIns="0" tIns="0" bIns="0"/>
+          <a:lstStyle/>
+          <a:p>
+            <a:pPr algn="l"/>
+            <a:r>
+              <a:rPr sz="2000" b="0" i="0">
+                <a:solidFill>
+                  <a:srgbClr val="202122"/>
+                </a:solidFill>
+                <a:latin typeface="Calibri"/>
+              </a:rPr>
+              <a:t>Checks conditions in order and runs the first block that is True.</a:t>
+            </a:r>
+          </a:p>
+        </p:txBody>
+      </p:sp>
+      <p:sp>
+        <p:nvSpPr>
+          <p:cNvPr id="10" name="Rounded Rectangle 9"/>
           <p:cNvSpPr/>
           <p:nvPr/>
         </p:nvSpPr>
         <p:spPr>
           <a:xfrm>
-            <a:off x="548640" y="2482596"/>
-            <a:ext cx="384048" cy="384048"/>
-          </a:xfrm>
-          <a:prstGeom prst="ellipse">
-            <a:avLst/>
-          </a:prstGeom>
-          <a:solidFill>
-            <a:srgbClr val="0645AD"/>
-          </a:solidFill>
-          <a:ln>
-            <a:noFill/>
-          </a:ln>
-          <a:effectLst/>
-        </p:spPr>
-        <p:style>
-          <a:lnRef idx="1">
-            <a:schemeClr val="accent1"/>
-          </a:lnRef>
-          <a:fillRef idx="3">
-            <a:schemeClr val="accent1"/>
-          </a:fillRef>
-          <a:effectRef idx="2">
-            <a:schemeClr val="accent1"/>
-          </a:effectRef>
-          <a:fontRef idx="minor">
-            <a:schemeClr val="lt1"/>
-          </a:fontRef>
-        </p:style>
-        <p:txBody>
-          <a:bodyPr rtlCol="0" anchor="ctr" lIns="0" rIns="0" tIns="0" bIns="0"/>
-          <a:lstStyle/>
-          <a:p>
-            <a:pPr algn="ctr"/>
-            <a:r>
-              <a:rPr sz="1300" b="1">
-                <a:solidFill>
-                  <a:srgbClr val="FFFFFF"/>
-                </a:solidFill>
-                <a:latin typeface="Calibri"/>
-              </a:rPr>
-              <a:t>1</a:t>
-            </a:r>
-          </a:p>
-        </p:txBody>
-      </p:sp>
-      <p:sp>
-        <p:nvSpPr>
-          <p:cNvPr id="10" name="TextBox 9"/>
-          <p:cNvSpPr txBox="1"/>
-          <p:nvPr/>
-        </p:nvSpPr>
-        <p:spPr>
-          <a:xfrm>
-            <a:off x="1143000" y="2240280"/>
-            <a:ext cx="5943600" cy="868680"/>
-          </a:xfrm>
-          <a:prstGeom prst="rect">
-            <a:avLst/>
-          </a:prstGeom>
-          <a:noFill/>
-        </p:spPr>
-        <p:txBody>
-          <a:bodyPr wrap="square" anchor="ctr" lIns="0" rIns="0" tIns="0" bIns="0"/>
-          <a:lstStyle/>
-          <a:p>
-            <a:pPr algn="l"/>
-            <a:r>
-              <a:rPr sz="1700" b="0" i="0">
-                <a:solidFill>
-                  <a:srgbClr val="202122"/>
-                </a:solidFill>
-                <a:latin typeface="Calibri"/>
-              </a:rPr>
-              <a:t>Write a menu using match case: 1 add score, 2 show scores, 3 quit.</a:t>
-            </a:r>
-          </a:p>
-        </p:txBody>
-      </p:sp>
-      <p:sp>
-        <p:nvSpPr>
-          <p:cNvPr id="11" name="Oval 10"/>
-          <p:cNvSpPr/>
-          <p:nvPr/>
-        </p:nvSpPr>
-        <p:spPr>
-          <a:xfrm>
-            <a:off x="548640" y="3461004"/>
-            <a:ext cx="384048" cy="384048"/>
-          </a:xfrm>
-          <a:prstGeom prst="ellipse">
-            <a:avLst/>
-          </a:prstGeom>
-          <a:solidFill>
-            <a:srgbClr val="0645AD"/>
-          </a:solidFill>
-          <a:ln>
-            <a:noFill/>
-          </a:ln>
-          <a:effectLst/>
-        </p:spPr>
-        <p:style>
-          <a:lnRef idx="1">
-            <a:schemeClr val="accent1"/>
-          </a:lnRef>
-          <a:fillRef idx="3">
-            <a:schemeClr val="accent1"/>
-          </a:fillRef>
-          <a:effectRef idx="2">
-            <a:schemeClr val="accent1"/>
-          </a:effectRef>
-          <a:fontRef idx="minor">
-            <a:schemeClr val="lt1"/>
-          </a:fontRef>
-        </p:style>
-        <p:txBody>
-          <a:bodyPr rtlCol="0" anchor="ctr" lIns="0" rIns="0" tIns="0" bIns="0"/>
-          <a:lstStyle/>
-          <a:p>
-            <a:pPr algn="ctr"/>
-            <a:r>
-              <a:rPr sz="1300" b="1">
-                <a:solidFill>
-                  <a:srgbClr val="FFFFFF"/>
-                </a:solidFill>
-                <a:latin typeface="Calibri"/>
-              </a:rPr>
-              <a:t>2</a:t>
-            </a:r>
-          </a:p>
-        </p:txBody>
-      </p:sp>
-      <p:sp>
-        <p:nvSpPr>
-          <p:cNvPr id="12" name="TextBox 11"/>
-          <p:cNvSpPr txBox="1"/>
-          <p:nvPr/>
-        </p:nvSpPr>
-        <p:spPr>
-          <a:xfrm>
-            <a:off x="1143000" y="3218688"/>
-            <a:ext cx="5943600" cy="868680"/>
-          </a:xfrm>
-          <a:prstGeom prst="rect">
-            <a:avLst/>
-          </a:prstGeom>
-          <a:noFill/>
-        </p:spPr>
-        <p:txBody>
-          <a:bodyPr wrap="square" anchor="ctr" lIns="0" rIns="0" tIns="0" bIns="0"/>
-          <a:lstStyle/>
-          <a:p>
-            <a:pPr algn="l"/>
-            <a:r>
-              <a:rPr sz="1700" b="0" i="0">
-                <a:solidFill>
-                  <a:srgbClr val="202122"/>
-                </a:solidFill>
-                <a:latin typeface="Calibri"/>
-              </a:rPr>
-              <a:t>Option 1 appends 'name,score' to scores.txt.</a:t>
-            </a:r>
-          </a:p>
-        </p:txBody>
-      </p:sp>
-      <p:sp>
-        <p:nvSpPr>
-          <p:cNvPr id="13" name="Oval 12"/>
-          <p:cNvSpPr/>
-          <p:nvPr/>
-        </p:nvSpPr>
-        <p:spPr>
-          <a:xfrm>
-            <a:off x="548640" y="4439412"/>
-            <a:ext cx="384048" cy="384048"/>
-          </a:xfrm>
-          <a:prstGeom prst="ellipse">
-            <a:avLst/>
-          </a:prstGeom>
-          <a:solidFill>
-            <a:srgbClr val="0645AD"/>
-          </a:solidFill>
-          <a:ln>
-            <a:noFill/>
-          </a:ln>
-          <a:effectLst/>
-        </p:spPr>
-        <p:style>
-          <a:lnRef idx="1">
-            <a:schemeClr val="accent1"/>
-          </a:lnRef>
-          <a:fillRef idx="3">
-            <a:schemeClr val="accent1"/>
-          </a:fillRef>
-          <a:effectRef idx="2">
-            <a:schemeClr val="accent1"/>
-          </a:effectRef>
-          <a:fontRef idx="minor">
-            <a:schemeClr val="lt1"/>
-          </a:fontRef>
-        </p:style>
-        <p:txBody>
-          <a:bodyPr rtlCol="0" anchor="ctr" lIns="0" rIns="0" tIns="0" bIns="0"/>
-          <a:lstStyle/>
-          <a:p>
-            <a:pPr algn="ctr"/>
-            <a:r>
-              <a:rPr sz="1300" b="1">
-                <a:solidFill>
-                  <a:srgbClr val="FFFFFF"/>
-                </a:solidFill>
-                <a:latin typeface="Calibri"/>
-              </a:rPr>
-              <a:t>3</a:t>
-            </a:r>
-          </a:p>
-        </p:txBody>
-      </p:sp>
-      <p:sp>
-        <p:nvSpPr>
-          <p:cNvPr id="14" name="TextBox 13"/>
-          <p:cNvSpPr txBox="1"/>
-          <p:nvPr/>
-        </p:nvSpPr>
-        <p:spPr>
-          <a:xfrm>
-            <a:off x="1143000" y="4197096"/>
-            <a:ext cx="5943600" cy="868680"/>
-          </a:xfrm>
-          <a:prstGeom prst="rect">
-            <a:avLst/>
-          </a:prstGeom>
-          <a:noFill/>
-        </p:spPr>
-        <p:txBody>
-          <a:bodyPr wrap="square" anchor="ctr" lIns="0" rIns="0" tIns="0" bIns="0"/>
-          <a:lstStyle/>
-          <a:p>
-            <a:pPr algn="l"/>
-            <a:r>
-              <a:rPr sz="1700" b="0" i="0">
-                <a:solidFill>
-                  <a:srgbClr val="202122"/>
-                </a:solidFill>
-                <a:latin typeface="Calibri"/>
-              </a:rPr>
-              <a:t>Option 2 reads the file and prints each score using split().</a:t>
-            </a:r>
-          </a:p>
-        </p:txBody>
-      </p:sp>
-      <p:sp>
-        <p:nvSpPr>
-          <p:cNvPr id="15" name="Oval 14"/>
-          <p:cNvSpPr/>
-          <p:nvPr/>
-        </p:nvSpPr>
-        <p:spPr>
-          <a:xfrm>
-            <a:off x="548640" y="5417820"/>
-            <a:ext cx="384048" cy="384048"/>
-          </a:xfrm>
-          <a:prstGeom prst="ellipse">
-            <a:avLst/>
-          </a:prstGeom>
-          <a:solidFill>
-            <a:srgbClr val="0645AD"/>
-          </a:solidFill>
-          <a:ln>
-            <a:noFill/>
-          </a:ln>
-          <a:effectLst/>
-        </p:spPr>
-        <p:style>
-          <a:lnRef idx="1">
-            <a:schemeClr val="accent1"/>
-          </a:lnRef>
-          <a:fillRef idx="3">
-            <a:schemeClr val="accent1"/>
-          </a:fillRef>
-          <a:effectRef idx="2">
-            <a:schemeClr val="accent1"/>
-          </a:effectRef>
-          <a:fontRef idx="minor">
-            <a:schemeClr val="lt1"/>
-          </a:fontRef>
-        </p:style>
-        <p:txBody>
-          <a:bodyPr rtlCol="0" anchor="ctr" lIns="0" rIns="0" tIns="0" bIns="0"/>
-          <a:lstStyle/>
-          <a:p>
-            <a:pPr algn="ctr"/>
-            <a:r>
-              <a:rPr sz="1300" b="1">
-                <a:solidFill>
-                  <a:srgbClr val="FFFFFF"/>
-                </a:solidFill>
-                <a:latin typeface="Calibri"/>
-              </a:rPr>
-              <a:t>4</a:t>
-            </a:r>
-          </a:p>
-        </p:txBody>
-      </p:sp>
-      <p:sp>
-        <p:nvSpPr>
-          <p:cNvPr id="16" name="TextBox 15"/>
-          <p:cNvSpPr txBox="1"/>
-          <p:nvPr/>
-        </p:nvSpPr>
-        <p:spPr>
-          <a:xfrm>
-            <a:off x="1143000" y="5175504"/>
-            <a:ext cx="5943600" cy="868680"/>
-          </a:xfrm>
-          <a:prstGeom prst="rect">
-            <a:avLst/>
-          </a:prstGeom>
-          <a:noFill/>
-        </p:spPr>
-        <p:txBody>
-          <a:bodyPr wrap="square" anchor="ctr" lIns="0" rIns="0" tIns="0" bIns="0"/>
-          <a:lstStyle/>
-          <a:p>
-            <a:pPr algn="l"/>
-            <a:r>
-              <a:rPr sz="1700" b="0" i="0">
-                <a:solidFill>
-                  <a:srgbClr val="202122"/>
-                </a:solidFill>
-                <a:latin typeface="Calibri"/>
-              </a:rPr>
-              <a:t>Loop the menu with while until the user quits.</a:t>
-            </a:r>
-          </a:p>
-        </p:txBody>
-      </p:sp>
-      <p:sp>
-        <p:nvSpPr>
-          <p:cNvPr id="17" name="Rounded Rectangle 16"/>
-          <p:cNvSpPr/>
-          <p:nvPr/>
-        </p:nvSpPr>
-        <p:spPr>
-          <a:xfrm>
-            <a:off x="7772400" y="1508760"/>
-            <a:ext cx="3867912" cy="4572000"/>
+            <a:off x="4338218" y="1600200"/>
+            <a:ext cx="3515258" cy="4572000"/>
           </a:xfrm>
           <a:prstGeom prst="roundRect">
             <a:avLst>
-              <a:gd name="adj" fmla="val 8000"/>
+              <a:gd name="adj" fmla="val 6000"/>
             </a:avLst>
           </a:prstGeom>
           <a:solidFill>
@@ -9600,14 +12285,100 @@
       </p:sp>
       <p:sp>
         <p:nvSpPr>
-          <p:cNvPr id="18" name="TextBox 17"/>
+          <p:cNvPr id="11" name="Oval 10"/>
+          <p:cNvSpPr/>
+          <p:nvPr/>
+        </p:nvSpPr>
+        <p:spPr>
+          <a:xfrm>
+            <a:off x="4566818" y="1828800"/>
+            <a:ext cx="457200" cy="457200"/>
+          </a:xfrm>
+          <a:prstGeom prst="ellipse">
+            <a:avLst/>
+          </a:prstGeom>
+          <a:solidFill>
+            <a:srgbClr val="F2B705"/>
+          </a:solidFill>
+          <a:ln>
+            <a:noFill/>
+          </a:ln>
+          <a:effectLst/>
+        </p:spPr>
+        <p:style>
+          <a:lnRef idx="1">
+            <a:schemeClr val="accent1"/>
+          </a:lnRef>
+          <a:fillRef idx="3">
+            <a:schemeClr val="accent1"/>
+          </a:fillRef>
+          <a:effectRef idx="2">
+            <a:schemeClr val="accent1"/>
+          </a:effectRef>
+          <a:fontRef idx="minor">
+            <a:schemeClr val="lt1"/>
+          </a:fontRef>
+        </p:style>
+        <p:txBody>
+          <a:bodyPr rtlCol="0" anchor="ctr" lIns="0" rIns="0" tIns="0" bIns="0"/>
+          <a:lstStyle/>
+          <a:p>
+            <a:pPr algn="ctr"/>
+            <a:r>
+              <a:rPr sz="1500" b="1">
+                <a:solidFill>
+                  <a:srgbClr val="202122"/>
+                </a:solidFill>
+                <a:latin typeface="Calibri"/>
+              </a:rPr>
+              <a:t>2</a:t>
+            </a:r>
+          </a:p>
+        </p:txBody>
+      </p:sp>
+      <p:sp>
+        <p:nvSpPr>
+          <p:cNvPr id="12" name="TextBox 11"/>
           <p:cNvSpPr txBox="1"/>
           <p:nvPr/>
         </p:nvSpPr>
         <p:spPr>
           <a:xfrm>
-            <a:off x="8046720" y="1737360"/>
-            <a:ext cx="3291840" cy="365760"/>
+            <a:off x="5161178" y="1801368"/>
+            <a:ext cx="2509418" cy="512064"/>
+          </a:xfrm>
+          <a:prstGeom prst="rect">
+            <a:avLst/>
+          </a:prstGeom>
+          <a:noFill/>
+        </p:spPr>
+        <p:txBody>
+          <a:bodyPr wrap="square" anchor="ctr" lIns="0" rIns="0" tIns="0" bIns="0"/>
+          <a:lstStyle/>
+          <a:p>
+            <a:pPr algn="l"/>
+            <a:r>
+              <a:rPr sz="1900" b="1" i="0">
+                <a:solidFill>
+                  <a:srgbClr val="03306E"/>
+                </a:solidFill>
+                <a:latin typeface="Calibri"/>
+              </a:rPr>
+              <a:t>match case</a:t>
+            </a:r>
+          </a:p>
+        </p:txBody>
+      </p:sp>
+      <p:sp>
+        <p:nvSpPr>
+          <p:cNvPr id="13" name="TextBox 12"/>
+          <p:cNvSpPr txBox="1"/>
+          <p:nvPr/>
+        </p:nvSpPr>
+        <p:spPr>
+          <a:xfrm>
+            <a:off x="4566818" y="2468880"/>
+            <a:ext cx="3058058" cy="3566160"/>
           </a:xfrm>
           <a:prstGeom prst="rect">
             <a:avLst/>
@@ -9620,120 +12391,176 @@
           <a:p>
             <a:pPr algn="l"/>
             <a:r>
-              <a:rPr sz="1300" b="1" i="0">
-                <a:solidFill>
-                  <a:srgbClr val="0645AD"/>
-                </a:solidFill>
-                <a:latin typeface="Calibri"/>
-              </a:rPr>
-              <a:t>SUCCESS CRITERIA</a:t>
-            </a:r>
-          </a:p>
-        </p:txBody>
-      </p:sp>
-      <p:sp>
-        <p:nvSpPr>
-          <p:cNvPr id="19" name="TextBox 18"/>
+              <a:rPr sz="2000" b="0" i="0">
+                <a:solidFill>
+                  <a:srgbClr val="202122"/>
+                </a:solidFill>
+                <a:latin typeface="Calibri"/>
+              </a:rPr>
+              <a:t>Compares one value against several patterns. Tidy for menus.</a:t>
+            </a:r>
+          </a:p>
+        </p:txBody>
+      </p:sp>
+      <p:sp>
+        <p:nvSpPr>
+          <p:cNvPr id="14" name="Rounded Rectangle 13"/>
+          <p:cNvSpPr/>
+          <p:nvPr/>
+        </p:nvSpPr>
+        <p:spPr>
+          <a:xfrm>
+            <a:off x="8127796" y="1600200"/>
+            <a:ext cx="3515258" cy="4572000"/>
+          </a:xfrm>
+          <a:prstGeom prst="roundRect">
+            <a:avLst>
+              <a:gd name="adj" fmla="val 6000"/>
+            </a:avLst>
+          </a:prstGeom>
+          <a:solidFill>
+            <a:srgbClr val="EAF3FF"/>
+          </a:solidFill>
+          <a:ln>
+            <a:noFill/>
+          </a:ln>
+          <a:effectLst/>
+        </p:spPr>
+        <p:style>
+          <a:lnRef idx="1">
+            <a:schemeClr val="accent1"/>
+          </a:lnRef>
+          <a:fillRef idx="3">
+            <a:schemeClr val="accent1"/>
+          </a:fillRef>
+          <a:effectRef idx="2">
+            <a:schemeClr val="accent1"/>
+          </a:effectRef>
+          <a:fontRef idx="minor">
+            <a:schemeClr val="lt1"/>
+          </a:fontRef>
+        </p:style>
+        <p:txBody>
+          <a:bodyPr rtlCol="0" anchor="ctr"/>
+          <a:lstStyle/>
+          <a:p/>
+        </p:txBody>
+      </p:sp>
+      <p:sp>
+        <p:nvSpPr>
+          <p:cNvPr id="15" name="Oval 14"/>
+          <p:cNvSpPr/>
+          <p:nvPr/>
+        </p:nvSpPr>
+        <p:spPr>
+          <a:xfrm>
+            <a:off x="8356396" y="1828800"/>
+            <a:ext cx="457200" cy="457200"/>
+          </a:xfrm>
+          <a:prstGeom prst="ellipse">
+            <a:avLst/>
+          </a:prstGeom>
+          <a:solidFill>
+            <a:srgbClr val="F2B705"/>
+          </a:solidFill>
+          <a:ln>
+            <a:noFill/>
+          </a:ln>
+          <a:effectLst/>
+        </p:spPr>
+        <p:style>
+          <a:lnRef idx="1">
+            <a:schemeClr val="accent1"/>
+          </a:lnRef>
+          <a:fillRef idx="3">
+            <a:schemeClr val="accent1"/>
+          </a:fillRef>
+          <a:effectRef idx="2">
+            <a:schemeClr val="accent1"/>
+          </a:effectRef>
+          <a:fontRef idx="minor">
+            <a:schemeClr val="lt1"/>
+          </a:fontRef>
+        </p:style>
+        <p:txBody>
+          <a:bodyPr rtlCol="0" anchor="ctr" lIns="0" rIns="0" tIns="0" bIns="0"/>
+          <a:lstStyle/>
+          <a:p>
+            <a:pPr algn="ctr"/>
+            <a:r>
+              <a:rPr sz="1500" b="1">
+                <a:solidFill>
+                  <a:srgbClr val="202122"/>
+                </a:solidFill>
+                <a:latin typeface="Calibri"/>
+              </a:rPr>
+              <a:t>3</a:t>
+            </a:r>
+          </a:p>
+        </p:txBody>
+      </p:sp>
+      <p:sp>
+        <p:nvSpPr>
+          <p:cNvPr id="16" name="TextBox 15"/>
           <p:cNvSpPr txBox="1"/>
           <p:nvPr/>
         </p:nvSpPr>
         <p:spPr>
           <a:xfrm>
-            <a:off x="8046720" y="2240280"/>
-            <a:ext cx="3337560" cy="3657600"/>
-          </a:xfrm>
-          <a:prstGeom prst="rect">
-            <a:avLst/>
-          </a:prstGeom>
-          <a:noFill/>
-        </p:spPr>
-        <p:txBody>
-          <a:bodyPr wrap="square" lIns="0" rIns="0" tIns="0" bIns="0">
-            <a:spAutoFit/>
-          </a:bodyPr>
-          <a:lstStyle/>
-          <a:p>
-            <a:pPr marL="274320" indent="-274320">
-              <a:spcAft>
-                <a:spcPts val="810"/>
-              </a:spcAft>
-              <a:buClr>
-                <a:srgbClr val="0645AD"/>
-              </a:buClr>
-              <a:buFont typeface="Arial"/>
-              <a:buChar char="•"/>
-            </a:pPr>
-            <a:r>
-              <a:rPr sz="1800" b="0">
+            <a:off x="8950756" y="1801368"/>
+            <a:ext cx="2509418" cy="512064"/>
+          </a:xfrm>
+          <a:prstGeom prst="rect">
+            <a:avLst/>
+          </a:prstGeom>
+          <a:noFill/>
+        </p:spPr>
+        <p:txBody>
+          <a:bodyPr wrap="square" anchor="ctr" lIns="0" rIns="0" tIns="0" bIns="0"/>
+          <a:lstStyle/>
+          <a:p>
+            <a:pPr algn="l"/>
+            <a:r>
+              <a:rPr sz="1900" b="1" i="0">
+                <a:solidFill>
+                  <a:srgbClr val="03306E"/>
+                </a:solidFill>
+                <a:latin typeface="Calibri"/>
+              </a:rPr>
+              <a:t>try except</a:t>
+            </a:r>
+          </a:p>
+        </p:txBody>
+      </p:sp>
+      <p:sp>
+        <p:nvSpPr>
+          <p:cNvPr id="17" name="TextBox 16"/>
+          <p:cNvSpPr txBox="1"/>
+          <p:nvPr/>
+        </p:nvSpPr>
+        <p:spPr>
+          <a:xfrm>
+            <a:off x="8356396" y="2468880"/>
+            <a:ext cx="3058058" cy="3566160"/>
+          </a:xfrm>
+          <a:prstGeom prst="rect">
+            <a:avLst/>
+          </a:prstGeom>
+          <a:noFill/>
+        </p:spPr>
+        <p:txBody>
+          <a:bodyPr wrap="square" anchor="t" lIns="0" rIns="0" tIns="0" bIns="0"/>
+          <a:lstStyle/>
+          <a:p>
+            <a:pPr algn="l"/>
+            <a:r>
+              <a:rPr sz="2000" b="0" i="0">
                 <a:solidFill>
                   <a:srgbClr val="202122"/>
                 </a:solidFill>
                 <a:latin typeface="Calibri"/>
               </a:rPr>
-              <a:t>Menu loops correctly</a:t>
-            </a:r>
-          </a:p>
-          <a:p>
-            <a:pPr marL="274320" indent="-274320">
-              <a:spcAft>
-                <a:spcPts val="810"/>
-              </a:spcAft>
-              <a:buClr>
-                <a:srgbClr val="0645AD"/>
-              </a:buClr>
-              <a:buFont typeface="Arial"/>
-              <a:buChar char="•"/>
-            </a:pPr>
-            <a:r>
-              <a:rPr sz="1800" b="0">
-                <a:solidFill>
-                  <a:srgbClr val="202122"/>
-                </a:solidFill>
-                <a:latin typeface="Calibri"/>
-              </a:rPr>
-              <a:t>File opened in the right modes</a:t>
-            </a:r>
-          </a:p>
-          <a:p>
-            <a:pPr marL="274320" indent="-274320">
-              <a:spcAft>
-                <a:spcPts val="810"/>
-              </a:spcAft>
-              <a:buClr>
-                <a:srgbClr val="0645AD"/>
-              </a:buClr>
-              <a:buFont typeface="Arial"/>
-              <a:buChar char="•"/>
-            </a:pPr>
-            <a:r>
-              <a:rPr sz="1800" b="0">
-                <a:solidFill>
-                  <a:srgbClr val="202122"/>
-                </a:solidFill>
-                <a:latin typeface="Calibri"/>
-              </a:rPr>
-              <a:t>Output is tidy</a:t>
-            </a:r>
-          </a:p>
-          <a:p>
-            <a:pPr marL="274320" indent="-274320">
-              <a:spcAft>
-                <a:spcPts val="810"/>
-              </a:spcAft>
-              <a:buClr>
-                <a:srgbClr val="0645AD"/>
-              </a:buClr>
-              <a:buFont typeface="Arial"/>
-              <a:buChar char="•"/>
-            </a:pPr>
-            <a:r>
-              <a:rPr sz="1800" b="0">
-                <a:solidFill>
-                  <a:srgbClr val="202122"/>
-                </a:solidFill>
-                <a:latin typeface="Calibri"/>
-              </a:rPr>
-              <a:t>Invalid menu options handled</a:t>
+              <a:t>Catches errors, e.g. when a user types letters instead of a number.</a:t>
             </a:r>
           </a:p>
         </p:txBody>
